--- a/LearningPath/Project-02-User-Service/slides/Project_2_User_Microservice_FastAPI.pptx
+++ b/LearningPath/Project-02-User-Service/slides/Project_2_User_Microservice_FastAPI.pptx
@@ -5,41 +5,41 @@
     <p:sldMasterId id="2147483648" r:id="rId1"/>
   </p:sldMasterIdLst>
   <p:sldIdLst>
-    <p:sldId id="256" r:id="rId7"/>
-    <p:sldId id="257" r:id="rId8"/>
-    <p:sldId id="258" r:id="rId9"/>
-    <p:sldId id="259" r:id="rId10"/>
-    <p:sldId id="260" r:id="rId11"/>
-    <p:sldId id="261" r:id="rId12"/>
-    <p:sldId id="262" r:id="rId13"/>
-    <p:sldId id="263" r:id="rId14"/>
-    <p:sldId id="264" r:id="rId15"/>
-    <p:sldId id="265" r:id="rId16"/>
-    <p:sldId id="266" r:id="rId17"/>
-    <p:sldId id="267" r:id="rId18"/>
-    <p:sldId id="268" r:id="rId19"/>
-    <p:sldId id="269" r:id="rId20"/>
-    <p:sldId id="270" r:id="rId21"/>
-    <p:sldId id="271" r:id="rId22"/>
-    <p:sldId id="272" r:id="rId23"/>
-    <p:sldId id="273" r:id="rId24"/>
-    <p:sldId id="274" r:id="rId25"/>
-    <p:sldId id="275" r:id="rId26"/>
-    <p:sldId id="276" r:id="rId27"/>
-    <p:sldId id="277" r:id="rId28"/>
-    <p:sldId id="278" r:id="rId29"/>
-    <p:sldId id="279" r:id="rId30"/>
-    <p:sldId id="280" r:id="rId31"/>
-    <p:sldId id="281" r:id="rId32"/>
-    <p:sldId id="282" r:id="rId33"/>
-    <p:sldId id="283" r:id="rId34"/>
-    <p:sldId id="284" r:id="rId35"/>
-    <p:sldId id="285" r:id="rId36"/>
-    <p:sldId id="286" r:id="rId37"/>
-    <p:sldId id="287" r:id="rId38"/>
-    <p:sldId id="288" r:id="rId39"/>
+    <p:sldId id="256" r:id="rId2"/>
+    <p:sldId id="257" r:id="rId3"/>
+    <p:sldId id="258" r:id="rId4"/>
+    <p:sldId id="259" r:id="rId5"/>
+    <p:sldId id="260" r:id="rId6"/>
+    <p:sldId id="261" r:id="rId7"/>
+    <p:sldId id="262" r:id="rId8"/>
+    <p:sldId id="263" r:id="rId9"/>
+    <p:sldId id="264" r:id="rId10"/>
+    <p:sldId id="265" r:id="rId11"/>
+    <p:sldId id="266" r:id="rId12"/>
+    <p:sldId id="267" r:id="rId13"/>
+    <p:sldId id="268" r:id="rId14"/>
+    <p:sldId id="269" r:id="rId15"/>
+    <p:sldId id="270" r:id="rId16"/>
+    <p:sldId id="271" r:id="rId17"/>
+    <p:sldId id="272" r:id="rId18"/>
+    <p:sldId id="273" r:id="rId19"/>
+    <p:sldId id="274" r:id="rId20"/>
+    <p:sldId id="275" r:id="rId21"/>
+    <p:sldId id="276" r:id="rId22"/>
+    <p:sldId id="277" r:id="rId23"/>
+    <p:sldId id="278" r:id="rId24"/>
+    <p:sldId id="279" r:id="rId25"/>
+    <p:sldId id="280" r:id="rId26"/>
+    <p:sldId id="281" r:id="rId27"/>
+    <p:sldId id="282" r:id="rId28"/>
+    <p:sldId id="283" r:id="rId29"/>
+    <p:sldId id="284" r:id="rId30"/>
+    <p:sldId id="285" r:id="rId31"/>
+    <p:sldId id="286" r:id="rId32"/>
+    <p:sldId id="287" r:id="rId33"/>
+    <p:sldId id="288" r:id="rId34"/>
   </p:sldIdLst>
-  <p:sldSz cx="12191695" cy="6858000" type="screen4x3"/>
+  <p:sldSz cx="12192000" cy="6858000"/>
   <p:notesSz cx="6858000" cy="9144000"/>
   <p:defaultTextStyle>
     <a:defPPr>
@@ -136,6 +136,22 @@
       </a:defRPr>
     </a:lvl9pPr>
   </p:defaultTextStyle>
+  <p:extLst>
+    <p:ext uri="{EFAFB233-063F-42B5-8137-9DF3F51BA10A}">
+      <p15:sldGuideLst xmlns:p15="http://schemas.microsoft.com/office/powerpoint/2012/main">
+        <p15:guide id="1" orient="horz" pos="2160">
+          <p15:clr>
+            <a:srgbClr val="A4A3A4"/>
+          </p15:clr>
+        </p15:guide>
+        <p15:guide id="2" pos="2880">
+          <p15:clr>
+            <a:srgbClr val="A4A3A4"/>
+          </p15:clr>
+        </p15:guide>
+      </p15:sldGuideLst>
+    </p:ext>
+  </p:extLst>
 </p:presentation>
 </file>
 
@@ -177,10 +193,9 @@
           <a:lstStyle/>
           <a:p>
             <a:r>
-              <a:rPr lang="en-US" smtClean="0"/>
+              <a:rPr lang="en-US"/>
               <a:t>Click to edit Master title style</a:t>
             </a:r>
-            <a:endParaRPr lang="en-US"/>
           </a:p>
         </p:txBody>
       </p:sp>
@@ -296,10 +311,9 @@
           </a:lstStyle>
           <a:p>
             <a:r>
-              <a:rPr lang="en-US" smtClean="0"/>
+              <a:rPr lang="en-US"/>
               <a:t>Click to edit Master subtitle style</a:t>
             </a:r>
-            <a:endParaRPr lang="en-US"/>
           </a:p>
         </p:txBody>
       </p:sp>
@@ -320,7 +334,7 @@
           <a:p>
             <a:fld id="{5BCAD085-E8A6-8845-BD4E-CB4CCA059FC4}" type="datetimeFigureOut">
               <a:rPr lang="en-US" smtClean="0"/>
-              <a:t>1/27/13</a:t>
+              <a:t>10/2/2026</a:t>
             </a:fld>
             <a:endParaRPr lang="en-US"/>
           </a:p>
@@ -414,10 +428,9 @@
           <a:lstStyle/>
           <a:p>
             <a:r>
-              <a:rPr lang="en-US" smtClean="0"/>
+              <a:rPr lang="en-US"/>
               <a:t>Click to edit Master title style</a:t>
             </a:r>
-            <a:endParaRPr lang="en-US"/>
           </a:p>
         </p:txBody>
       </p:sp>
@@ -438,38 +451,37 @@
           <a:p>
             <a:pPr lvl="0"/>
             <a:r>
-              <a:rPr lang="en-US" smtClean="0"/>
+              <a:rPr lang="en-US"/>
               <a:t>Click to edit Master text styles</a:t>
             </a:r>
           </a:p>
           <a:p>
             <a:pPr lvl="1"/>
             <a:r>
-              <a:rPr lang="en-US" smtClean="0"/>
+              <a:rPr lang="en-US"/>
               <a:t>Second level</a:t>
             </a:r>
           </a:p>
           <a:p>
             <a:pPr lvl="2"/>
             <a:r>
-              <a:rPr lang="en-US" smtClean="0"/>
+              <a:rPr lang="en-US"/>
               <a:t>Third level</a:t>
             </a:r>
           </a:p>
           <a:p>
             <a:pPr lvl="3"/>
             <a:r>
-              <a:rPr lang="en-US" smtClean="0"/>
+              <a:rPr lang="en-US"/>
               <a:t>Fourth level</a:t>
             </a:r>
           </a:p>
           <a:p>
             <a:pPr lvl="4"/>
             <a:r>
-              <a:rPr lang="en-US" smtClean="0"/>
+              <a:rPr lang="en-US"/>
               <a:t>Fifth level</a:t>
             </a:r>
-            <a:endParaRPr lang="en-US"/>
           </a:p>
         </p:txBody>
       </p:sp>
@@ -490,7 +502,7 @@
           <a:p>
             <a:fld id="{5BCAD085-E8A6-8845-BD4E-CB4CCA059FC4}" type="datetimeFigureOut">
               <a:rPr lang="en-US" smtClean="0"/>
-              <a:t>1/27/13</a:t>
+              <a:t>10/2/2026</a:t>
             </a:fld>
             <a:endParaRPr lang="en-US"/>
           </a:p>
@@ -589,10 +601,9 @@
           <a:lstStyle/>
           <a:p>
             <a:r>
-              <a:rPr lang="en-US" smtClean="0"/>
+              <a:rPr lang="en-US"/>
               <a:t>Click to edit Master title style</a:t>
             </a:r>
-            <a:endParaRPr lang="en-US"/>
           </a:p>
         </p:txBody>
       </p:sp>
@@ -618,38 +629,37 @@
           <a:p>
             <a:pPr lvl="0"/>
             <a:r>
-              <a:rPr lang="en-US" smtClean="0"/>
+              <a:rPr lang="en-US"/>
               <a:t>Click to edit Master text styles</a:t>
             </a:r>
           </a:p>
           <a:p>
             <a:pPr lvl="1"/>
             <a:r>
-              <a:rPr lang="en-US" smtClean="0"/>
+              <a:rPr lang="en-US"/>
               <a:t>Second level</a:t>
             </a:r>
           </a:p>
           <a:p>
             <a:pPr lvl="2"/>
             <a:r>
-              <a:rPr lang="en-US" smtClean="0"/>
+              <a:rPr lang="en-US"/>
               <a:t>Third level</a:t>
             </a:r>
           </a:p>
           <a:p>
             <a:pPr lvl="3"/>
             <a:r>
-              <a:rPr lang="en-US" smtClean="0"/>
+              <a:rPr lang="en-US"/>
               <a:t>Fourth level</a:t>
             </a:r>
           </a:p>
           <a:p>
             <a:pPr lvl="4"/>
             <a:r>
-              <a:rPr lang="en-US" smtClean="0"/>
+              <a:rPr lang="en-US"/>
               <a:t>Fifth level</a:t>
             </a:r>
-            <a:endParaRPr lang="en-US"/>
           </a:p>
         </p:txBody>
       </p:sp>
@@ -670,7 +680,7 @@
           <a:p>
             <a:fld id="{5BCAD085-E8A6-8845-BD4E-CB4CCA059FC4}" type="datetimeFigureOut">
               <a:rPr lang="en-US" smtClean="0"/>
-              <a:t>1/27/13</a:t>
+              <a:t>10/2/2026</a:t>
             </a:fld>
             <a:endParaRPr lang="en-US"/>
           </a:p>
@@ -764,10 +774,9 @@
           <a:lstStyle/>
           <a:p>
             <a:r>
-              <a:rPr lang="en-US" smtClean="0"/>
+              <a:rPr lang="en-US"/>
               <a:t>Click to edit Master title style</a:t>
             </a:r>
-            <a:endParaRPr lang="en-US"/>
           </a:p>
         </p:txBody>
       </p:sp>
@@ -788,38 +797,37 @@
           <a:p>
             <a:pPr lvl="0"/>
             <a:r>
-              <a:rPr lang="en-US" smtClean="0"/>
+              <a:rPr lang="en-US"/>
               <a:t>Click to edit Master text styles</a:t>
             </a:r>
           </a:p>
           <a:p>
             <a:pPr lvl="1"/>
             <a:r>
-              <a:rPr lang="en-US" smtClean="0"/>
+              <a:rPr lang="en-US"/>
               <a:t>Second level</a:t>
             </a:r>
           </a:p>
           <a:p>
             <a:pPr lvl="2"/>
             <a:r>
-              <a:rPr lang="en-US" smtClean="0"/>
+              <a:rPr lang="en-US"/>
               <a:t>Third level</a:t>
             </a:r>
           </a:p>
           <a:p>
             <a:pPr lvl="3"/>
             <a:r>
-              <a:rPr lang="en-US" smtClean="0"/>
+              <a:rPr lang="en-US"/>
               <a:t>Fourth level</a:t>
             </a:r>
           </a:p>
           <a:p>
             <a:pPr lvl="4"/>
             <a:r>
-              <a:rPr lang="en-US" smtClean="0"/>
+              <a:rPr lang="en-US"/>
               <a:t>Fifth level</a:t>
             </a:r>
-            <a:endParaRPr lang="en-US"/>
           </a:p>
         </p:txBody>
       </p:sp>
@@ -840,7 +848,7 @@
           <a:p>
             <a:fld id="{5BCAD085-E8A6-8845-BD4E-CB4CCA059FC4}" type="datetimeFigureOut">
               <a:rPr lang="en-US" smtClean="0"/>
-              <a:t>1/27/13</a:t>
+              <a:t>10/2/2026</a:t>
             </a:fld>
             <a:endParaRPr lang="en-US"/>
           </a:p>
@@ -943,10 +951,9 @@
           </a:lstStyle>
           <a:p>
             <a:r>
-              <a:rPr lang="en-US" smtClean="0"/>
+              <a:rPr lang="en-US"/>
               <a:t>Click to edit Master title style</a:t>
             </a:r>
-            <a:endParaRPr lang="en-US"/>
           </a:p>
         </p:txBody>
       </p:sp>
@@ -1063,7 +1070,7 @@
           <a:p>
             <a:pPr lvl="0"/>
             <a:r>
-              <a:rPr lang="en-US" smtClean="0"/>
+              <a:rPr lang="en-US"/>
               <a:t>Click to edit Master text styles</a:t>
             </a:r>
           </a:p>
@@ -1086,7 +1093,7 @@
           <a:p>
             <a:fld id="{5BCAD085-E8A6-8845-BD4E-CB4CCA059FC4}" type="datetimeFigureOut">
               <a:rPr lang="en-US" smtClean="0"/>
-              <a:t>1/27/13</a:t>
+              <a:t>10/2/2026</a:t>
             </a:fld>
             <a:endParaRPr lang="en-US"/>
           </a:p>
@@ -1180,10 +1187,9 @@
           <a:lstStyle/>
           <a:p>
             <a:r>
-              <a:rPr lang="en-US" smtClean="0"/>
+              <a:rPr lang="en-US"/>
               <a:t>Click to edit Master title style</a:t>
             </a:r>
-            <a:endParaRPr lang="en-US"/>
           </a:p>
         </p:txBody>
       </p:sp>
@@ -1237,38 +1243,37 @@
           <a:p>
             <a:pPr lvl="0"/>
             <a:r>
-              <a:rPr lang="en-US" smtClean="0"/>
+              <a:rPr lang="en-US"/>
               <a:t>Click to edit Master text styles</a:t>
             </a:r>
           </a:p>
           <a:p>
             <a:pPr lvl="1"/>
             <a:r>
-              <a:rPr lang="en-US" smtClean="0"/>
+              <a:rPr lang="en-US"/>
               <a:t>Second level</a:t>
             </a:r>
           </a:p>
           <a:p>
             <a:pPr lvl="2"/>
             <a:r>
-              <a:rPr lang="en-US" smtClean="0"/>
+              <a:rPr lang="en-US"/>
               <a:t>Third level</a:t>
             </a:r>
           </a:p>
           <a:p>
             <a:pPr lvl="3"/>
             <a:r>
-              <a:rPr lang="en-US" smtClean="0"/>
+              <a:rPr lang="en-US"/>
               <a:t>Fourth level</a:t>
             </a:r>
           </a:p>
           <a:p>
             <a:pPr lvl="4"/>
             <a:r>
-              <a:rPr lang="en-US" smtClean="0"/>
+              <a:rPr lang="en-US"/>
               <a:t>Fifth level</a:t>
             </a:r>
-            <a:endParaRPr lang="en-US"/>
           </a:p>
         </p:txBody>
       </p:sp>
@@ -1322,38 +1327,37 @@
           <a:p>
             <a:pPr lvl="0"/>
             <a:r>
-              <a:rPr lang="en-US" smtClean="0"/>
+              <a:rPr lang="en-US"/>
               <a:t>Click to edit Master text styles</a:t>
             </a:r>
           </a:p>
           <a:p>
             <a:pPr lvl="1"/>
             <a:r>
-              <a:rPr lang="en-US" smtClean="0"/>
+              <a:rPr lang="en-US"/>
               <a:t>Second level</a:t>
             </a:r>
           </a:p>
           <a:p>
             <a:pPr lvl="2"/>
             <a:r>
-              <a:rPr lang="en-US" smtClean="0"/>
+              <a:rPr lang="en-US"/>
               <a:t>Third level</a:t>
             </a:r>
           </a:p>
           <a:p>
             <a:pPr lvl="3"/>
             <a:r>
-              <a:rPr lang="en-US" smtClean="0"/>
+              <a:rPr lang="en-US"/>
               <a:t>Fourth level</a:t>
             </a:r>
           </a:p>
           <a:p>
             <a:pPr lvl="4"/>
             <a:r>
-              <a:rPr lang="en-US" smtClean="0"/>
+              <a:rPr lang="en-US"/>
               <a:t>Fifth level</a:t>
             </a:r>
-            <a:endParaRPr lang="en-US"/>
           </a:p>
         </p:txBody>
       </p:sp>
@@ -1374,7 +1378,7 @@
           <a:p>
             <a:fld id="{5BCAD085-E8A6-8845-BD4E-CB4CCA059FC4}" type="datetimeFigureOut">
               <a:rPr lang="en-US" smtClean="0"/>
-              <a:t>1/27/13</a:t>
+              <a:t>10/2/2026</a:t>
             </a:fld>
             <a:endParaRPr lang="en-US"/>
           </a:p>
@@ -1472,10 +1476,9 @@
           </a:lstStyle>
           <a:p>
             <a:r>
-              <a:rPr lang="en-US" smtClean="0"/>
+              <a:rPr lang="en-US"/>
               <a:t>Click to edit Master title style</a:t>
             </a:r>
-            <a:endParaRPr lang="en-US"/>
           </a:p>
         </p:txBody>
       </p:sp>
@@ -1538,7 +1541,7 @@
           <a:p>
             <a:pPr lvl="0"/>
             <a:r>
-              <a:rPr lang="en-US" smtClean="0"/>
+              <a:rPr lang="en-US"/>
               <a:t>Click to edit Master text styles</a:t>
             </a:r>
           </a:p>
@@ -1594,38 +1597,37 @@
           <a:p>
             <a:pPr lvl="0"/>
             <a:r>
-              <a:rPr lang="en-US" smtClean="0"/>
+              <a:rPr lang="en-US"/>
               <a:t>Click to edit Master text styles</a:t>
             </a:r>
           </a:p>
           <a:p>
             <a:pPr lvl="1"/>
             <a:r>
-              <a:rPr lang="en-US" smtClean="0"/>
+              <a:rPr lang="en-US"/>
               <a:t>Second level</a:t>
             </a:r>
           </a:p>
           <a:p>
             <a:pPr lvl="2"/>
             <a:r>
-              <a:rPr lang="en-US" smtClean="0"/>
+              <a:rPr lang="en-US"/>
               <a:t>Third level</a:t>
             </a:r>
           </a:p>
           <a:p>
             <a:pPr lvl="3"/>
             <a:r>
-              <a:rPr lang="en-US" smtClean="0"/>
+              <a:rPr lang="en-US"/>
               <a:t>Fourth level</a:t>
             </a:r>
           </a:p>
           <a:p>
             <a:pPr lvl="4"/>
             <a:r>
-              <a:rPr lang="en-US" smtClean="0"/>
+              <a:rPr lang="en-US"/>
               <a:t>Fifth level</a:t>
             </a:r>
-            <a:endParaRPr lang="en-US"/>
           </a:p>
         </p:txBody>
       </p:sp>
@@ -1688,7 +1690,7 @@
           <a:p>
             <a:pPr lvl="0"/>
             <a:r>
-              <a:rPr lang="en-US" smtClean="0"/>
+              <a:rPr lang="en-US"/>
               <a:t>Click to edit Master text styles</a:t>
             </a:r>
           </a:p>
@@ -1744,38 +1746,37 @@
           <a:p>
             <a:pPr lvl="0"/>
             <a:r>
-              <a:rPr lang="en-US" smtClean="0"/>
+              <a:rPr lang="en-US"/>
               <a:t>Click to edit Master text styles</a:t>
             </a:r>
           </a:p>
           <a:p>
             <a:pPr lvl="1"/>
             <a:r>
-              <a:rPr lang="en-US" smtClean="0"/>
+              <a:rPr lang="en-US"/>
               <a:t>Second level</a:t>
             </a:r>
           </a:p>
           <a:p>
             <a:pPr lvl="2"/>
             <a:r>
-              <a:rPr lang="en-US" smtClean="0"/>
+              <a:rPr lang="en-US"/>
               <a:t>Third level</a:t>
             </a:r>
           </a:p>
           <a:p>
             <a:pPr lvl="3"/>
             <a:r>
-              <a:rPr lang="en-US" smtClean="0"/>
+              <a:rPr lang="en-US"/>
               <a:t>Fourth level</a:t>
             </a:r>
           </a:p>
           <a:p>
             <a:pPr lvl="4"/>
             <a:r>
-              <a:rPr lang="en-US" smtClean="0"/>
+              <a:rPr lang="en-US"/>
               <a:t>Fifth level</a:t>
             </a:r>
-            <a:endParaRPr lang="en-US"/>
           </a:p>
         </p:txBody>
       </p:sp>
@@ -1796,7 +1797,7 @@
           <a:p>
             <a:fld id="{5BCAD085-E8A6-8845-BD4E-CB4CCA059FC4}" type="datetimeFigureOut">
               <a:rPr lang="en-US" smtClean="0"/>
-              <a:t>1/27/13</a:t>
+              <a:t>10/2/2026</a:t>
             </a:fld>
             <a:endParaRPr lang="en-US"/>
           </a:p>
@@ -1890,10 +1891,9 @@
           <a:lstStyle/>
           <a:p>
             <a:r>
-              <a:rPr lang="en-US" smtClean="0"/>
+              <a:rPr lang="en-US"/>
               <a:t>Click to edit Master title style</a:t>
             </a:r>
-            <a:endParaRPr lang="en-US"/>
           </a:p>
         </p:txBody>
       </p:sp>
@@ -1914,7 +1914,7 @@
           <a:p>
             <a:fld id="{5BCAD085-E8A6-8845-BD4E-CB4CCA059FC4}" type="datetimeFigureOut">
               <a:rPr lang="en-US" smtClean="0"/>
-              <a:t>1/27/13</a:t>
+              <a:t>10/2/2026</a:t>
             </a:fld>
             <a:endParaRPr lang="en-US"/>
           </a:p>
@@ -2009,7 +2009,7 @@
           <a:p>
             <a:fld id="{5BCAD085-E8A6-8845-BD4E-CB4CCA059FC4}" type="datetimeFigureOut">
               <a:rPr lang="en-US" smtClean="0"/>
-              <a:t>1/27/13</a:t>
+              <a:t>10/2/2026</a:t>
             </a:fld>
             <a:endParaRPr lang="en-US"/>
           </a:p>
@@ -2112,10 +2112,9 @@
           </a:lstStyle>
           <a:p>
             <a:r>
-              <a:rPr lang="en-US" smtClean="0"/>
+              <a:rPr lang="en-US"/>
               <a:t>Click to edit Master title style</a:t>
             </a:r>
-            <a:endParaRPr lang="en-US"/>
           </a:p>
         </p:txBody>
       </p:sp>
@@ -2169,38 +2168,37 @@
           <a:p>
             <a:pPr lvl="0"/>
             <a:r>
-              <a:rPr lang="en-US" smtClean="0"/>
+              <a:rPr lang="en-US"/>
               <a:t>Click to edit Master text styles</a:t>
             </a:r>
           </a:p>
           <a:p>
             <a:pPr lvl="1"/>
             <a:r>
-              <a:rPr lang="en-US" smtClean="0"/>
+              <a:rPr lang="en-US"/>
               <a:t>Second level</a:t>
             </a:r>
           </a:p>
           <a:p>
             <a:pPr lvl="2"/>
             <a:r>
-              <a:rPr lang="en-US" smtClean="0"/>
+              <a:rPr lang="en-US"/>
               <a:t>Third level</a:t>
             </a:r>
           </a:p>
           <a:p>
             <a:pPr lvl="3"/>
             <a:r>
-              <a:rPr lang="en-US" smtClean="0"/>
+              <a:rPr lang="en-US"/>
               <a:t>Fourth level</a:t>
             </a:r>
           </a:p>
           <a:p>
             <a:pPr lvl="4"/>
             <a:r>
-              <a:rPr lang="en-US" smtClean="0"/>
+              <a:rPr lang="en-US"/>
               <a:t>Fifth level</a:t>
             </a:r>
-            <a:endParaRPr lang="en-US"/>
           </a:p>
         </p:txBody>
       </p:sp>
@@ -2263,7 +2261,7 @@
           <a:p>
             <a:pPr lvl="0"/>
             <a:r>
-              <a:rPr lang="en-US" smtClean="0"/>
+              <a:rPr lang="en-US"/>
               <a:t>Click to edit Master text styles</a:t>
             </a:r>
           </a:p>
@@ -2286,7 +2284,7 @@
           <a:p>
             <a:fld id="{5BCAD085-E8A6-8845-BD4E-CB4CCA059FC4}" type="datetimeFigureOut">
               <a:rPr lang="en-US" smtClean="0"/>
-              <a:t>1/27/13</a:t>
+              <a:t>10/2/2026</a:t>
             </a:fld>
             <a:endParaRPr lang="en-US"/>
           </a:p>
@@ -2389,10 +2387,9 @@
           </a:lstStyle>
           <a:p>
             <a:r>
-              <a:rPr lang="en-US" smtClean="0"/>
+              <a:rPr lang="en-US"/>
               <a:t>Click to edit Master title style</a:t>
             </a:r>
-            <a:endParaRPr lang="en-US"/>
           </a:p>
         </p:txBody>
       </p:sp>
@@ -2516,7 +2513,7 @@
           <a:p>
             <a:pPr lvl="0"/>
             <a:r>
-              <a:rPr lang="en-US" smtClean="0"/>
+              <a:rPr lang="en-US"/>
               <a:t>Click to edit Master text styles</a:t>
             </a:r>
           </a:p>
@@ -2539,7 +2536,7 @@
           <a:p>
             <a:fld id="{5BCAD085-E8A6-8845-BD4E-CB4CCA059FC4}" type="datetimeFigureOut">
               <a:rPr lang="en-US" smtClean="0"/>
-              <a:t>1/27/13</a:t>
+              <a:t>10/2/2026</a:t>
             </a:fld>
             <a:endParaRPr lang="en-US"/>
           </a:p>
@@ -2648,10 +2645,9 @@
           <a:lstStyle/>
           <a:p>
             <a:r>
-              <a:rPr lang="en-US" smtClean="0"/>
+              <a:rPr lang="en-US"/>
               <a:t>Click to edit Master title style</a:t>
             </a:r>
-            <a:endParaRPr lang="en-US"/>
           </a:p>
         </p:txBody>
       </p:sp>
@@ -2682,38 +2678,37 @@
           <a:p>
             <a:pPr lvl="0"/>
             <a:r>
-              <a:rPr lang="en-US" smtClean="0"/>
+              <a:rPr lang="en-US"/>
               <a:t>Click to edit Master text styles</a:t>
             </a:r>
           </a:p>
           <a:p>
             <a:pPr lvl="1"/>
             <a:r>
-              <a:rPr lang="en-US" smtClean="0"/>
+              <a:rPr lang="en-US"/>
               <a:t>Second level</a:t>
             </a:r>
           </a:p>
           <a:p>
             <a:pPr lvl="2"/>
             <a:r>
-              <a:rPr lang="en-US" smtClean="0"/>
+              <a:rPr lang="en-US"/>
               <a:t>Third level</a:t>
             </a:r>
           </a:p>
           <a:p>
             <a:pPr lvl="3"/>
             <a:r>
-              <a:rPr lang="en-US" smtClean="0"/>
+              <a:rPr lang="en-US"/>
               <a:t>Fourth level</a:t>
             </a:r>
           </a:p>
           <a:p>
             <a:pPr lvl="4"/>
             <a:r>
-              <a:rPr lang="en-US" smtClean="0"/>
+              <a:rPr lang="en-US"/>
               <a:t>Fifth level</a:t>
             </a:r>
-            <a:endParaRPr lang="en-US"/>
           </a:p>
         </p:txBody>
       </p:sp>
@@ -2752,7 +2747,7 @@
           <a:p>
             <a:fld id="{5BCAD085-E8A6-8845-BD4E-CB4CCA059FC4}" type="datetimeFigureOut">
               <a:rPr lang="en-US" smtClean="0"/>
-              <a:t>1/27/13</a:t>
+              <a:t>10/2/2026</a:t>
             </a:fld>
             <a:endParaRPr lang="en-US"/>
           </a:p>
@@ -3111,7 +3106,7 @@
 </file>
 
 <file path=ppt/slides/slide1.xml><?xml version="1.0" encoding="utf-8"?>
-<p:sld xmlns:a="http://schemas.openxmlformats.org/drawingml/2006/main" xmlns:p="http://schemas.openxmlformats.org/presentationml/2006/main" xmlns:r="http://schemas.openxmlformats.org/officeDocument/2006/relationships">
+<p:sld xmlns:a="http://schemas.openxmlformats.org/drawingml/2006/main" xmlns:r="http://schemas.openxmlformats.org/officeDocument/2006/relationships" xmlns:p="http://schemas.openxmlformats.org/presentationml/2006/main">
   <p:cSld>
     <p:bg>
       <p:bgPr>
@@ -3127,7 +3122,14 @@
         <p:cNvGrpSpPr/>
         <p:nvPr/>
       </p:nvGrpSpPr>
-      <p:grpSpPr/>
+      <p:grpSpPr>
+        <a:xfrm>
+          <a:off x="0" y="0"/>
+          <a:ext cx="0" cy="0"/>
+          <a:chOff x="0" y="0"/>
+          <a:chExt cx="0" cy="0"/>
+        </a:xfrm>
+      </p:grpSpPr>
       <p:sp>
         <p:nvSpPr>
           <p:cNvPr id="2" name="TextBox 1"/>
@@ -3231,7 +3233,7 @@
 </file>
 
 <file path=ppt/slides/slide10.xml><?xml version="1.0" encoding="utf-8"?>
-<p:sld xmlns:a="http://schemas.openxmlformats.org/drawingml/2006/main" xmlns:p="http://schemas.openxmlformats.org/presentationml/2006/main" xmlns:r="http://schemas.openxmlformats.org/officeDocument/2006/relationships">
+<p:sld xmlns:a="http://schemas.openxmlformats.org/drawingml/2006/main" xmlns:r="http://schemas.openxmlformats.org/officeDocument/2006/relationships" xmlns:p="http://schemas.openxmlformats.org/presentationml/2006/main">
   <p:cSld>
     <p:bg>
       <p:bgPr>
@@ -3247,7 +3249,14 @@
         <p:cNvGrpSpPr/>
         <p:nvPr/>
       </p:nvGrpSpPr>
-      <p:grpSpPr/>
+      <p:grpSpPr>
+        <a:xfrm>
+          <a:off x="0" y="0"/>
+          <a:ext cx="0" cy="0"/>
+          <a:chOff x="0" y="0"/>
+          <a:chExt cx="0" cy="0"/>
+        </a:xfrm>
+      </p:grpSpPr>
       <p:sp>
         <p:nvSpPr>
           <p:cNvPr id="2" name="TextBox 1"/>
@@ -3323,6 +3332,7 @@
           <a:lstStyle/>
           <a:p>
             <a:pPr algn="ctr"/>
+            <a:endParaRPr/>
           </a:p>
         </p:txBody>
       </p:sp>
@@ -3455,6 +3465,7 @@
           <a:lstStyle/>
           <a:p>
             <a:pPr algn="ctr"/>
+            <a:endParaRPr/>
           </a:p>
         </p:txBody>
       </p:sp>
@@ -3556,6 +3567,7 @@
           <a:lstStyle/>
           <a:p>
             <a:pPr algn="ctr"/>
+            <a:endParaRPr/>
           </a:p>
         </p:txBody>
       </p:sp>
@@ -3653,6 +3665,7 @@
           <a:lstStyle/>
           <a:p>
             <a:pPr algn="ctr"/>
+            <a:endParaRPr/>
           </a:p>
         </p:txBody>
       </p:sp>
@@ -3806,7 +3819,7 @@
 </file>
 
 <file path=ppt/slides/slide11.xml><?xml version="1.0" encoding="utf-8"?>
-<p:sld xmlns:a="http://schemas.openxmlformats.org/drawingml/2006/main" xmlns:p="http://schemas.openxmlformats.org/presentationml/2006/main" xmlns:r="http://schemas.openxmlformats.org/officeDocument/2006/relationships">
+<p:sld xmlns:a="http://schemas.openxmlformats.org/drawingml/2006/main" xmlns:r="http://schemas.openxmlformats.org/officeDocument/2006/relationships" xmlns:p="http://schemas.openxmlformats.org/presentationml/2006/main">
   <p:cSld>
     <p:bg>
       <p:bgPr>
@@ -3822,7 +3835,14 @@
         <p:cNvGrpSpPr/>
         <p:nvPr/>
       </p:nvGrpSpPr>
-      <p:grpSpPr/>
+      <p:grpSpPr>
+        <a:xfrm>
+          <a:off x="0" y="0"/>
+          <a:ext cx="0" cy="0"/>
+          <a:chOff x="0" y="0"/>
+          <a:chExt cx="0" cy="0"/>
+        </a:xfrm>
+      </p:grpSpPr>
       <p:sp>
         <p:nvSpPr>
           <p:cNvPr id="2" name="TextBox 1"/>
@@ -3898,6 +3918,7 @@
           <a:lstStyle/>
           <a:p>
             <a:pPr algn="ctr"/>
+            <a:endParaRPr/>
           </a:p>
         </p:txBody>
       </p:sp>
@@ -3974,7 +3995,7 @@
           </a:fontRef>
         </p:style>
         <p:txBody>
-          <a:bodyPr rtlCol="0" anchor="ctr" wrap="square"/>
+          <a:bodyPr wrap="square" rtlCol="0" anchor="ctr"/>
           <a:lstStyle/>
           <a:p>
             <a:pPr algn="ctr">
@@ -3986,19 +4007,39 @@
               </a:defRPr>
             </a:pPr>
             <a:r>
-              <a:t># EmailStr uses an additional validation package.</a:t>
-            </a:r>
-            <a:br/>
-            <a:r>
+              <a:rPr dirty="0"/>
+              <a:t># </a:t>
+            </a:r>
+            <a:r>
+              <a:rPr dirty="0" err="1"/>
+              <a:t>EmailStr</a:t>
+            </a:r>
+            <a:r>
+              <a:rPr dirty="0"/>
+              <a:t> uses an additional validation package.</a:t>
+            </a:r>
+            <a:br>
+              <a:rPr dirty="0"/>
+            </a:br>
+            <a:r>
+              <a:rPr dirty="0"/>
               <a:t>pip install email-validator</a:t>
             </a:r>
-            <a:br/>
-            <a:br/>
-            <a:r>
+            <a:br>
+              <a:rPr dirty="0"/>
+            </a:br>
+            <a:br>
+              <a:rPr dirty="0"/>
+            </a:br>
+            <a:r>
+              <a:rPr dirty="0"/>
               <a:t># Re-create requirements.txt after adding dependencies.</a:t>
             </a:r>
-            <a:br/>
-            <a:r>
+            <a:br>
+              <a:rPr dirty="0"/>
+            </a:br>
+            <a:r>
+              <a:rPr dirty="0"/>
               <a:t>pip freeze &gt; requirements.txt</a:t>
             </a:r>
           </a:p>
@@ -4066,7 +4107,7 @@
 </file>
 
 <file path=ppt/slides/slide12.xml><?xml version="1.0" encoding="utf-8"?>
-<p:sld xmlns:a="http://schemas.openxmlformats.org/drawingml/2006/main" xmlns:p="http://schemas.openxmlformats.org/presentationml/2006/main" xmlns:r="http://schemas.openxmlformats.org/officeDocument/2006/relationships">
+<p:sld xmlns:a="http://schemas.openxmlformats.org/drawingml/2006/main" xmlns:r="http://schemas.openxmlformats.org/officeDocument/2006/relationships" xmlns:p="http://schemas.openxmlformats.org/presentationml/2006/main">
   <p:cSld>
     <p:bg>
       <p:bgPr>
@@ -4082,7 +4123,14 @@
         <p:cNvGrpSpPr/>
         <p:nvPr/>
       </p:nvGrpSpPr>
-      <p:grpSpPr/>
+      <p:grpSpPr>
+        <a:xfrm>
+          <a:off x="0" y="0"/>
+          <a:ext cx="0" cy="0"/>
+          <a:chOff x="0" y="0"/>
+          <a:chExt cx="0" cy="0"/>
+        </a:xfrm>
+      </p:grpSpPr>
       <p:sp>
         <p:nvSpPr>
           <p:cNvPr id="2" name="TextBox 1"/>
@@ -4193,6 +4241,7 @@
           <a:lstStyle/>
           <a:p>
             <a:pPr algn="ctr"/>
+            <a:endParaRPr/>
           </a:p>
         </p:txBody>
       </p:sp>
@@ -4269,7 +4318,7 @@
           </a:fontRef>
         </p:style>
         <p:txBody>
-          <a:bodyPr rtlCol="0" anchor="ctr" wrap="square"/>
+          <a:bodyPr wrap="square" rtlCol="0" anchor="ctr"/>
           <a:lstStyle/>
           <a:p>
             <a:pPr algn="ctr">
@@ -4281,49 +4330,108 @@
               </a:defRPr>
             </a:pPr>
             <a:r>
+              <a:rPr dirty="0"/>
               <a:t># This dictionary temporarily acts like our database.</a:t>
             </a:r>
-            <a:br/>
-            <a:r>
+            <a:br>
+              <a:rPr dirty="0"/>
+            </a:br>
+            <a:r>
+              <a:rPr dirty="0"/>
               <a:t>#</a:t>
             </a:r>
-            <a:br/>
-            <a:r>
+            <a:br>
+              <a:rPr dirty="0"/>
+            </a:br>
+            <a:r>
+              <a:rPr dirty="0"/>
               <a:t># Key   = integer user ID</a:t>
             </a:r>
-            <a:br/>
-            <a:r>
+            <a:br>
+              <a:rPr dirty="0"/>
+            </a:br>
+            <a:r>
+              <a:rPr dirty="0"/>
               <a:t># Value = user data</a:t>
             </a:r>
-            <a:br/>
-            <a:r>
+            <a:br>
+              <a:rPr dirty="0"/>
+            </a:br>
+            <a:r>
+              <a:rPr dirty="0"/>
               <a:t>#</a:t>
             </a:r>
-            <a:br/>
-            <a:r>
+            <a:br>
+              <a:rPr dirty="0"/>
+            </a:br>
+            <a:r>
+              <a:rPr dirty="0"/>
               <a:t># IMPORTANT:</a:t>
             </a:r>
-            <a:br/>
-            <a:r>
+            <a:br>
+              <a:rPr dirty="0"/>
+            </a:br>
+            <a:r>
+              <a:rPr dirty="0"/>
               <a:t># Data disappears whenever the application restarts.</a:t>
             </a:r>
-            <a:br/>
-            <a:r>
+            <a:br>
+              <a:rPr dirty="0"/>
+            </a:br>
+            <a:r>
+              <a:rPr dirty="0"/>
               <a:t># Project 3 will replace this with PostgreSQL.</a:t>
             </a:r>
-            <a:br/>
-            <a:r>
-              <a:t>users_db: dict[int, dict] = {}</a:t>
-            </a:r>
-            <a:br/>
-            <a:br/>
-            <a:br/>
-            <a:r>
+            <a:br>
+              <a:rPr dirty="0"/>
+            </a:br>
+            <a:r>
+              <a:rPr dirty="0" err="1"/>
+              <a:t>users_db</a:t>
+            </a:r>
+            <a:r>
+              <a:rPr dirty="0"/>
+              <a:t>: </a:t>
+            </a:r>
+            <a:r>
+              <a:rPr dirty="0" err="1"/>
+              <a:t>dict</a:t>
+            </a:r>
+            <a:r>
+              <a:rPr dirty="0"/>
+              <a:t>[int, </a:t>
+            </a:r>
+            <a:r>
+              <a:rPr dirty="0" err="1"/>
+              <a:t>dict</a:t>
+            </a:r>
+            <a:r>
+              <a:rPr dirty="0"/>
+              <a:t>] = {}</a:t>
+            </a:r>
+            <a:br>
+              <a:rPr dirty="0"/>
+            </a:br>
+            <a:br>
+              <a:rPr dirty="0"/>
+            </a:br>
+            <a:br>
+              <a:rPr dirty="0"/>
+            </a:br>
+            <a:r>
+              <a:rPr dirty="0"/>
               <a:t># Keep track of the next ID to assign.</a:t>
             </a:r>
-            <a:br/>
-            <a:r>
-              <a:t>next_user_id = 1</a:t>
+            <a:br>
+              <a:rPr dirty="0"/>
+            </a:br>
+            <a:r>
+              <a:rPr dirty="0" err="1"/>
+              <a:t>next_user_id</a:t>
+            </a:r>
+            <a:r>
+              <a:rPr dirty="0"/>
+              <a:t> = 1</a:t>
             </a:r>
           </a:p>
         </p:txBody>
@@ -4375,7 +4483,7 @@
 </file>
 
 <file path=ppt/slides/slide13.xml><?xml version="1.0" encoding="utf-8"?>
-<p:sld xmlns:a="http://schemas.openxmlformats.org/drawingml/2006/main" xmlns:p="http://schemas.openxmlformats.org/presentationml/2006/main" xmlns:r="http://schemas.openxmlformats.org/officeDocument/2006/relationships">
+<p:sld xmlns:a="http://schemas.openxmlformats.org/drawingml/2006/main" xmlns:r="http://schemas.openxmlformats.org/officeDocument/2006/relationships" xmlns:p="http://schemas.openxmlformats.org/presentationml/2006/main">
   <p:cSld>
     <p:bg>
       <p:bgPr>
@@ -4391,7 +4499,14 @@
         <p:cNvGrpSpPr/>
         <p:nvPr/>
       </p:nvGrpSpPr>
-      <p:grpSpPr/>
+      <p:grpSpPr>
+        <a:xfrm>
+          <a:off x="0" y="0"/>
+          <a:ext cx="0" cy="0"/>
+          <a:chOff x="0" y="0"/>
+          <a:chExt cx="0" cy="0"/>
+        </a:xfrm>
+      </p:grpSpPr>
       <p:sp>
         <p:nvSpPr>
           <p:cNvPr id="2" name="TextBox 1"/>
@@ -4502,6 +4617,7 @@
           <a:lstStyle/>
           <a:p>
             <a:pPr algn="ctr"/>
+            <a:endParaRPr/>
           </a:p>
         </p:txBody>
       </p:sp>
@@ -4578,7 +4694,7 @@
           </a:fontRef>
         </p:style>
         <p:txBody>
-          <a:bodyPr rtlCol="0" anchor="ctr" wrap="square"/>
+          <a:bodyPr wrap="square" rtlCol="0" anchor="ctr"/>
           <a:lstStyle/>
           <a:p>
             <a:pPr algn="ctr">
@@ -4590,104 +4706,356 @@
               </a:defRPr>
             </a:pPr>
             <a:r>
-              <a:t>from fastapi import APIRouter, HTTPException, status</a:t>
-            </a:r>
-            <a:br/>
-            <a:r>
-              <a:t>from app.schemas import UserCreate, UserResponse</a:t>
-            </a:r>
-            <a:br/>
-            <a:r>
-              <a:t>import app.store as store</a:t>
-            </a:r>
-            <a:br/>
-            <a:br/>
-            <a:br/>
-            <a:r>
+              <a:rPr dirty="0"/>
+              <a:t>from </a:t>
+            </a:r>
+            <a:r>
+              <a:rPr dirty="0" err="1"/>
+              <a:t>fastapi</a:t>
+            </a:r>
+            <a:r>
+              <a:rPr dirty="0"/>
+              <a:t> import </a:t>
+            </a:r>
+            <a:r>
+              <a:rPr dirty="0" err="1"/>
+              <a:t>APIRouter</a:t>
+            </a:r>
+            <a:r>
+              <a:rPr dirty="0"/>
+              <a:t>, </a:t>
+            </a:r>
+            <a:r>
+              <a:rPr dirty="0" err="1"/>
+              <a:t>HTTPException</a:t>
+            </a:r>
+            <a:r>
+              <a:rPr dirty="0"/>
+              <a:t>, status</a:t>
+            </a:r>
+            <a:br>
+              <a:rPr dirty="0"/>
+            </a:br>
+            <a:r>
+              <a:rPr dirty="0"/>
+              <a:t>from </a:t>
+            </a:r>
+            <a:r>
+              <a:rPr dirty="0" err="1"/>
+              <a:t>app.schemas</a:t>
+            </a:r>
+            <a:r>
+              <a:rPr dirty="0"/>
+              <a:t> import </a:t>
+            </a:r>
+            <a:r>
+              <a:rPr dirty="0" err="1"/>
+              <a:t>UserCreate</a:t>
+            </a:r>
+            <a:r>
+              <a:rPr dirty="0"/>
+              <a:t>, </a:t>
+            </a:r>
+            <a:r>
+              <a:rPr dirty="0" err="1"/>
+              <a:t>UserResponse</a:t>
+            </a:r>
+            <a:br>
+              <a:rPr dirty="0"/>
+            </a:br>
+            <a:r>
+              <a:rPr dirty="0"/>
+              <a:t>import </a:t>
+            </a:r>
+            <a:r>
+              <a:rPr dirty="0" err="1"/>
+              <a:t>app.store</a:t>
+            </a:r>
+            <a:r>
+              <a:rPr dirty="0"/>
+              <a:t> as store</a:t>
+            </a:r>
+            <a:br>
+              <a:rPr dirty="0"/>
+            </a:br>
+            <a:br>
+              <a:rPr dirty="0"/>
+            </a:br>
+            <a:br>
+              <a:rPr dirty="0"/>
+            </a:br>
+            <a:r>
+              <a:rPr dirty="0"/>
               <a:t># prefix means every route below starts with /users.</a:t>
             </a:r>
-            <a:br/>
-            <a:r>
-              <a:t>router = APIRouter(</a:t>
-            </a:r>
-            <a:br/>
-            <a:r>
+            <a:br>
+              <a:rPr dirty="0"/>
+            </a:br>
+            <a:r>
+              <a:rPr dirty="0"/>
+              <a:t>router = </a:t>
+            </a:r>
+            <a:r>
+              <a:rPr dirty="0" err="1"/>
+              <a:t>APIRouter</a:t>
+            </a:r>
+            <a:r>
+              <a:rPr dirty="0"/>
+              <a:t>(</a:t>
+            </a:r>
+            <a:br>
+              <a:rPr dirty="0"/>
+            </a:br>
+            <a:r>
+              <a:rPr dirty="0"/>
               <a:t>    prefix="/users",</a:t>
             </a:r>
-            <a:br/>
-            <a:r>
+            <a:br>
+              <a:rPr dirty="0"/>
+            </a:br>
+            <a:r>
+              <a:rPr dirty="0"/>
               <a:t>    tags=["Users"],</a:t>
             </a:r>
-            <a:br/>
-            <a:r>
+            <a:br>
+              <a:rPr dirty="0"/>
+            </a:br>
+            <a:r>
+              <a:rPr dirty="0"/>
               <a:t>)</a:t>
             </a:r>
-            <a:br/>
-            <a:br/>
-            <a:br/>
-            <a:r>
+            <a:br>
+              <a:rPr dirty="0"/>
+            </a:br>
+            <a:br>
+              <a:rPr dirty="0"/>
+            </a:br>
+            <a:br>
+              <a:rPr dirty="0"/>
+            </a:br>
+            <a:r>
+              <a:rPr dirty="0"/>
               <a:t>@router.post(</a:t>
             </a:r>
-            <a:br/>
-            <a:r>
+            <a:br>
+              <a:rPr dirty="0"/>
+            </a:br>
+            <a:r>
+              <a:rPr dirty="0"/>
               <a:t>    "",</a:t>
             </a:r>
-            <a:br/>
-            <a:r>
-              <a:t>    response_model=UserResponse,</a:t>
-            </a:r>
-            <a:br/>
-            <a:r>
-              <a:t>    status_code=status.HTTP_201_CREATED,</a:t>
-            </a:r>
-            <a:br/>
-            <a:r>
+            <a:br>
+              <a:rPr dirty="0"/>
+            </a:br>
+            <a:r>
+              <a:rPr dirty="0"/>
+              <a:t>    </a:t>
+            </a:r>
+            <a:r>
+              <a:rPr dirty="0" err="1"/>
+              <a:t>response_model</a:t>
+            </a:r>
+            <a:r>
+              <a:rPr dirty="0"/>
+              <a:t>=</a:t>
+            </a:r>
+            <a:r>
+              <a:rPr dirty="0" err="1"/>
+              <a:t>UserResponse</a:t>
+            </a:r>
+            <a:r>
+              <a:rPr dirty="0"/>
+              <a:t>,</a:t>
+            </a:r>
+            <a:br>
+              <a:rPr dirty="0"/>
+            </a:br>
+            <a:r>
+              <a:rPr dirty="0"/>
+              <a:t>    </a:t>
+            </a:r>
+            <a:r>
+              <a:rPr dirty="0" err="1"/>
+              <a:t>status_code</a:t>
+            </a:r>
+            <a:r>
+              <a:rPr dirty="0"/>
+              <a:t>=status.HTTP_201_CREATED,</a:t>
+            </a:r>
+            <a:br>
+              <a:rPr dirty="0"/>
+            </a:br>
+            <a:r>
+              <a:rPr dirty="0"/>
               <a:t>)</a:t>
             </a:r>
-            <a:br/>
-            <a:r>
-              <a:t>def create_user(user: UserCreate):</a:t>
-            </a:r>
-            <a:br/>
-            <a:r>
+            <a:br>
+              <a:rPr dirty="0"/>
+            </a:br>
+            <a:r>
+              <a:rPr dirty="0"/>
+              <a:t>def </a:t>
+            </a:r>
+            <a:r>
+              <a:rPr dirty="0" err="1"/>
+              <a:t>create_user</a:t>
+            </a:r>
+            <a:r>
+              <a:rPr dirty="0"/>
+              <a:t>(user: </a:t>
+            </a:r>
+            <a:r>
+              <a:rPr dirty="0" err="1"/>
+              <a:t>UserCreate</a:t>
+            </a:r>
+            <a:r>
+              <a:rPr dirty="0"/>
+              <a:t>):</a:t>
+            </a:r>
+            <a:br>
+              <a:rPr dirty="0"/>
+            </a:br>
+            <a:r>
+              <a:rPr dirty="0"/>
               <a:t>    """Create a new user."""</a:t>
             </a:r>
-            <a:br/>
-            <a:br/>
-            <a:r>
-              <a:t>    user_id = store.next_user_id</a:t>
-            </a:r>
-            <a:br/>
-            <a:br/>
-            <a:r>
-              <a:t>    new_user = {</a:t>
-            </a:r>
-            <a:br/>
-            <a:r>
-              <a:t>        "id": user_id,</a:t>
-            </a:r>
-            <a:br/>
-            <a:r>
-              <a:t>        **user.model_dump(),</a:t>
-            </a:r>
-            <a:br/>
-            <a:r>
+            <a:br>
+              <a:rPr dirty="0"/>
+            </a:br>
+            <a:br>
+              <a:rPr dirty="0"/>
+            </a:br>
+            <a:r>
+              <a:rPr dirty="0"/>
+              <a:t>    </a:t>
+            </a:r>
+            <a:r>
+              <a:rPr dirty="0" err="1"/>
+              <a:t>user_id</a:t>
+            </a:r>
+            <a:r>
+              <a:rPr dirty="0"/>
+              <a:t> = </a:t>
+            </a:r>
+            <a:r>
+              <a:rPr dirty="0" err="1"/>
+              <a:t>store.next_user_id</a:t>
+            </a:r>
+            <a:br>
+              <a:rPr dirty="0"/>
+            </a:br>
+            <a:br>
+              <a:rPr dirty="0"/>
+            </a:br>
+            <a:r>
+              <a:rPr dirty="0"/>
+              <a:t>    </a:t>
+            </a:r>
+            <a:r>
+              <a:rPr dirty="0" err="1"/>
+              <a:t>new_user</a:t>
+            </a:r>
+            <a:r>
+              <a:rPr dirty="0"/>
+              <a:t> = {</a:t>
+            </a:r>
+            <a:br>
+              <a:rPr dirty="0"/>
+            </a:br>
+            <a:r>
+              <a:rPr dirty="0"/>
+              <a:t>        "id": </a:t>
+            </a:r>
+            <a:r>
+              <a:rPr dirty="0" err="1"/>
+              <a:t>user_id</a:t>
+            </a:r>
+            <a:r>
+              <a:rPr dirty="0"/>
+              <a:t>,</a:t>
+            </a:r>
+            <a:br>
+              <a:rPr dirty="0"/>
+            </a:br>
+            <a:r>
+              <a:rPr dirty="0"/>
+              <a:t>        **</a:t>
+            </a:r>
+            <a:r>
+              <a:rPr dirty="0" err="1"/>
+              <a:t>user.model_dump</a:t>
+            </a:r>
+            <a:r>
+              <a:rPr dirty="0"/>
+              <a:t>(),</a:t>
+            </a:r>
+            <a:br>
+              <a:rPr dirty="0"/>
+            </a:br>
+            <a:r>
+              <a:rPr dirty="0"/>
               <a:t>    }</a:t>
             </a:r>
-            <a:br/>
-            <a:br/>
-            <a:r>
-              <a:t>    store.users_db[user_id] = new_user</a:t>
-            </a:r>
-            <a:br/>
-            <a:r>
-              <a:t>    store.next_user_id += 1</a:t>
-            </a:r>
-            <a:br/>
-            <a:br/>
-            <a:r>
-              <a:t>    return new_user</a:t>
-            </a:r>
+            <a:br>
+              <a:rPr dirty="0"/>
+            </a:br>
+            <a:br>
+              <a:rPr dirty="0"/>
+            </a:br>
+            <a:r>
+              <a:rPr dirty="0"/>
+              <a:t>    </a:t>
+            </a:r>
+            <a:r>
+              <a:rPr dirty="0" err="1"/>
+              <a:t>store.users_db</a:t>
+            </a:r>
+            <a:r>
+              <a:rPr dirty="0"/>
+              <a:t>[</a:t>
+            </a:r>
+            <a:r>
+              <a:rPr dirty="0" err="1"/>
+              <a:t>user_id</a:t>
+            </a:r>
+            <a:r>
+              <a:rPr dirty="0"/>
+              <a:t>] = </a:t>
+            </a:r>
+            <a:r>
+              <a:rPr dirty="0" err="1"/>
+              <a:t>new_user</a:t>
+            </a:r>
+            <a:br>
+              <a:rPr dirty="0"/>
+            </a:br>
+            <a:r>
+              <a:rPr dirty="0"/>
+              <a:t>    </a:t>
+            </a:r>
+            <a:r>
+              <a:rPr dirty="0" err="1"/>
+              <a:t>store.next_user_id</a:t>
+            </a:r>
+            <a:r>
+              <a:rPr dirty="0"/>
+              <a:t> += 1</a:t>
+            </a:r>
+            <a:br>
+              <a:rPr dirty="0"/>
+            </a:br>
+            <a:br>
+              <a:rPr dirty="0"/>
+            </a:br>
+            <a:r>
+              <a:rPr dirty="0"/>
+              <a:t>    return </a:t>
+            </a:r>
+            <a:r>
+              <a:rPr dirty="0" err="1"/>
+              <a:t>new_user</a:t>
+            </a:r>
+            <a:endParaRPr dirty="0"/>
           </a:p>
         </p:txBody>
       </p:sp>
@@ -4700,7 +5068,7 @@
 </file>
 
 <file path=ppt/slides/slide14.xml><?xml version="1.0" encoding="utf-8"?>
-<p:sld xmlns:a="http://schemas.openxmlformats.org/drawingml/2006/main" xmlns:p="http://schemas.openxmlformats.org/presentationml/2006/main" xmlns:r="http://schemas.openxmlformats.org/officeDocument/2006/relationships">
+<p:sld xmlns:a="http://schemas.openxmlformats.org/drawingml/2006/main" xmlns:r="http://schemas.openxmlformats.org/officeDocument/2006/relationships" xmlns:p="http://schemas.openxmlformats.org/presentationml/2006/main">
   <p:cSld>
     <p:bg>
       <p:bgPr>
@@ -4716,7 +5084,14 @@
         <p:cNvGrpSpPr/>
         <p:nvPr/>
       </p:nvGrpSpPr>
-      <p:grpSpPr/>
+      <p:grpSpPr>
+        <a:xfrm>
+          <a:off x="0" y="0"/>
+          <a:ext cx="0" cy="0"/>
+          <a:chOff x="0" y="0"/>
+          <a:chExt cx="0" cy="0"/>
+        </a:xfrm>
+      </p:grpSpPr>
       <p:sp>
         <p:nvSpPr>
           <p:cNvPr id="2" name="TextBox 1"/>
@@ -4792,6 +5167,7 @@
           <a:lstStyle/>
           <a:p>
             <a:pPr algn="ctr"/>
+            <a:endParaRPr/>
           </a:p>
         </p:txBody>
       </p:sp>
@@ -4868,7 +5244,7 @@
           </a:fontRef>
         </p:style>
         <p:txBody>
-          <a:bodyPr rtlCol="0" anchor="ctr" wrap="square"/>
+          <a:bodyPr wrap="square" rtlCol="0" anchor="ctr"/>
           <a:lstStyle/>
           <a:p>
             <a:pPr algn="ctr">
@@ -4880,49 +5256,116 @@
               </a:defRPr>
             </a:pPr>
             <a:r>
+              <a:rPr dirty="0"/>
               <a:t>@router.get(</a:t>
             </a:r>
-            <a:br/>
-            <a:r>
+            <a:br>
+              <a:rPr dirty="0"/>
+            </a:br>
+            <a:r>
+              <a:rPr dirty="0"/>
               <a:t>    "",</a:t>
             </a:r>
-            <a:br/>
-            <a:r>
-              <a:t>    response_model=list[UserResponse],</a:t>
-            </a:r>
-            <a:br/>
-            <a:r>
+            <a:br>
+              <a:rPr dirty="0"/>
+            </a:br>
+            <a:r>
+              <a:rPr dirty="0"/>
+              <a:t>    </a:t>
+            </a:r>
+            <a:r>
+              <a:rPr dirty="0" err="1"/>
+              <a:t>response_model</a:t>
+            </a:r>
+            <a:r>
+              <a:rPr dirty="0"/>
+              <a:t>=list[</a:t>
+            </a:r>
+            <a:r>
+              <a:rPr dirty="0" err="1"/>
+              <a:t>UserResponse</a:t>
+            </a:r>
+            <a:r>
+              <a:rPr dirty="0"/>
+              <a:t>],</a:t>
+            </a:r>
+            <a:br>
+              <a:rPr dirty="0"/>
+            </a:br>
+            <a:r>
+              <a:rPr dirty="0"/>
               <a:t>)</a:t>
             </a:r>
-            <a:br/>
-            <a:r>
-              <a:t>def list_users():</a:t>
-            </a:r>
-            <a:br/>
-            <a:r>
+            <a:br>
+              <a:rPr dirty="0"/>
+            </a:br>
+            <a:r>
+              <a:rPr dirty="0"/>
+              <a:t>def </a:t>
+            </a:r>
+            <a:r>
+              <a:rPr dirty="0" err="1"/>
+              <a:t>list_users</a:t>
+            </a:r>
+            <a:r>
+              <a:rPr dirty="0"/>
+              <a:t>():</a:t>
+            </a:r>
+            <a:br>
+              <a:rPr dirty="0"/>
+            </a:br>
+            <a:r>
+              <a:rPr dirty="0"/>
               <a:t>    """</a:t>
             </a:r>
-            <a:br/>
-            <a:r>
+            <a:br>
+              <a:rPr dirty="0"/>
+            </a:br>
+            <a:r>
+              <a:rPr dirty="0"/>
               <a:t>    Return every user currently stored.</a:t>
             </a:r>
-            <a:br/>
-            <a:br/>
-            <a:r>
+            <a:br>
+              <a:rPr dirty="0"/>
+            </a:br>
+            <a:br>
+              <a:rPr dirty="0"/>
+            </a:br>
+            <a:r>
+              <a:rPr dirty="0"/>
               <a:t>    list(...) converts the dictionary values into</a:t>
             </a:r>
-            <a:br/>
-            <a:r>
+            <a:br>
+              <a:rPr dirty="0"/>
+            </a:br>
+            <a:r>
+              <a:rPr dirty="0"/>
               <a:t>    a JSON-friendly list of user objects.</a:t>
             </a:r>
-            <a:br/>
-            <a:r>
+            <a:br>
+              <a:rPr dirty="0"/>
+            </a:br>
+            <a:r>
+              <a:rPr dirty="0"/>
               <a:t>    """</a:t>
             </a:r>
-            <a:br/>
-            <a:br/>
-            <a:r>
-              <a:t>    return list(store.users_db.values())</a:t>
+            <a:br>
+              <a:rPr dirty="0"/>
+            </a:br>
+            <a:br>
+              <a:rPr dirty="0"/>
+            </a:br>
+            <a:r>
+              <a:rPr dirty="0"/>
+              <a:t>    return list(</a:t>
+            </a:r>
+            <a:r>
+              <a:rPr dirty="0" err="1"/>
+              <a:t>store.users_db.values</a:t>
+            </a:r>
+            <a:r>
+              <a:rPr dirty="0"/>
+              <a:t>())</a:t>
             </a:r>
           </a:p>
         </p:txBody>
@@ -4960,6 +5403,7 @@
               </a:defRPr>
             </a:pPr>
             <a:r>
+              <a:rPr dirty="0"/>
               <a:t>GET endpoints should retrieve information without changing application state.</a:t>
             </a:r>
           </a:p>
@@ -4974,7 +5418,7 @@
 </file>
 
 <file path=ppt/slides/slide15.xml><?xml version="1.0" encoding="utf-8"?>
-<p:sld xmlns:a="http://schemas.openxmlformats.org/drawingml/2006/main" xmlns:p="http://schemas.openxmlformats.org/presentationml/2006/main" xmlns:r="http://schemas.openxmlformats.org/officeDocument/2006/relationships">
+<p:sld xmlns:a="http://schemas.openxmlformats.org/drawingml/2006/main" xmlns:r="http://schemas.openxmlformats.org/officeDocument/2006/relationships" xmlns:p="http://schemas.openxmlformats.org/presentationml/2006/main">
   <p:cSld>
     <p:bg>
       <p:bgPr>
@@ -4990,7 +5434,14 @@
         <p:cNvGrpSpPr/>
         <p:nvPr/>
       </p:nvGrpSpPr>
-      <p:grpSpPr/>
+      <p:grpSpPr>
+        <a:xfrm>
+          <a:off x="0" y="0"/>
+          <a:ext cx="0" cy="0"/>
+          <a:chOff x="0" y="0"/>
+          <a:chExt cx="0" cy="0"/>
+        </a:xfrm>
+      </p:grpSpPr>
       <p:sp>
         <p:nvSpPr>
           <p:cNvPr id="2" name="TextBox 1"/>
@@ -5066,6 +5517,7 @@
           <a:lstStyle/>
           <a:p>
             <a:pPr algn="ctr"/>
+            <a:endParaRPr/>
           </a:p>
         </p:txBody>
       </p:sp>
@@ -5142,7 +5594,7 @@
           </a:fontRef>
         </p:style>
         <p:txBody>
-          <a:bodyPr rtlCol="0" anchor="ctr" wrap="square"/>
+          <a:bodyPr wrap="square" rtlCol="0" anchor="ctr"/>
           <a:lstStyle/>
           <a:p>
             <a:pPr algn="ctr">
@@ -5154,61 +5606,179 @@
               </a:defRPr>
             </a:pPr>
             <a:r>
+              <a:rPr dirty="0"/>
               <a:t>@router.get(</a:t>
             </a:r>
-            <a:br/>
-            <a:r>
-              <a:t>    "/{user_id}",</a:t>
-            </a:r>
-            <a:br/>
-            <a:r>
-              <a:t>    response_model=UserResponse,</a:t>
-            </a:r>
-            <a:br/>
-            <a:r>
+            <a:br>
+              <a:rPr dirty="0"/>
+            </a:br>
+            <a:r>
+              <a:rPr dirty="0"/>
+              <a:t>    "/{</a:t>
+            </a:r>
+            <a:r>
+              <a:rPr dirty="0" err="1"/>
+              <a:t>user_id</a:t>
+            </a:r>
+            <a:r>
+              <a:rPr dirty="0"/>
+              <a:t>}",</a:t>
+            </a:r>
+            <a:br>
+              <a:rPr dirty="0"/>
+            </a:br>
+            <a:r>
+              <a:rPr dirty="0"/>
+              <a:t>    </a:t>
+            </a:r>
+            <a:r>
+              <a:rPr dirty="0" err="1"/>
+              <a:t>response_model</a:t>
+            </a:r>
+            <a:r>
+              <a:rPr dirty="0"/>
+              <a:t>=</a:t>
+            </a:r>
+            <a:r>
+              <a:rPr dirty="0" err="1"/>
+              <a:t>UserResponse</a:t>
+            </a:r>
+            <a:r>
+              <a:rPr dirty="0"/>
+              <a:t>,</a:t>
+            </a:r>
+            <a:br>
+              <a:rPr dirty="0"/>
+            </a:br>
+            <a:r>
+              <a:rPr dirty="0"/>
               <a:t>)</a:t>
             </a:r>
-            <a:br/>
-            <a:r>
-              <a:t>def get_user(user_id: int):</a:t>
-            </a:r>
-            <a:br/>
-            <a:r>
+            <a:br>
+              <a:rPr dirty="0"/>
+            </a:br>
+            <a:r>
+              <a:rPr dirty="0"/>
+              <a:t>def </a:t>
+            </a:r>
+            <a:r>
+              <a:rPr dirty="0" err="1"/>
+              <a:t>get_user</a:t>
+            </a:r>
+            <a:r>
+              <a:rPr dirty="0"/>
+              <a:t>(</a:t>
+            </a:r>
+            <a:r>
+              <a:rPr dirty="0" err="1"/>
+              <a:t>user_id</a:t>
+            </a:r>
+            <a:r>
+              <a:rPr dirty="0"/>
+              <a:t>: int):</a:t>
+            </a:r>
+            <a:br>
+              <a:rPr dirty="0"/>
+            </a:br>
+            <a:r>
+              <a:rPr dirty="0"/>
               <a:t>    """Return one user by numeric ID."""</a:t>
             </a:r>
-            <a:br/>
-            <a:br/>
-            <a:r>
-              <a:t>    user = store.users_db.get(user_id)</a:t>
-            </a:r>
-            <a:br/>
-            <a:br/>
-            <a:r>
+            <a:br>
+              <a:rPr dirty="0"/>
+            </a:br>
+            <a:br>
+              <a:rPr dirty="0"/>
+            </a:br>
+            <a:r>
+              <a:rPr dirty="0"/>
+              <a:t>    user = </a:t>
+            </a:r>
+            <a:r>
+              <a:rPr dirty="0" err="1"/>
+              <a:t>store.users_db.get</a:t>
+            </a:r>
+            <a:r>
+              <a:rPr dirty="0"/>
+              <a:t>(</a:t>
+            </a:r>
+            <a:r>
+              <a:rPr dirty="0" err="1"/>
+              <a:t>user_id</a:t>
+            </a:r>
+            <a:r>
+              <a:rPr dirty="0"/>
+              <a:t>)</a:t>
+            </a:r>
+            <a:br>
+              <a:rPr dirty="0"/>
+            </a:br>
+            <a:br>
+              <a:rPr dirty="0"/>
+            </a:br>
+            <a:r>
+              <a:rPr dirty="0"/>
               <a:t>    # A missing resource should return 404 Not Found.</a:t>
             </a:r>
-            <a:br/>
-            <a:r>
+            <a:br>
+              <a:rPr dirty="0"/>
+            </a:br>
+            <a:r>
+              <a:rPr dirty="0"/>
               <a:t>    if user is None:</a:t>
             </a:r>
-            <a:br/>
-            <a:r>
-              <a:t>        raise HTTPException(</a:t>
-            </a:r>
-            <a:br/>
-            <a:r>
-              <a:t>            status_code=status.HTTP_404_NOT_FOUND,</a:t>
-            </a:r>
-            <a:br/>
-            <a:r>
+            <a:br>
+              <a:rPr dirty="0"/>
+            </a:br>
+            <a:r>
+              <a:rPr dirty="0"/>
+              <a:t>        raise </a:t>
+            </a:r>
+            <a:r>
+              <a:rPr dirty="0" err="1"/>
+              <a:t>HTTPException</a:t>
+            </a:r>
+            <a:r>
+              <a:rPr dirty="0"/>
+              <a:t>(</a:t>
+            </a:r>
+            <a:br>
+              <a:rPr dirty="0"/>
+            </a:br>
+            <a:r>
+              <a:rPr dirty="0"/>
+              <a:t>            </a:t>
+            </a:r>
+            <a:r>
+              <a:rPr dirty="0" err="1"/>
+              <a:t>status_code</a:t>
+            </a:r>
+            <a:r>
+              <a:rPr dirty="0"/>
+              <a:t>=status.HTTP_404_NOT_FOUND,</a:t>
+            </a:r>
+            <a:br>
+              <a:rPr dirty="0"/>
+            </a:br>
+            <a:r>
+              <a:rPr dirty="0"/>
               <a:t>            detail="User not found",</a:t>
             </a:r>
-            <a:br/>
-            <a:r>
+            <a:br>
+              <a:rPr dirty="0"/>
+            </a:br>
+            <a:r>
+              <a:rPr dirty="0"/>
               <a:t>        )</a:t>
             </a:r>
-            <a:br/>
-            <a:br/>
-            <a:r>
+            <a:br>
+              <a:rPr dirty="0"/>
+            </a:br>
+            <a:br>
+              <a:rPr dirty="0"/>
+            </a:br>
+            <a:r>
+              <a:rPr dirty="0"/>
               <a:t>    return user</a:t>
             </a:r>
           </a:p>
@@ -5223,7 +5793,7 @@
 </file>
 
 <file path=ppt/slides/slide16.xml><?xml version="1.0" encoding="utf-8"?>
-<p:sld xmlns:a="http://schemas.openxmlformats.org/drawingml/2006/main" xmlns:p="http://schemas.openxmlformats.org/presentationml/2006/main" xmlns:r="http://schemas.openxmlformats.org/officeDocument/2006/relationships">
+<p:sld xmlns:a="http://schemas.openxmlformats.org/drawingml/2006/main" xmlns:r="http://schemas.openxmlformats.org/officeDocument/2006/relationships" xmlns:p="http://schemas.openxmlformats.org/presentationml/2006/main">
   <p:cSld>
     <p:bg>
       <p:bgPr>
@@ -5239,7 +5809,14 @@
         <p:cNvGrpSpPr/>
         <p:nvPr/>
       </p:nvGrpSpPr>
-      <p:grpSpPr/>
+      <p:grpSpPr>
+        <a:xfrm>
+          <a:off x="0" y="0"/>
+          <a:ext cx="0" cy="0"/>
+          <a:chOff x="0" y="0"/>
+          <a:chExt cx="0" cy="0"/>
+        </a:xfrm>
+      </p:grpSpPr>
       <p:sp>
         <p:nvSpPr>
           <p:cNvPr id="2" name="TextBox 1"/>
@@ -5315,6 +5892,7 @@
           <a:lstStyle/>
           <a:p>
             <a:pPr algn="ctr"/>
+            <a:endParaRPr/>
           </a:p>
         </p:txBody>
       </p:sp>
@@ -5391,7 +5969,7 @@
           </a:fontRef>
         </p:style>
         <p:txBody>
-          <a:bodyPr rtlCol="0" anchor="ctr" wrap="square"/>
+          <a:bodyPr wrap="square" rtlCol="0" anchor="ctr"/>
           <a:lstStyle/>
           <a:p>
             <a:pPr algn="ctr">
@@ -5403,65 +5981,192 @@
               </a:defRPr>
             </a:pPr>
             <a:r>
+              <a:rPr dirty="0"/>
               <a:t># Add this to schemas.py.</a:t>
             </a:r>
-            <a:br/>
-            <a:br/>
-            <a:r>
-              <a:t>class UserUpdate(BaseModel):</a:t>
-            </a:r>
-            <a:br/>
-            <a:r>
+            <a:br>
+              <a:rPr dirty="0"/>
+            </a:br>
+            <a:br>
+              <a:rPr dirty="0"/>
+            </a:br>
+            <a:r>
+              <a:rPr dirty="0"/>
+              <a:t>class </a:t>
+            </a:r>
+            <a:r>
+              <a:rPr dirty="0" err="1"/>
+              <a:t>UserUpdate</a:t>
+            </a:r>
+            <a:r>
+              <a:rPr dirty="0"/>
+              <a:t>(</a:t>
+            </a:r>
+            <a:r>
+              <a:rPr dirty="0" err="1"/>
+              <a:t>BaseModel</a:t>
+            </a:r>
+            <a:r>
+              <a:rPr dirty="0"/>
+              <a:t>):</a:t>
+            </a:r>
+            <a:br>
+              <a:rPr dirty="0"/>
+            </a:br>
+            <a:r>
+              <a:rPr dirty="0"/>
               <a:t>    """</a:t>
             </a:r>
-            <a:br/>
-            <a:r>
+            <a:br>
+              <a:rPr dirty="0"/>
+            </a:br>
+            <a:r>
+              <a:rPr dirty="0"/>
               <a:t>    All fields are optional because the client may want</a:t>
             </a:r>
-            <a:br/>
-            <a:r>
+            <a:br>
+              <a:rPr dirty="0"/>
+            </a:br>
+            <a:r>
+              <a:rPr dirty="0"/>
               <a:t>    to update only one or two profile fields.</a:t>
             </a:r>
-            <a:br/>
-            <a:r>
+            <a:br>
+              <a:rPr dirty="0"/>
+            </a:br>
+            <a:r>
+              <a:rPr dirty="0"/>
               <a:t>    """</a:t>
             </a:r>
-            <a:br/>
-            <a:br/>
-            <a:r>
-              <a:t>    first_name: str | None = Field(</a:t>
-            </a:r>
-            <a:br/>
-            <a:r>
-              <a:t>        default=None, min_length=1, max_length=50</a:t>
-            </a:r>
-            <a:br/>
-            <a:r>
+            <a:br>
+              <a:rPr dirty="0"/>
+            </a:br>
+            <a:br>
+              <a:rPr dirty="0"/>
+            </a:br>
+            <a:r>
+              <a:rPr dirty="0"/>
+              <a:t>    </a:t>
+            </a:r>
+            <a:r>
+              <a:rPr dirty="0" err="1"/>
+              <a:t>first_name</a:t>
+            </a:r>
+            <a:r>
+              <a:rPr dirty="0"/>
+              <a:t>: str | None = Field(</a:t>
+            </a:r>
+            <a:br>
+              <a:rPr dirty="0"/>
+            </a:br>
+            <a:r>
+              <a:rPr dirty="0"/>
+              <a:t>        default=None, </a:t>
+            </a:r>
+            <a:r>
+              <a:rPr dirty="0" err="1"/>
+              <a:t>min_length</a:t>
+            </a:r>
+            <a:r>
+              <a:rPr dirty="0"/>
+              <a:t>=1, </a:t>
+            </a:r>
+            <a:r>
+              <a:rPr dirty="0" err="1"/>
+              <a:t>max_length</a:t>
+            </a:r>
+            <a:r>
+              <a:rPr dirty="0"/>
+              <a:t>=50</a:t>
+            </a:r>
+            <a:br>
+              <a:rPr dirty="0"/>
+            </a:br>
+            <a:r>
+              <a:rPr dirty="0"/>
               <a:t>    )</a:t>
             </a:r>
-            <a:br/>
-            <a:r>
-              <a:t>    last_name: str | None = Field(</a:t>
-            </a:r>
-            <a:br/>
-            <a:r>
-              <a:t>        default=None, min_length=1, max_length=50</a:t>
-            </a:r>
-            <a:br/>
-            <a:r>
+            <a:br>
+              <a:rPr dirty="0"/>
+            </a:br>
+            <a:r>
+              <a:rPr dirty="0"/>
+              <a:t>    </a:t>
+            </a:r>
+            <a:r>
+              <a:rPr dirty="0" err="1"/>
+              <a:t>last_name</a:t>
+            </a:r>
+            <a:r>
+              <a:rPr dirty="0"/>
+              <a:t>: str | None = Field(</a:t>
+            </a:r>
+            <a:br>
+              <a:rPr dirty="0"/>
+            </a:br>
+            <a:r>
+              <a:rPr dirty="0"/>
+              <a:t>        default=None, </a:t>
+            </a:r>
+            <a:r>
+              <a:rPr dirty="0" err="1"/>
+              <a:t>min_length</a:t>
+            </a:r>
+            <a:r>
+              <a:rPr dirty="0"/>
+              <a:t>=1, </a:t>
+            </a:r>
+            <a:r>
+              <a:rPr dirty="0" err="1"/>
+              <a:t>max_length</a:t>
+            </a:r>
+            <a:r>
+              <a:rPr dirty="0"/>
+              <a:t>=50</a:t>
+            </a:r>
+            <a:br>
+              <a:rPr dirty="0"/>
+            </a:br>
+            <a:r>
+              <a:rPr dirty="0"/>
               <a:t>    )</a:t>
             </a:r>
-            <a:br/>
-            <a:r>
-              <a:t>    email: EmailStr | None = None</a:t>
-            </a:r>
-            <a:br/>
-            <a:r>
+            <a:br>
+              <a:rPr dirty="0"/>
+            </a:br>
+            <a:r>
+              <a:rPr dirty="0"/>
+              <a:t>    email: </a:t>
+            </a:r>
+            <a:r>
+              <a:rPr dirty="0" err="1"/>
+              <a:t>EmailStr</a:t>
+            </a:r>
+            <a:r>
+              <a:rPr dirty="0"/>
+              <a:t> | None = None</a:t>
+            </a:r>
+            <a:br>
+              <a:rPr dirty="0"/>
+            </a:br>
+            <a:r>
+              <a:rPr dirty="0"/>
               <a:t>    phone: str | None = None</a:t>
             </a:r>
-            <a:br/>
-            <a:r>
-              <a:t>    role: UserRole | None = None</a:t>
+            <a:br>
+              <a:rPr dirty="0"/>
+            </a:br>
+            <a:r>
+              <a:rPr dirty="0"/>
+              <a:t>    role: </a:t>
+            </a:r>
+            <a:r>
+              <a:rPr dirty="0" err="1"/>
+              <a:t>UserRole</a:t>
+            </a:r>
+            <a:r>
+              <a:rPr dirty="0"/>
+              <a:t> | None = None</a:t>
             </a:r>
           </a:p>
         </p:txBody>
@@ -5475,7 +6180,7 @@
 </file>
 
 <file path=ppt/slides/slide17.xml><?xml version="1.0" encoding="utf-8"?>
-<p:sld xmlns:a="http://schemas.openxmlformats.org/drawingml/2006/main" xmlns:p="http://schemas.openxmlformats.org/presentationml/2006/main" xmlns:r="http://schemas.openxmlformats.org/officeDocument/2006/relationships">
+<p:sld xmlns:a="http://schemas.openxmlformats.org/drawingml/2006/main" xmlns:r="http://schemas.openxmlformats.org/officeDocument/2006/relationships" xmlns:p="http://schemas.openxmlformats.org/presentationml/2006/main">
   <p:cSld>
     <p:bg>
       <p:bgPr>
@@ -5491,7 +6196,14 @@
         <p:cNvGrpSpPr/>
         <p:nvPr/>
       </p:nvGrpSpPr>
-      <p:grpSpPr/>
+      <p:grpSpPr>
+        <a:xfrm>
+          <a:off x="0" y="0"/>
+          <a:ext cx="0" cy="0"/>
+          <a:chOff x="0" y="0"/>
+          <a:chExt cx="0" cy="0"/>
+        </a:xfrm>
+      </p:grpSpPr>
       <p:sp>
         <p:nvSpPr>
           <p:cNvPr id="2" name="TextBox 1"/>
@@ -5567,6 +6279,7 @@
           <a:lstStyle/>
           <a:p>
             <a:pPr algn="ctr"/>
+            <a:endParaRPr/>
           </a:p>
         </p:txBody>
       </p:sp>
@@ -5643,7 +6356,7 @@
           </a:fontRef>
         </p:style>
         <p:txBody>
-          <a:bodyPr rtlCol="0" anchor="ctr" wrap="square"/>
+          <a:bodyPr wrap="square" rtlCol="0" anchor="ctr"/>
           <a:lstStyle/>
           <a:p>
             <a:pPr algn="ctr">
@@ -5655,70 +6368,252 @@
               </a:defRPr>
             </a:pPr>
             <a:r>
+              <a:rPr dirty="0"/>
               <a:t>@router.put(</a:t>
             </a:r>
-            <a:br/>
-            <a:r>
-              <a:t>    "/{user_id}",</a:t>
-            </a:r>
-            <a:br/>
-            <a:r>
-              <a:t>    response_model=UserResponse,</a:t>
-            </a:r>
-            <a:br/>
-            <a:r>
+            <a:br>
+              <a:rPr dirty="0"/>
+            </a:br>
+            <a:r>
+              <a:rPr dirty="0"/>
+              <a:t>    "/{</a:t>
+            </a:r>
+            <a:r>
+              <a:rPr dirty="0" err="1"/>
+              <a:t>user_id</a:t>
+            </a:r>
+            <a:r>
+              <a:rPr dirty="0"/>
+              <a:t>}",</a:t>
+            </a:r>
+            <a:br>
+              <a:rPr dirty="0"/>
+            </a:br>
+            <a:r>
+              <a:rPr dirty="0"/>
+              <a:t>    </a:t>
+            </a:r>
+            <a:r>
+              <a:rPr dirty="0" err="1"/>
+              <a:t>response_model</a:t>
+            </a:r>
+            <a:r>
+              <a:rPr dirty="0"/>
+              <a:t>=</a:t>
+            </a:r>
+            <a:r>
+              <a:rPr dirty="0" err="1"/>
+              <a:t>UserResponse</a:t>
+            </a:r>
+            <a:r>
+              <a:rPr dirty="0"/>
+              <a:t>,</a:t>
+            </a:r>
+            <a:br>
+              <a:rPr dirty="0"/>
+            </a:br>
+            <a:r>
+              <a:rPr dirty="0"/>
               <a:t>)</a:t>
             </a:r>
-            <a:br/>
-            <a:r>
-              <a:t>def update_user(user_id: int, changes: UserUpdate):</a:t>
-            </a:r>
-            <a:br/>
-            <a:r>
-              <a:t>    user = store.users_db.get(user_id)</a:t>
-            </a:r>
-            <a:br/>
-            <a:br/>
-            <a:r>
+            <a:br>
+              <a:rPr dirty="0"/>
+            </a:br>
+            <a:r>
+              <a:rPr dirty="0"/>
+              <a:t>def </a:t>
+            </a:r>
+            <a:r>
+              <a:rPr dirty="0" err="1"/>
+              <a:t>update_user</a:t>
+            </a:r>
+            <a:r>
+              <a:rPr dirty="0"/>
+              <a:t>(</a:t>
+            </a:r>
+            <a:r>
+              <a:rPr dirty="0" err="1"/>
+              <a:t>user_id</a:t>
+            </a:r>
+            <a:r>
+              <a:rPr dirty="0"/>
+              <a:t>: int, changes: </a:t>
+            </a:r>
+            <a:r>
+              <a:rPr dirty="0" err="1"/>
+              <a:t>UserUpdate</a:t>
+            </a:r>
+            <a:r>
+              <a:rPr dirty="0"/>
+              <a:t>):</a:t>
+            </a:r>
+            <a:br>
+              <a:rPr dirty="0"/>
+            </a:br>
+            <a:r>
+              <a:rPr dirty="0"/>
+              <a:t>    user = </a:t>
+            </a:r>
+            <a:r>
+              <a:rPr dirty="0" err="1"/>
+              <a:t>store.users_db.get</a:t>
+            </a:r>
+            <a:r>
+              <a:rPr dirty="0"/>
+              <a:t>(</a:t>
+            </a:r>
+            <a:r>
+              <a:rPr dirty="0" err="1"/>
+              <a:t>user_id</a:t>
+            </a:r>
+            <a:r>
+              <a:rPr dirty="0"/>
+              <a:t>)</a:t>
+            </a:r>
+            <a:br>
+              <a:rPr dirty="0"/>
+            </a:br>
+            <a:br>
+              <a:rPr dirty="0"/>
+            </a:br>
+            <a:r>
+              <a:rPr dirty="0"/>
               <a:t>    if user is None:</a:t>
             </a:r>
-            <a:br/>
-            <a:r>
-              <a:t>        raise HTTPException(</a:t>
-            </a:r>
-            <a:br/>
-            <a:r>
-              <a:t>            status_code=404,</a:t>
-            </a:r>
-            <a:br/>
-            <a:r>
+            <a:br>
+              <a:rPr dirty="0"/>
+            </a:br>
+            <a:r>
+              <a:rPr dirty="0"/>
+              <a:t>        raise </a:t>
+            </a:r>
+            <a:r>
+              <a:rPr dirty="0" err="1"/>
+              <a:t>HTTPException</a:t>
+            </a:r>
+            <a:r>
+              <a:rPr dirty="0"/>
+              <a:t>(</a:t>
+            </a:r>
+            <a:br>
+              <a:rPr dirty="0"/>
+            </a:br>
+            <a:r>
+              <a:rPr dirty="0"/>
+              <a:t>            </a:t>
+            </a:r>
+            <a:r>
+              <a:rPr dirty="0" err="1"/>
+              <a:t>status_code</a:t>
+            </a:r>
+            <a:r>
+              <a:rPr dirty="0"/>
+              <a:t>=404,</a:t>
+            </a:r>
+            <a:br>
+              <a:rPr dirty="0"/>
+            </a:br>
+            <a:r>
+              <a:rPr dirty="0"/>
               <a:t>            detail="User not found",</a:t>
             </a:r>
-            <a:br/>
-            <a:r>
+            <a:br>
+              <a:rPr dirty="0"/>
+            </a:br>
+            <a:r>
+              <a:rPr dirty="0"/>
               <a:t>        )</a:t>
             </a:r>
-            <a:br/>
-            <a:br/>
-            <a:r>
-              <a:t>    # exclude_none=True means fields omitted by the client</a:t>
-            </a:r>
-            <a:br/>
-            <a:r>
+            <a:br>
+              <a:rPr dirty="0"/>
+            </a:br>
+            <a:br>
+              <a:rPr dirty="0"/>
+            </a:br>
+            <a:r>
+              <a:rPr dirty="0"/>
+              <a:t>    # </a:t>
+            </a:r>
+            <a:r>
+              <a:rPr dirty="0" err="1"/>
+              <a:t>exclude_none</a:t>
+            </a:r>
+            <a:r>
+              <a:rPr dirty="0"/>
+              <a:t>=True means fields omitted by the client</a:t>
+            </a:r>
+            <a:br>
+              <a:rPr dirty="0"/>
+            </a:br>
+            <a:r>
+              <a:rPr dirty="0"/>
               <a:t>    # do not overwrite existing values with None.</a:t>
             </a:r>
-            <a:br/>
-            <a:r>
-              <a:t>    update_data = changes.model_dump(exclude_none=True)</a:t>
-            </a:r>
-            <a:br/>
-            <a:br/>
-            <a:r>
-              <a:t>    user.update(update_data)</a:t>
-            </a:r>
-            <a:br/>
-            <a:br/>
-            <a:r>
+            <a:br>
+              <a:rPr dirty="0"/>
+            </a:br>
+            <a:r>
+              <a:rPr dirty="0"/>
+              <a:t>    </a:t>
+            </a:r>
+            <a:r>
+              <a:rPr dirty="0" err="1"/>
+              <a:t>update_data</a:t>
+            </a:r>
+            <a:r>
+              <a:rPr dirty="0"/>
+              <a:t> = </a:t>
+            </a:r>
+            <a:r>
+              <a:rPr dirty="0" err="1"/>
+              <a:t>changes.model_dump</a:t>
+            </a:r>
+            <a:r>
+              <a:rPr dirty="0"/>
+              <a:t>(</a:t>
+            </a:r>
+            <a:r>
+              <a:rPr dirty="0" err="1"/>
+              <a:t>exclude_none</a:t>
+            </a:r>
+            <a:r>
+              <a:rPr dirty="0"/>
+              <a:t>=True)</a:t>
+            </a:r>
+            <a:br>
+              <a:rPr dirty="0"/>
+            </a:br>
+            <a:br>
+              <a:rPr dirty="0"/>
+            </a:br>
+            <a:r>
+              <a:rPr dirty="0"/>
+              <a:t>    </a:t>
+            </a:r>
+            <a:r>
+              <a:rPr dirty="0" err="1"/>
+              <a:t>user.update</a:t>
+            </a:r>
+            <a:r>
+              <a:rPr dirty="0"/>
+              <a:t>(</a:t>
+            </a:r>
+            <a:r>
+              <a:rPr dirty="0" err="1"/>
+              <a:t>update_data</a:t>
+            </a:r>
+            <a:r>
+              <a:rPr dirty="0"/>
+              <a:t>)</a:t>
+            </a:r>
+            <a:br>
+              <a:rPr dirty="0"/>
+            </a:br>
+            <a:br>
+              <a:rPr dirty="0"/>
+            </a:br>
+            <a:r>
+              <a:rPr dirty="0"/>
               <a:t>    return user</a:t>
             </a:r>
           </a:p>
@@ -5757,7 +6652,24 @@
               </a:defRPr>
             </a:pPr>
             <a:r>
-              <a:t>Remember to import UserUpdate from app.schemas in users.py.</a:t>
+              <a:rPr dirty="0"/>
+              <a:t>Remember to import </a:t>
+            </a:r>
+            <a:r>
+              <a:rPr dirty="0" err="1"/>
+              <a:t>UserUpdate</a:t>
+            </a:r>
+            <a:r>
+              <a:rPr dirty="0"/>
+              <a:t> from </a:t>
+            </a:r>
+            <a:r>
+              <a:rPr dirty="0" err="1"/>
+              <a:t>app.schemas</a:t>
+            </a:r>
+            <a:r>
+              <a:rPr dirty="0"/>
+              <a:t> in users.py.</a:t>
             </a:r>
           </a:p>
         </p:txBody>
@@ -5771,7 +6683,7 @@
 </file>
 
 <file path=ppt/slides/slide18.xml><?xml version="1.0" encoding="utf-8"?>
-<p:sld xmlns:a="http://schemas.openxmlformats.org/drawingml/2006/main" xmlns:p="http://schemas.openxmlformats.org/presentationml/2006/main" xmlns:r="http://schemas.openxmlformats.org/officeDocument/2006/relationships">
+<p:sld xmlns:a="http://schemas.openxmlformats.org/drawingml/2006/main" xmlns:r="http://schemas.openxmlformats.org/officeDocument/2006/relationships" xmlns:p="http://schemas.openxmlformats.org/presentationml/2006/main">
   <p:cSld>
     <p:bg>
       <p:bgPr>
@@ -5787,7 +6699,14 @@
         <p:cNvGrpSpPr/>
         <p:nvPr/>
       </p:nvGrpSpPr>
-      <p:grpSpPr/>
+      <p:grpSpPr>
+        <a:xfrm>
+          <a:off x="0" y="0"/>
+          <a:ext cx="0" cy="0"/>
+          <a:chOff x="0" y="0"/>
+          <a:chExt cx="0" cy="0"/>
+        </a:xfrm>
+      </p:grpSpPr>
       <p:sp>
         <p:nvSpPr>
           <p:cNvPr id="2" name="TextBox 1"/>
@@ -5898,6 +6817,7 @@
           <a:lstStyle/>
           <a:p>
             <a:pPr algn="ctr"/>
+            <a:endParaRPr/>
           </a:p>
         </p:txBody>
       </p:sp>
@@ -5974,7 +6894,7 @@
           </a:fontRef>
         </p:style>
         <p:txBody>
-          <a:bodyPr rtlCol="0" anchor="ctr" wrap="square"/>
+          <a:bodyPr wrap="square" rtlCol="0" anchor="ctr"/>
           <a:lstStyle/>
           <a:p>
             <a:pPr algn="ctr">
@@ -5986,77 +6906,192 @@
               </a:defRPr>
             </a:pPr>
             <a:r>
-              <a:t>from fastapi import FastAPI</a:t>
-            </a:r>
-            <a:br/>
-            <a:r>
-              <a:t>from app.routers.users import router as users_router</a:t>
-            </a:r>
-            <a:br/>
-            <a:br/>
-            <a:br/>
-            <a:r>
+              <a:rPr dirty="0"/>
+              <a:t>from </a:t>
+            </a:r>
+            <a:r>
+              <a:rPr dirty="0" err="1"/>
+              <a:t>fastapi</a:t>
+            </a:r>
+            <a:r>
+              <a:rPr dirty="0"/>
+              <a:t> import </a:t>
+            </a:r>
+            <a:r>
+              <a:rPr dirty="0" err="1"/>
+              <a:t>FastAPI</a:t>
+            </a:r>
+            <a:br>
+              <a:rPr dirty="0"/>
+            </a:br>
+            <a:r>
+              <a:rPr dirty="0"/>
+              <a:t>from </a:t>
+            </a:r>
+            <a:r>
+              <a:rPr dirty="0" err="1"/>
+              <a:t>app.routers.users</a:t>
+            </a:r>
+            <a:r>
+              <a:rPr dirty="0"/>
+              <a:t> import router as </a:t>
+            </a:r>
+            <a:r>
+              <a:rPr dirty="0" err="1"/>
+              <a:t>users_router</a:t>
+            </a:r>
+            <a:br>
+              <a:rPr dirty="0"/>
+            </a:br>
+            <a:br>
+              <a:rPr dirty="0"/>
+            </a:br>
+            <a:br>
+              <a:rPr dirty="0"/>
+            </a:br>
+            <a:r>
+              <a:rPr dirty="0"/>
               <a:t># Create the User Service application.</a:t>
             </a:r>
-            <a:br/>
-            <a:r>
-              <a:t>app = FastAPI(</a:t>
-            </a:r>
-            <a:br/>
-            <a:r>
+            <a:br>
+              <a:rPr dirty="0"/>
+            </a:br>
+            <a:r>
+              <a:rPr dirty="0"/>
+              <a:t>app = </a:t>
+            </a:r>
+            <a:r>
+              <a:rPr dirty="0" err="1"/>
+              <a:t>FastAPI</a:t>
+            </a:r>
+            <a:r>
+              <a:rPr dirty="0"/>
+              <a:t>(</a:t>
+            </a:r>
+            <a:br>
+              <a:rPr dirty="0"/>
+            </a:br>
+            <a:r>
+              <a:rPr dirty="0"/>
               <a:t>    title="Car Rental User Service",</a:t>
             </a:r>
-            <a:br/>
-            <a:r>
+            <a:br>
+              <a:rPr dirty="0"/>
+            </a:br>
+            <a:r>
+              <a:rPr dirty="0"/>
               <a:t>    description="Manages users for the car rental platform.",</a:t>
             </a:r>
-            <a:br/>
-            <a:r>
+            <a:br>
+              <a:rPr dirty="0"/>
+            </a:br>
+            <a:r>
+              <a:rPr dirty="0"/>
               <a:t>    version="1.0.0",</a:t>
             </a:r>
-            <a:br/>
-            <a:r>
+            <a:br>
+              <a:rPr dirty="0"/>
+            </a:br>
+            <a:r>
+              <a:rPr dirty="0"/>
               <a:t>)</a:t>
             </a:r>
-            <a:br/>
-            <a:br/>
-            <a:br/>
-            <a:r>
+            <a:br>
+              <a:rPr dirty="0"/>
+            </a:br>
+            <a:br>
+              <a:rPr dirty="0"/>
+            </a:br>
+            <a:br>
+              <a:rPr dirty="0"/>
+            </a:br>
+            <a:r>
+              <a:rPr dirty="0"/>
               <a:t># Register routes from routers/users.py.</a:t>
             </a:r>
-            <a:br/>
-            <a:r>
-              <a:t>app.include_router(users_router)</a:t>
-            </a:r>
-            <a:br/>
-            <a:br/>
-            <a:br/>
-            <a:r>
+            <a:br>
+              <a:rPr dirty="0"/>
+            </a:br>
+            <a:r>
+              <a:rPr dirty="0" err="1"/>
+              <a:t>app.include_router</a:t>
+            </a:r>
+            <a:r>
+              <a:rPr dirty="0"/>
+              <a:t>(</a:t>
+            </a:r>
+            <a:r>
+              <a:rPr dirty="0" err="1"/>
+              <a:t>users_router</a:t>
+            </a:r>
+            <a:r>
+              <a:rPr dirty="0"/>
+              <a:t>)</a:t>
+            </a:r>
+            <a:br>
+              <a:rPr dirty="0"/>
+            </a:br>
+            <a:br>
+              <a:rPr dirty="0"/>
+            </a:br>
+            <a:br>
+              <a:rPr dirty="0"/>
+            </a:br>
+            <a:r>
+              <a:rPr dirty="0"/>
               <a:t>@app.get("/health", tags=["Health"])</a:t>
             </a:r>
-            <a:br/>
-            <a:r>
-              <a:t>def health_check():</a:t>
-            </a:r>
-            <a:br/>
-            <a:r>
+            <a:br>
+              <a:rPr dirty="0"/>
+            </a:br>
+            <a:r>
+              <a:rPr dirty="0"/>
+              <a:t>def </a:t>
+            </a:r>
+            <a:r>
+              <a:rPr dirty="0" err="1"/>
+              <a:t>health_check</a:t>
+            </a:r>
+            <a:r>
+              <a:rPr dirty="0"/>
+              <a:t>():</a:t>
+            </a:r>
+            <a:br>
+              <a:rPr dirty="0"/>
+            </a:br>
+            <a:r>
+              <a:rPr dirty="0"/>
               <a:t>    """Used to verify that the service is alive."""</a:t>
             </a:r>
-            <a:br/>
-            <a:br/>
-            <a:r>
+            <a:br>
+              <a:rPr dirty="0"/>
+            </a:br>
+            <a:br>
+              <a:rPr dirty="0"/>
+            </a:br>
+            <a:r>
+              <a:rPr dirty="0"/>
               <a:t>    return {</a:t>
             </a:r>
-            <a:br/>
-            <a:r>
+            <a:br>
+              <a:rPr dirty="0"/>
+            </a:br>
+            <a:r>
+              <a:rPr dirty="0"/>
               <a:t>        "status": "healthy",</a:t>
             </a:r>
-            <a:br/>
-            <a:r>
+            <a:br>
+              <a:rPr dirty="0"/>
+            </a:br>
+            <a:r>
+              <a:rPr dirty="0"/>
               <a:t>        "service": "user-service",</a:t>
             </a:r>
-            <a:br/>
-            <a:r>
+            <a:br>
+              <a:rPr dirty="0"/>
+            </a:br>
+            <a:r>
+              <a:rPr dirty="0"/>
               <a:t>    }</a:t>
             </a:r>
           </a:p>
@@ -6071,7 +7106,7 @@
 </file>
 
 <file path=ppt/slides/slide19.xml><?xml version="1.0" encoding="utf-8"?>
-<p:sld xmlns:a="http://schemas.openxmlformats.org/drawingml/2006/main" xmlns:p="http://schemas.openxmlformats.org/presentationml/2006/main" xmlns:r="http://schemas.openxmlformats.org/officeDocument/2006/relationships">
+<p:sld xmlns:a="http://schemas.openxmlformats.org/drawingml/2006/main" xmlns:r="http://schemas.openxmlformats.org/officeDocument/2006/relationships" xmlns:p="http://schemas.openxmlformats.org/presentationml/2006/main">
   <p:cSld>
     <p:bg>
       <p:bgPr>
@@ -6087,7 +7122,14 @@
         <p:cNvGrpSpPr/>
         <p:nvPr/>
       </p:nvGrpSpPr>
-      <p:grpSpPr/>
+      <p:grpSpPr>
+        <a:xfrm>
+          <a:off x="0" y="0"/>
+          <a:ext cx="0" cy="0"/>
+          <a:chOff x="0" y="0"/>
+          <a:chExt cx="0" cy="0"/>
+        </a:xfrm>
+      </p:grpSpPr>
       <p:sp>
         <p:nvSpPr>
           <p:cNvPr id="2" name="TextBox 1"/>
@@ -6163,6 +7205,7 @@
           <a:lstStyle/>
           <a:p>
             <a:pPr algn="ctr"/>
+            <a:endParaRPr/>
           </a:p>
         </p:txBody>
       </p:sp>
@@ -6239,7 +7282,7 @@
           </a:fontRef>
         </p:style>
         <p:txBody>
-          <a:bodyPr rtlCol="0" anchor="ctr" wrap="square"/>
+          <a:bodyPr wrap="square" rtlCol="0" anchor="ctr"/>
           <a:lstStyle/>
           <a:p>
             <a:pPr algn="ctr">
@@ -6251,45 +7294,107 @@
               </a:defRPr>
             </a:pPr>
             <a:r>
+              <a:rPr dirty="0"/>
               <a:t># Run this from:</a:t>
             </a:r>
-            <a:br/>
-            <a:r>
+            <a:br>
+              <a:rPr dirty="0"/>
+            </a:br>
+            <a:r>
+              <a:rPr dirty="0"/>
               <a:t># services\user-service</a:t>
             </a:r>
-            <a:br/>
-            <a:br/>
-            <a:r>
-              <a:t>uvicorn app.main:app --reload --port 8001</a:t>
-            </a:r>
-            <a:br/>
-            <a:br/>
-            <a:r>
+            <a:br>
+              <a:rPr dirty="0"/>
+            </a:br>
+            <a:br>
+              <a:rPr dirty="0"/>
+            </a:br>
+            <a:r>
+              <a:rPr dirty="0" err="1"/>
+              <a:t>uvicorn</a:t>
+            </a:r>
+            <a:r>
+              <a:rPr dirty="0"/>
+              <a:t> </a:t>
+            </a:r>
+            <a:r>
+              <a:rPr dirty="0" err="1"/>
+              <a:t>app.main:app</a:t>
+            </a:r>
+            <a:r>
+              <a:rPr dirty="0"/>
+              <a:t> --reload --port 8001</a:t>
+            </a:r>
+            <a:br>
+              <a:rPr dirty="0"/>
+            </a:br>
+            <a:br>
+              <a:rPr dirty="0"/>
+            </a:br>
+            <a:r>
+              <a:rPr dirty="0"/>
               <a:t># Breakdown:</a:t>
             </a:r>
-            <a:br/>
-            <a:r>
-              <a:t># app.main -&gt; app/main.py</a:t>
-            </a:r>
-            <a:br/>
-            <a:r>
-              <a:t># app      -&gt; FastAPI object inside main.py</a:t>
-            </a:r>
-            <a:br/>
-            <a:r>
+            <a:br>
+              <a:rPr dirty="0"/>
+            </a:br>
+            <a:r>
+              <a:rPr dirty="0"/>
+              <a:t># </a:t>
+            </a:r>
+            <a:r>
+              <a:rPr dirty="0" err="1"/>
+              <a:t>app.main</a:t>
+            </a:r>
+            <a:r>
+              <a:rPr dirty="0"/>
+              <a:t> -&gt; app/main.py</a:t>
+            </a:r>
+            <a:br>
+              <a:rPr dirty="0"/>
+            </a:br>
+            <a:r>
+              <a:rPr dirty="0"/>
+              <a:t># app      -&gt; </a:t>
+            </a:r>
+            <a:r>
+              <a:rPr dirty="0" err="1"/>
+              <a:t>FastAPI</a:t>
+            </a:r>
+            <a:r>
+              <a:rPr dirty="0"/>
+              <a:t> object inside main.py</a:t>
+            </a:r>
+            <a:br>
+              <a:rPr dirty="0"/>
+            </a:br>
+            <a:r>
+              <a:rPr dirty="0"/>
               <a:t># --reload -&gt; restart after code changes</a:t>
             </a:r>
-            <a:br/>
-            <a:r>
+            <a:br>
+              <a:rPr dirty="0"/>
+            </a:br>
+            <a:r>
+              <a:rPr dirty="0"/>
               <a:t># --port   -&gt; run User Service on port 8001</a:t>
             </a:r>
-            <a:br/>
-            <a:br/>
-            <a:r>
+            <a:br>
+              <a:rPr dirty="0"/>
+            </a:br>
+            <a:br>
+              <a:rPr dirty="0"/>
+            </a:br>
+            <a:r>
+              <a:rPr dirty="0"/>
               <a:t># Expected:</a:t>
             </a:r>
-            <a:br/>
-            <a:r>
+            <a:br>
+              <a:rPr dirty="0"/>
+            </a:br>
+            <a:r>
+              <a:rPr dirty="0"/>
               <a:t># http://127.0.0.1:8001</a:t>
             </a:r>
           </a:p>
@@ -6304,7 +7409,7 @@
 </file>
 
 <file path=ppt/slides/slide2.xml><?xml version="1.0" encoding="utf-8"?>
-<p:sld xmlns:a="http://schemas.openxmlformats.org/drawingml/2006/main" xmlns:p="http://schemas.openxmlformats.org/presentationml/2006/main" xmlns:r="http://schemas.openxmlformats.org/officeDocument/2006/relationships">
+<p:sld xmlns:a="http://schemas.openxmlformats.org/drawingml/2006/main" xmlns:r="http://schemas.openxmlformats.org/officeDocument/2006/relationships" xmlns:p="http://schemas.openxmlformats.org/presentationml/2006/main">
   <p:cSld>
     <p:bg>
       <p:bgPr>
@@ -6320,7 +7425,14 @@
         <p:cNvGrpSpPr/>
         <p:nvPr/>
       </p:nvGrpSpPr>
-      <p:grpSpPr/>
+      <p:grpSpPr>
+        <a:xfrm>
+          <a:off x="0" y="0"/>
+          <a:ext cx="0" cy="0"/>
+          <a:chOff x="0" y="0"/>
+          <a:chExt cx="0" cy="0"/>
+        </a:xfrm>
+      </p:grpSpPr>
       <p:sp>
         <p:nvSpPr>
           <p:cNvPr id="2" name="TextBox 1"/>
@@ -6396,6 +7508,7 @@
           <a:lstStyle/>
           <a:p>
             <a:pPr algn="ctr"/>
+            <a:endParaRPr/>
           </a:p>
         </p:txBody>
       </p:sp>
@@ -6556,7 +7669,7 @@
 </file>
 
 <file path=ppt/slides/slide20.xml><?xml version="1.0" encoding="utf-8"?>
-<p:sld xmlns:a="http://schemas.openxmlformats.org/drawingml/2006/main" xmlns:p="http://schemas.openxmlformats.org/presentationml/2006/main" xmlns:r="http://schemas.openxmlformats.org/officeDocument/2006/relationships">
+<p:sld xmlns:a="http://schemas.openxmlformats.org/drawingml/2006/main" xmlns:r="http://schemas.openxmlformats.org/officeDocument/2006/relationships" xmlns:p="http://schemas.openxmlformats.org/presentationml/2006/main">
   <p:cSld>
     <p:bg>
       <p:bgPr>
@@ -6572,7 +7685,14 @@
         <p:cNvGrpSpPr/>
         <p:nvPr/>
       </p:nvGrpSpPr>
-      <p:grpSpPr/>
+      <p:grpSpPr>
+        <a:xfrm>
+          <a:off x="0" y="0"/>
+          <a:ext cx="0" cy="0"/>
+          <a:chOff x="0" y="0"/>
+          <a:chExt cx="0" cy="0"/>
+        </a:xfrm>
+      </p:grpSpPr>
       <p:sp>
         <p:nvSpPr>
           <p:cNvPr id="2" name="TextBox 1"/>
@@ -6648,6 +7768,7 @@
           <a:lstStyle/>
           <a:p>
             <a:pPr algn="ctr"/>
+            <a:endParaRPr/>
           </a:p>
         </p:txBody>
       </p:sp>
@@ -6724,7 +7845,7 @@
           </a:fontRef>
         </p:style>
         <p:txBody>
-          <a:bodyPr rtlCol="0" anchor="ctr" wrap="square"/>
+          <a:bodyPr wrap="square" rtlCol="0" anchor="ctr"/>
           <a:lstStyle/>
           <a:p>
             <a:pPr algn="ctr">
@@ -6817,7 +7938,7 @@
 </file>
 
 <file path=ppt/slides/slide21.xml><?xml version="1.0" encoding="utf-8"?>
-<p:sld xmlns:a="http://schemas.openxmlformats.org/drawingml/2006/main" xmlns:p="http://schemas.openxmlformats.org/presentationml/2006/main" xmlns:r="http://schemas.openxmlformats.org/officeDocument/2006/relationships">
+<p:sld xmlns:a="http://schemas.openxmlformats.org/drawingml/2006/main" xmlns:r="http://schemas.openxmlformats.org/officeDocument/2006/relationships" xmlns:p="http://schemas.openxmlformats.org/presentationml/2006/main">
   <p:cSld>
     <p:bg>
       <p:bgPr>
@@ -6833,7 +7954,14 @@
         <p:cNvGrpSpPr/>
         <p:nvPr/>
       </p:nvGrpSpPr>
-      <p:grpSpPr/>
+      <p:grpSpPr>
+        <a:xfrm>
+          <a:off x="0" y="0"/>
+          <a:ext cx="0" cy="0"/>
+          <a:chOff x="0" y="0"/>
+          <a:chExt cx="0" cy="0"/>
+        </a:xfrm>
+      </p:grpSpPr>
       <p:sp>
         <p:nvSpPr>
           <p:cNvPr id="2" name="TextBox 1"/>
@@ -6909,6 +8037,7 @@
           <a:lstStyle/>
           <a:p>
             <a:pPr algn="ctr"/>
+            <a:endParaRPr/>
           </a:p>
         </p:txBody>
       </p:sp>
@@ -7054,7 +8183,7 @@
 </file>
 
 <file path=ppt/slides/slide22.xml><?xml version="1.0" encoding="utf-8"?>
-<p:sld xmlns:a="http://schemas.openxmlformats.org/drawingml/2006/main" xmlns:p="http://schemas.openxmlformats.org/presentationml/2006/main" xmlns:r="http://schemas.openxmlformats.org/officeDocument/2006/relationships">
+<p:sld xmlns:a="http://schemas.openxmlformats.org/drawingml/2006/main" xmlns:r="http://schemas.openxmlformats.org/officeDocument/2006/relationships" xmlns:p="http://schemas.openxmlformats.org/presentationml/2006/main">
   <p:cSld>
     <p:bg>
       <p:bgPr>
@@ -7070,7 +8199,14 @@
         <p:cNvGrpSpPr/>
         <p:nvPr/>
       </p:nvGrpSpPr>
-      <p:grpSpPr/>
+      <p:grpSpPr>
+        <a:xfrm>
+          <a:off x="0" y="0"/>
+          <a:ext cx="0" cy="0"/>
+          <a:chOff x="0" y="0"/>
+          <a:chExt cx="0" cy="0"/>
+        </a:xfrm>
+      </p:grpSpPr>
       <p:sp>
         <p:nvSpPr>
           <p:cNvPr id="2" name="TextBox 1"/>
@@ -7146,6 +8282,7 @@
           <a:lstStyle/>
           <a:p>
             <a:pPr algn="ctr"/>
+            <a:endParaRPr/>
           </a:p>
         </p:txBody>
       </p:sp>
@@ -7222,7 +8359,7 @@
           </a:fontRef>
         </p:style>
         <p:txBody>
-          <a:bodyPr rtlCol="0" anchor="ctr" wrap="square"/>
+          <a:bodyPr wrap="square" rtlCol="0" anchor="ctr"/>
           <a:lstStyle/>
           <a:p>
             <a:pPr algn="ctr">
@@ -7323,7 +8460,7 @@
 </file>
 
 <file path=ppt/slides/slide23.xml><?xml version="1.0" encoding="utf-8"?>
-<p:sld xmlns:a="http://schemas.openxmlformats.org/drawingml/2006/main" xmlns:p="http://schemas.openxmlformats.org/presentationml/2006/main" xmlns:r="http://schemas.openxmlformats.org/officeDocument/2006/relationships">
+<p:sld xmlns:a="http://schemas.openxmlformats.org/drawingml/2006/main" xmlns:r="http://schemas.openxmlformats.org/officeDocument/2006/relationships" xmlns:p="http://schemas.openxmlformats.org/presentationml/2006/main">
   <p:cSld>
     <p:bg>
       <p:bgPr>
@@ -7339,7 +8476,14 @@
         <p:cNvGrpSpPr/>
         <p:nvPr/>
       </p:nvGrpSpPr>
-      <p:grpSpPr/>
+      <p:grpSpPr>
+        <a:xfrm>
+          <a:off x="0" y="0"/>
+          <a:ext cx="0" cy="0"/>
+          <a:chOff x="0" y="0"/>
+          <a:chExt cx="0" cy="0"/>
+        </a:xfrm>
+      </p:grpSpPr>
       <p:sp>
         <p:nvSpPr>
           <p:cNvPr id="2" name="TextBox 1"/>
@@ -7415,6 +8559,7 @@
           <a:lstStyle/>
           <a:p>
             <a:pPr algn="ctr"/>
+            <a:endParaRPr/>
           </a:p>
         </p:txBody>
       </p:sp>
@@ -7491,7 +8636,7 @@
           </a:fontRef>
         </p:style>
         <p:txBody>
-          <a:bodyPr rtlCol="0" anchor="ctr" wrap="square"/>
+          <a:bodyPr wrap="square" rtlCol="0" anchor="ctr"/>
           <a:lstStyle/>
           <a:p>
             <a:pPr algn="ctr">
@@ -7570,7 +8715,7 @@
 </file>
 
 <file path=ppt/slides/slide24.xml><?xml version="1.0" encoding="utf-8"?>
-<p:sld xmlns:a="http://schemas.openxmlformats.org/drawingml/2006/main" xmlns:p="http://schemas.openxmlformats.org/presentationml/2006/main" xmlns:r="http://schemas.openxmlformats.org/officeDocument/2006/relationships">
+<p:sld xmlns:a="http://schemas.openxmlformats.org/drawingml/2006/main" xmlns:r="http://schemas.openxmlformats.org/officeDocument/2006/relationships" xmlns:p="http://schemas.openxmlformats.org/presentationml/2006/main">
   <p:cSld>
     <p:bg>
       <p:bgPr>
@@ -7586,7 +8731,14 @@
         <p:cNvGrpSpPr/>
         <p:nvPr/>
       </p:nvGrpSpPr>
-      <p:grpSpPr/>
+      <p:grpSpPr>
+        <a:xfrm>
+          <a:off x="0" y="0"/>
+          <a:ext cx="0" cy="0"/>
+          <a:chOff x="0" y="0"/>
+          <a:chExt cx="0" cy="0"/>
+        </a:xfrm>
+      </p:grpSpPr>
       <p:sp>
         <p:nvSpPr>
           <p:cNvPr id="2" name="TextBox 1"/>
@@ -7662,6 +8814,7 @@
           <a:lstStyle/>
           <a:p>
             <a:pPr algn="ctr"/>
+            <a:endParaRPr/>
           </a:p>
         </p:txBody>
       </p:sp>
@@ -7738,7 +8891,7 @@
           </a:fontRef>
         </p:style>
         <p:txBody>
-          <a:bodyPr rtlCol="0" anchor="ctr" wrap="square"/>
+          <a:bodyPr wrap="square" rtlCol="0" anchor="ctr"/>
           <a:lstStyle/>
           <a:p>
             <a:pPr algn="ctr">
@@ -7843,7 +8996,7 @@
 </file>
 
 <file path=ppt/slides/slide25.xml><?xml version="1.0" encoding="utf-8"?>
-<p:sld xmlns:a="http://schemas.openxmlformats.org/drawingml/2006/main" xmlns:p="http://schemas.openxmlformats.org/presentationml/2006/main" xmlns:r="http://schemas.openxmlformats.org/officeDocument/2006/relationships">
+<p:sld xmlns:a="http://schemas.openxmlformats.org/drawingml/2006/main" xmlns:r="http://schemas.openxmlformats.org/officeDocument/2006/relationships" xmlns:p="http://schemas.openxmlformats.org/presentationml/2006/main">
   <p:cSld>
     <p:bg>
       <p:bgPr>
@@ -7859,7 +9012,14 @@
         <p:cNvGrpSpPr/>
         <p:nvPr/>
       </p:nvGrpSpPr>
-      <p:grpSpPr/>
+      <p:grpSpPr>
+        <a:xfrm>
+          <a:off x="0" y="0"/>
+          <a:ext cx="0" cy="0"/>
+          <a:chOff x="0" y="0"/>
+          <a:chExt cx="0" cy="0"/>
+        </a:xfrm>
+      </p:grpSpPr>
       <p:sp>
         <p:nvSpPr>
           <p:cNvPr id="2" name="TextBox 1"/>
@@ -7935,6 +9095,7 @@
           <a:lstStyle/>
           <a:p>
             <a:pPr algn="ctr"/>
+            <a:endParaRPr/>
           </a:p>
         </p:txBody>
       </p:sp>
@@ -8011,7 +9172,7 @@
           </a:fontRef>
         </p:style>
         <p:txBody>
-          <a:bodyPr rtlCol="0" anchor="ctr" wrap="square"/>
+          <a:bodyPr wrap="square" rtlCol="0" anchor="ctr"/>
           <a:lstStyle/>
           <a:p>
             <a:pPr algn="ctr">
@@ -8076,7 +9237,7 @@
 </file>
 
 <file path=ppt/slides/slide26.xml><?xml version="1.0" encoding="utf-8"?>
-<p:sld xmlns:a="http://schemas.openxmlformats.org/drawingml/2006/main" xmlns:p="http://schemas.openxmlformats.org/presentationml/2006/main" xmlns:r="http://schemas.openxmlformats.org/officeDocument/2006/relationships">
+<p:sld xmlns:a="http://schemas.openxmlformats.org/drawingml/2006/main" xmlns:r="http://schemas.openxmlformats.org/officeDocument/2006/relationships" xmlns:p="http://schemas.openxmlformats.org/presentationml/2006/main">
   <p:cSld>
     <p:bg>
       <p:bgPr>
@@ -8092,7 +9253,14 @@
         <p:cNvGrpSpPr/>
         <p:nvPr/>
       </p:nvGrpSpPr>
-      <p:grpSpPr/>
+      <p:grpSpPr>
+        <a:xfrm>
+          <a:off x="0" y="0"/>
+          <a:ext cx="0" cy="0"/>
+          <a:chOff x="0" y="0"/>
+          <a:chExt cx="0" cy="0"/>
+        </a:xfrm>
+      </p:grpSpPr>
       <p:sp>
         <p:nvSpPr>
           <p:cNvPr id="2" name="TextBox 1"/>
@@ -8168,6 +9336,7 @@
           <a:lstStyle/>
           <a:p>
             <a:pPr algn="ctr"/>
+            <a:endParaRPr/>
           </a:p>
         </p:txBody>
       </p:sp>
@@ -8300,6 +9469,7 @@
           <a:lstStyle/>
           <a:p>
             <a:pPr algn="ctr"/>
+            <a:endParaRPr/>
           </a:p>
         </p:txBody>
       </p:sp>
@@ -8397,6 +9567,7 @@
           <a:lstStyle/>
           <a:p>
             <a:pPr algn="ctr"/>
+            <a:endParaRPr/>
           </a:p>
         </p:txBody>
       </p:sp>
@@ -8498,6 +9669,7 @@
           <a:lstStyle/>
           <a:p>
             <a:pPr algn="ctr"/>
+            <a:endParaRPr/>
           </a:p>
         </p:txBody>
       </p:sp>
@@ -8599,6 +9771,7 @@
           <a:lstStyle/>
           <a:p>
             <a:pPr algn="ctr"/>
+            <a:endParaRPr/>
           </a:p>
         </p:txBody>
       </p:sp>
@@ -8767,7 +9940,7 @@
 </file>
 
 <file path=ppt/slides/slide27.xml><?xml version="1.0" encoding="utf-8"?>
-<p:sld xmlns:a="http://schemas.openxmlformats.org/drawingml/2006/main" xmlns:p="http://schemas.openxmlformats.org/presentationml/2006/main" xmlns:r="http://schemas.openxmlformats.org/officeDocument/2006/relationships">
+<p:sld xmlns:a="http://schemas.openxmlformats.org/drawingml/2006/main" xmlns:r="http://schemas.openxmlformats.org/officeDocument/2006/relationships" xmlns:p="http://schemas.openxmlformats.org/presentationml/2006/main">
   <p:cSld>
     <p:bg>
       <p:bgPr>
@@ -8783,7 +9956,14 @@
         <p:cNvGrpSpPr/>
         <p:nvPr/>
       </p:nvGrpSpPr>
-      <p:grpSpPr/>
+      <p:grpSpPr>
+        <a:xfrm>
+          <a:off x="0" y="0"/>
+          <a:ext cx="0" cy="0"/>
+          <a:chOff x="0" y="0"/>
+          <a:chExt cx="0" cy="0"/>
+        </a:xfrm>
+      </p:grpSpPr>
       <p:sp>
         <p:nvSpPr>
           <p:cNvPr id="2" name="TextBox 1"/>
@@ -8859,6 +10039,7 @@
           <a:lstStyle/>
           <a:p>
             <a:pPr algn="ctr"/>
+            <a:endParaRPr/>
           </a:p>
         </p:txBody>
       </p:sp>
@@ -8935,7 +10116,7 @@
           </a:fontRef>
         </p:style>
         <p:txBody>
-          <a:bodyPr rtlCol="0" anchor="ctr" wrap="square"/>
+          <a:bodyPr wrap="square" rtlCol="0" anchor="ctr"/>
           <a:lstStyle/>
           <a:p>
             <a:pPr algn="ctr">
@@ -9005,7 +10186,7 @@
 </file>
 
 <file path=ppt/slides/slide28.xml><?xml version="1.0" encoding="utf-8"?>
-<p:sld xmlns:a="http://schemas.openxmlformats.org/drawingml/2006/main" xmlns:p="http://schemas.openxmlformats.org/presentationml/2006/main" xmlns:r="http://schemas.openxmlformats.org/officeDocument/2006/relationships">
+<p:sld xmlns:a="http://schemas.openxmlformats.org/drawingml/2006/main" xmlns:r="http://schemas.openxmlformats.org/officeDocument/2006/relationships" xmlns:p="http://schemas.openxmlformats.org/presentationml/2006/main">
   <p:cSld>
     <p:bg>
       <p:bgPr>
@@ -9021,7 +10202,14 @@
         <p:cNvGrpSpPr/>
         <p:nvPr/>
       </p:nvGrpSpPr>
-      <p:grpSpPr/>
+      <p:grpSpPr>
+        <a:xfrm>
+          <a:off x="0" y="0"/>
+          <a:ext cx="0" cy="0"/>
+          <a:chOff x="0" y="0"/>
+          <a:chExt cx="0" cy="0"/>
+        </a:xfrm>
+      </p:grpSpPr>
       <p:sp>
         <p:nvSpPr>
           <p:cNvPr id="2" name="TextBox 1"/>
@@ -9097,6 +10285,7 @@
           <a:lstStyle/>
           <a:p>
             <a:pPr algn="ctr"/>
+            <a:endParaRPr/>
           </a:p>
         </p:txBody>
       </p:sp>
@@ -9229,6 +10418,7 @@
           <a:lstStyle/>
           <a:p>
             <a:pPr algn="ctr"/>
+            <a:endParaRPr/>
           </a:p>
         </p:txBody>
       </p:sp>
@@ -9330,6 +10520,7 @@
           <a:lstStyle/>
           <a:p>
             <a:pPr algn="ctr"/>
+            <a:endParaRPr/>
           </a:p>
         </p:txBody>
       </p:sp>
@@ -9431,6 +10622,7 @@
           <a:lstStyle/>
           <a:p>
             <a:pPr algn="ctr"/>
+            <a:endParaRPr/>
           </a:p>
         </p:txBody>
       </p:sp>
@@ -9580,7 +10772,7 @@
 </file>
 
 <file path=ppt/slides/slide29.xml><?xml version="1.0" encoding="utf-8"?>
-<p:sld xmlns:a="http://schemas.openxmlformats.org/drawingml/2006/main" xmlns:p="http://schemas.openxmlformats.org/presentationml/2006/main" xmlns:r="http://schemas.openxmlformats.org/officeDocument/2006/relationships">
+<p:sld xmlns:a="http://schemas.openxmlformats.org/drawingml/2006/main" xmlns:r="http://schemas.openxmlformats.org/officeDocument/2006/relationships" xmlns:p="http://schemas.openxmlformats.org/presentationml/2006/main">
   <p:cSld>
     <p:bg>
       <p:bgPr>
@@ -9596,7 +10788,14 @@
         <p:cNvGrpSpPr/>
         <p:nvPr/>
       </p:nvGrpSpPr>
-      <p:grpSpPr/>
+      <p:grpSpPr>
+        <a:xfrm>
+          <a:off x="0" y="0"/>
+          <a:ext cx="0" cy="0"/>
+          <a:chOff x="0" y="0"/>
+          <a:chExt cx="0" cy="0"/>
+        </a:xfrm>
+      </p:grpSpPr>
       <p:sp>
         <p:nvSpPr>
           <p:cNvPr id="2" name="TextBox 1"/>
@@ -9672,6 +10871,7 @@
           <a:lstStyle/>
           <a:p>
             <a:pPr algn="ctr"/>
+            <a:endParaRPr/>
           </a:p>
         </p:txBody>
       </p:sp>
@@ -9847,7 +11047,7 @@
 </file>
 
 <file path=ppt/slides/slide3.xml><?xml version="1.0" encoding="utf-8"?>
-<p:sld xmlns:a="http://schemas.openxmlformats.org/drawingml/2006/main" xmlns:p="http://schemas.openxmlformats.org/presentationml/2006/main" xmlns:r="http://schemas.openxmlformats.org/officeDocument/2006/relationships">
+<p:sld xmlns:a="http://schemas.openxmlformats.org/drawingml/2006/main" xmlns:r="http://schemas.openxmlformats.org/officeDocument/2006/relationships" xmlns:p="http://schemas.openxmlformats.org/presentationml/2006/main">
   <p:cSld>
     <p:bg>
       <p:bgPr>
@@ -9863,7 +11063,14 @@
         <p:cNvGrpSpPr/>
         <p:nvPr/>
       </p:nvGrpSpPr>
-      <p:grpSpPr/>
+      <p:grpSpPr>
+        <a:xfrm>
+          <a:off x="0" y="0"/>
+          <a:ext cx="0" cy="0"/>
+          <a:chOff x="0" y="0"/>
+          <a:chExt cx="0" cy="0"/>
+        </a:xfrm>
+      </p:grpSpPr>
       <p:sp>
         <p:nvSpPr>
           <p:cNvPr id="2" name="TextBox 1"/>
@@ -9974,6 +11181,7 @@
           <a:lstStyle/>
           <a:p>
             <a:pPr algn="ctr"/>
+            <a:endParaRPr/>
           </a:p>
         </p:txBody>
       </p:sp>
@@ -10110,6 +11318,7 @@
           <a:lstStyle/>
           <a:p>
             <a:pPr algn="ctr"/>
+            <a:endParaRPr/>
           </a:p>
         </p:txBody>
       </p:sp>
@@ -10211,6 +11420,7 @@
           <a:lstStyle/>
           <a:p>
             <a:pPr algn="ctr"/>
+            <a:endParaRPr/>
           </a:p>
         </p:txBody>
       </p:sp>
@@ -10349,7 +11559,7 @@
 </file>
 
 <file path=ppt/slides/slide30.xml><?xml version="1.0" encoding="utf-8"?>
-<p:sld xmlns:a="http://schemas.openxmlformats.org/drawingml/2006/main" xmlns:p="http://schemas.openxmlformats.org/presentationml/2006/main" xmlns:r="http://schemas.openxmlformats.org/officeDocument/2006/relationships">
+<p:sld xmlns:a="http://schemas.openxmlformats.org/drawingml/2006/main" xmlns:r="http://schemas.openxmlformats.org/officeDocument/2006/relationships" xmlns:p="http://schemas.openxmlformats.org/presentationml/2006/main">
   <p:cSld>
     <p:bg>
       <p:bgPr>
@@ -10365,7 +11575,14 @@
         <p:cNvGrpSpPr/>
         <p:nvPr/>
       </p:nvGrpSpPr>
-      <p:grpSpPr/>
+      <p:grpSpPr>
+        <a:xfrm>
+          <a:off x="0" y="0"/>
+          <a:ext cx="0" cy="0"/>
+          <a:chOff x="0" y="0"/>
+          <a:chExt cx="0" cy="0"/>
+        </a:xfrm>
+      </p:grpSpPr>
       <p:sp>
         <p:nvSpPr>
           <p:cNvPr id="2" name="TextBox 1"/>
@@ -10441,6 +11658,7 @@
           <a:lstStyle/>
           <a:p>
             <a:pPr algn="ctr"/>
+            <a:endParaRPr/>
           </a:p>
         </p:txBody>
       </p:sp>
@@ -10517,7 +11735,7 @@
           </a:fontRef>
         </p:style>
         <p:txBody>
-          <a:bodyPr rtlCol="0" anchor="ctr" wrap="square"/>
+          <a:bodyPr wrap="square" rtlCol="0" anchor="ctr"/>
           <a:lstStyle/>
           <a:p>
             <a:pPr algn="ctr">
@@ -10601,7 +11819,7 @@
 </file>
 
 <file path=ppt/slides/slide31.xml><?xml version="1.0" encoding="utf-8"?>
-<p:sld xmlns:a="http://schemas.openxmlformats.org/drawingml/2006/main" xmlns:p="http://schemas.openxmlformats.org/presentationml/2006/main" xmlns:r="http://schemas.openxmlformats.org/officeDocument/2006/relationships">
+<p:sld xmlns:a="http://schemas.openxmlformats.org/drawingml/2006/main" xmlns:r="http://schemas.openxmlformats.org/officeDocument/2006/relationships" xmlns:p="http://schemas.openxmlformats.org/presentationml/2006/main">
   <p:cSld>
     <p:bg>
       <p:bgPr>
@@ -10617,7 +11835,14 @@
         <p:cNvGrpSpPr/>
         <p:nvPr/>
       </p:nvGrpSpPr>
-      <p:grpSpPr/>
+      <p:grpSpPr>
+        <a:xfrm>
+          <a:off x="0" y="0"/>
+          <a:ext cx="0" cy="0"/>
+          <a:chOff x="0" y="0"/>
+          <a:chExt cx="0" cy="0"/>
+        </a:xfrm>
+      </p:grpSpPr>
       <p:sp>
         <p:nvSpPr>
           <p:cNvPr id="2" name="TextBox 1"/>
@@ -10693,6 +11918,7 @@
           <a:lstStyle/>
           <a:p>
             <a:pPr algn="ctr"/>
+            <a:endParaRPr/>
           </a:p>
         </p:txBody>
       </p:sp>
@@ -10928,7 +12154,7 @@
 </file>
 
 <file path=ppt/slides/slide32.xml><?xml version="1.0" encoding="utf-8"?>
-<p:sld xmlns:a="http://schemas.openxmlformats.org/drawingml/2006/main" xmlns:p="http://schemas.openxmlformats.org/presentationml/2006/main" xmlns:r="http://schemas.openxmlformats.org/officeDocument/2006/relationships">
+<p:sld xmlns:a="http://schemas.openxmlformats.org/drawingml/2006/main" xmlns:r="http://schemas.openxmlformats.org/officeDocument/2006/relationships" xmlns:p="http://schemas.openxmlformats.org/presentationml/2006/main">
   <p:cSld>
     <p:bg>
       <p:bgPr>
@@ -10944,7 +12170,14 @@
         <p:cNvGrpSpPr/>
         <p:nvPr/>
       </p:nvGrpSpPr>
-      <p:grpSpPr/>
+      <p:grpSpPr>
+        <a:xfrm>
+          <a:off x="0" y="0"/>
+          <a:ext cx="0" cy="0"/>
+          <a:chOff x="0" y="0"/>
+          <a:chExt cx="0" cy="0"/>
+        </a:xfrm>
+      </p:grpSpPr>
       <p:sp>
         <p:nvSpPr>
           <p:cNvPr id="2" name="TextBox 1"/>
@@ -11020,6 +12253,7 @@
           <a:lstStyle/>
           <a:p>
             <a:pPr algn="ctr"/>
+            <a:endParaRPr/>
           </a:p>
         </p:txBody>
       </p:sp>
@@ -11240,7 +12474,7 @@
 </file>
 
 <file path=ppt/slides/slide33.xml><?xml version="1.0" encoding="utf-8"?>
-<p:sld xmlns:a="http://schemas.openxmlformats.org/drawingml/2006/main" xmlns:p="http://schemas.openxmlformats.org/presentationml/2006/main" xmlns:r="http://schemas.openxmlformats.org/officeDocument/2006/relationships">
+<p:sld xmlns:a="http://schemas.openxmlformats.org/drawingml/2006/main" xmlns:r="http://schemas.openxmlformats.org/officeDocument/2006/relationships" xmlns:p="http://schemas.openxmlformats.org/presentationml/2006/main">
   <p:cSld>
     <p:bg>
       <p:bgPr>
@@ -11256,7 +12490,14 @@
         <p:cNvGrpSpPr/>
         <p:nvPr/>
       </p:nvGrpSpPr>
-      <p:grpSpPr/>
+      <p:grpSpPr>
+        <a:xfrm>
+          <a:off x="0" y="0"/>
+          <a:ext cx="0" cy="0"/>
+          <a:chOff x="0" y="0"/>
+          <a:chExt cx="0" cy="0"/>
+        </a:xfrm>
+      </p:grpSpPr>
       <p:sp>
         <p:nvSpPr>
           <p:cNvPr id="2" name="TextBox 1"/>
@@ -11332,6 +12573,7 @@
           <a:lstStyle/>
           <a:p>
             <a:pPr algn="ctr"/>
+            <a:endParaRPr/>
           </a:p>
         </p:txBody>
       </p:sp>
@@ -11468,6 +12710,7 @@
           <a:lstStyle/>
           <a:p>
             <a:pPr algn="ctr"/>
+            <a:endParaRPr/>
           </a:p>
         </p:txBody>
       </p:sp>
@@ -11565,6 +12808,7 @@
           <a:lstStyle/>
           <a:p>
             <a:pPr algn="ctr"/>
+            <a:endParaRPr/>
           </a:p>
         </p:txBody>
       </p:sp>
@@ -11662,6 +12906,7 @@
           <a:lstStyle/>
           <a:p>
             <a:pPr algn="ctr"/>
+            <a:endParaRPr/>
           </a:p>
         </p:txBody>
       </p:sp>
@@ -11845,7 +13090,7 @@
 </file>
 
 <file path=ppt/slides/slide4.xml><?xml version="1.0" encoding="utf-8"?>
-<p:sld xmlns:a="http://schemas.openxmlformats.org/drawingml/2006/main" xmlns:p="http://schemas.openxmlformats.org/presentationml/2006/main" xmlns:r="http://schemas.openxmlformats.org/officeDocument/2006/relationships">
+<p:sld xmlns:a="http://schemas.openxmlformats.org/drawingml/2006/main" xmlns:r="http://schemas.openxmlformats.org/officeDocument/2006/relationships" xmlns:p="http://schemas.openxmlformats.org/presentationml/2006/main">
   <p:cSld>
     <p:bg>
       <p:bgPr>
@@ -11861,7 +13106,14 @@
         <p:cNvGrpSpPr/>
         <p:nvPr/>
       </p:nvGrpSpPr>
-      <p:grpSpPr/>
+      <p:grpSpPr>
+        <a:xfrm>
+          <a:off x="0" y="0"/>
+          <a:ext cx="0" cy="0"/>
+          <a:chOff x="0" y="0"/>
+          <a:chExt cx="0" cy="0"/>
+        </a:xfrm>
+      </p:grpSpPr>
       <p:sp>
         <p:nvSpPr>
           <p:cNvPr id="2" name="TextBox 1"/>
@@ -11937,6 +13189,7 @@
           <a:lstStyle/>
           <a:p>
             <a:pPr algn="ctr"/>
+            <a:endParaRPr/>
           </a:p>
         </p:txBody>
       </p:sp>
@@ -12097,7 +13350,7 @@
 </file>
 
 <file path=ppt/slides/slide5.xml><?xml version="1.0" encoding="utf-8"?>
-<p:sld xmlns:a="http://schemas.openxmlformats.org/drawingml/2006/main" xmlns:p="http://schemas.openxmlformats.org/presentationml/2006/main" xmlns:r="http://schemas.openxmlformats.org/officeDocument/2006/relationships">
+<p:sld xmlns:a="http://schemas.openxmlformats.org/drawingml/2006/main" xmlns:r="http://schemas.openxmlformats.org/officeDocument/2006/relationships" xmlns:p="http://schemas.openxmlformats.org/presentationml/2006/main">
   <p:cSld>
     <p:bg>
       <p:bgPr>
@@ -12113,7 +13366,14 @@
         <p:cNvGrpSpPr/>
         <p:nvPr/>
       </p:nvGrpSpPr>
-      <p:grpSpPr/>
+      <p:grpSpPr>
+        <a:xfrm>
+          <a:off x="0" y="0"/>
+          <a:ext cx="0" cy="0"/>
+          <a:chOff x="0" y="0"/>
+          <a:chExt cx="0" cy="0"/>
+        </a:xfrm>
+      </p:grpSpPr>
       <p:sp>
         <p:nvSpPr>
           <p:cNvPr id="2" name="TextBox 1"/>
@@ -12189,6 +13449,7 @@
           <a:lstStyle/>
           <a:p>
             <a:pPr algn="ctr"/>
+            <a:endParaRPr/>
           </a:p>
         </p:txBody>
       </p:sp>
@@ -12265,7 +13526,7 @@
           </a:fontRef>
         </p:style>
         <p:txBody>
-          <a:bodyPr rtlCol="0" anchor="ctr" wrap="square"/>
+          <a:bodyPr wrap="square" rtlCol="0" anchor="ctr"/>
           <a:lstStyle/>
           <a:p>
             <a:pPr algn="ctr">
@@ -12333,7 +13594,7 @@
 </file>
 
 <file path=ppt/slides/slide6.xml><?xml version="1.0" encoding="utf-8"?>
-<p:sld xmlns:a="http://schemas.openxmlformats.org/drawingml/2006/main" xmlns:p="http://schemas.openxmlformats.org/presentationml/2006/main" xmlns:r="http://schemas.openxmlformats.org/officeDocument/2006/relationships">
+<p:sld xmlns:a="http://schemas.openxmlformats.org/drawingml/2006/main" xmlns:r="http://schemas.openxmlformats.org/officeDocument/2006/relationships" xmlns:p="http://schemas.openxmlformats.org/presentationml/2006/main">
   <p:cSld>
     <p:bg>
       <p:bgPr>
@@ -12349,7 +13610,14 @@
         <p:cNvGrpSpPr/>
         <p:nvPr/>
       </p:nvGrpSpPr>
-      <p:grpSpPr/>
+      <p:grpSpPr>
+        <a:xfrm>
+          <a:off x="0" y="0"/>
+          <a:ext cx="0" cy="0"/>
+          <a:chOff x="0" y="0"/>
+          <a:chExt cx="0" cy="0"/>
+        </a:xfrm>
+      </p:grpSpPr>
       <p:sp>
         <p:nvSpPr>
           <p:cNvPr id="2" name="TextBox 1"/>
@@ -12425,6 +13693,7 @@
           <a:lstStyle/>
           <a:p>
             <a:pPr algn="ctr"/>
+            <a:endParaRPr/>
           </a:p>
         </p:txBody>
       </p:sp>
@@ -12501,7 +13770,7 @@
           </a:fontRef>
         </p:style>
         <p:txBody>
-          <a:bodyPr rtlCol="0" anchor="ctr" wrap="square"/>
+          <a:bodyPr wrap="square" rtlCol="0" anchor="ctr"/>
           <a:lstStyle/>
           <a:p>
             <a:pPr algn="ctr">
@@ -12513,33 +13782,66 @@
               </a:defRPr>
             </a:pPr>
             <a:r>
+              <a:rPr dirty="0"/>
               <a:t>cd C:\Users\biome\Documents\Learning\car-rental-platform</a:t>
             </a:r>
-            <a:br/>
-            <a:br/>
-            <a:r>
+            <a:br>
+              <a:rPr dirty="0"/>
+            </a:br>
+            <a:br>
+              <a:rPr dirty="0"/>
+            </a:br>
+            <a:r>
+              <a:rPr dirty="0"/>
               <a:t># Confirm we are in the correct Git repository.</a:t>
             </a:r>
-            <a:br/>
-            <a:r>
+            <a:br>
+              <a:rPr dirty="0"/>
+            </a:br>
+            <a:r>
+              <a:rPr dirty="0"/>
               <a:t>git status</a:t>
             </a:r>
-            <a:br/>
-            <a:br/>
-            <a:r>
+            <a:br>
+              <a:rPr dirty="0"/>
+            </a:br>
+            <a:br>
+              <a:rPr dirty="0"/>
+            </a:br>
+            <a:r>
+              <a:rPr dirty="0"/>
               <a:t># Confirm the Project 1 commit exists.</a:t>
             </a:r>
-            <a:br/>
-            <a:r>
-              <a:t>git log --oneline -5</a:t>
-            </a:r>
-            <a:br/>
-            <a:br/>
-            <a:r>
+            <a:br>
+              <a:rPr dirty="0"/>
+            </a:br>
+            <a:r>
+              <a:rPr dirty="0"/>
+              <a:t>git log --</a:t>
+            </a:r>
+            <a:r>
+              <a:rPr dirty="0" err="1"/>
+              <a:t>oneline</a:t>
+            </a:r>
+            <a:r>
+              <a:rPr dirty="0"/>
+              <a:t> -5</a:t>
+            </a:r>
+            <a:br>
+              <a:rPr dirty="0"/>
+            </a:br>
+            <a:br>
+              <a:rPr dirty="0"/>
+            </a:br>
+            <a:r>
+              <a:rPr dirty="0"/>
               <a:t># Open the repository in VS Code.</a:t>
             </a:r>
-            <a:br/>
-            <a:r>
+            <a:br>
+              <a:rPr dirty="0"/>
+            </a:br>
+            <a:r>
+              <a:rPr dirty="0"/>
               <a:t>code .</a:t>
             </a:r>
           </a:p>
@@ -12592,7 +13894,7 @@
 </file>
 
 <file path=ppt/slides/slide7.xml><?xml version="1.0" encoding="utf-8"?>
-<p:sld xmlns:a="http://schemas.openxmlformats.org/drawingml/2006/main" xmlns:p="http://schemas.openxmlformats.org/presentationml/2006/main" xmlns:r="http://schemas.openxmlformats.org/officeDocument/2006/relationships">
+<p:sld xmlns:a="http://schemas.openxmlformats.org/drawingml/2006/main" xmlns:r="http://schemas.openxmlformats.org/officeDocument/2006/relationships" xmlns:p="http://schemas.openxmlformats.org/presentationml/2006/main">
   <p:cSld>
     <p:bg>
       <p:bgPr>
@@ -12608,7 +13910,14 @@
         <p:cNvGrpSpPr/>
         <p:nvPr/>
       </p:nvGrpSpPr>
-      <p:grpSpPr/>
+      <p:grpSpPr>
+        <a:xfrm>
+          <a:off x="0" y="0"/>
+          <a:ext cx="0" cy="0"/>
+          <a:chOff x="0" y="0"/>
+          <a:chExt cx="0" cy="0"/>
+        </a:xfrm>
+      </p:grpSpPr>
       <p:sp>
         <p:nvSpPr>
           <p:cNvPr id="2" name="TextBox 1"/>
@@ -12684,6 +13993,7 @@
           <a:lstStyle/>
           <a:p>
             <a:pPr algn="ctr"/>
+            <a:endParaRPr/>
           </a:p>
         </p:txBody>
       </p:sp>
@@ -12760,7 +14070,7 @@
           </a:fontRef>
         </p:style>
         <p:txBody>
-          <a:bodyPr rtlCol="0" anchor="ctr" wrap="square"/>
+          <a:bodyPr wrap="square" rtlCol="0" anchor="ctr"/>
           <a:lstStyle/>
           <a:p>
             <a:pPr algn="ctr">
@@ -12868,7 +14178,7 @@
 </file>
 
 <file path=ppt/slides/slide8.xml><?xml version="1.0" encoding="utf-8"?>
-<p:sld xmlns:a="http://schemas.openxmlformats.org/drawingml/2006/main" xmlns:p="http://schemas.openxmlformats.org/presentationml/2006/main" xmlns:r="http://schemas.openxmlformats.org/officeDocument/2006/relationships">
+<p:sld xmlns:a="http://schemas.openxmlformats.org/drawingml/2006/main" xmlns:r="http://schemas.openxmlformats.org/officeDocument/2006/relationships" xmlns:p="http://schemas.openxmlformats.org/presentationml/2006/main">
   <p:cSld>
     <p:bg>
       <p:bgPr>
@@ -12884,7 +14194,14 @@
         <p:cNvGrpSpPr/>
         <p:nvPr/>
       </p:nvGrpSpPr>
-      <p:grpSpPr/>
+      <p:grpSpPr>
+        <a:xfrm>
+          <a:off x="0" y="0"/>
+          <a:ext cx="0" cy="0"/>
+          <a:chOff x="0" y="0"/>
+          <a:chExt cx="0" cy="0"/>
+        </a:xfrm>
+      </p:grpSpPr>
       <p:sp>
         <p:nvSpPr>
           <p:cNvPr id="2" name="TextBox 1"/>
@@ -12960,6 +14277,7 @@
           <a:lstStyle/>
           <a:p>
             <a:pPr algn="ctr"/>
+            <a:endParaRPr/>
           </a:p>
         </p:txBody>
       </p:sp>
@@ -13036,7 +14354,7 @@
           </a:fontRef>
         </p:style>
         <p:txBody>
-          <a:bodyPr rtlCol="0" anchor="ctr" wrap="square"/>
+          <a:bodyPr wrap="square" rtlCol="0" anchor="ctr"/>
           <a:lstStyle/>
           <a:p>
             <a:pPr algn="ctr">
@@ -13048,53 +14366,205 @@
               </a:defRPr>
             </a:pPr>
             <a:r>
+              <a:rPr dirty="0"/>
               <a:t>cd services\user-service</a:t>
             </a:r>
-            <a:br/>
-            <a:br/>
-            <a:r>
+            <a:br>
+              <a:rPr dirty="0"/>
+            </a:br>
+            <a:br>
+              <a:rPr dirty="0"/>
+            </a:br>
+            <a:r>
+              <a:rPr dirty="0"/>
               <a:t># Each microservice can manage its own Python dependencies.</a:t>
             </a:r>
-            <a:br/>
-            <a:r>
-              <a:t>python -m venv .venv</a:t>
-            </a:r>
-            <a:br/>
-            <a:br/>
-            <a:r>
+            <a:br>
+              <a:rPr dirty="0"/>
+            </a:br>
+            <a:r>
+              <a:rPr dirty="0"/>
+              <a:t>python -m </a:t>
+            </a:r>
+            <a:r>
+              <a:rPr dirty="0" err="1"/>
+              <a:t>venv</a:t>
+            </a:r>
+            <a:r>
+              <a:rPr dirty="0"/>
+              <a:t> .</a:t>
+            </a:r>
+            <a:r>
+              <a:rPr dirty="0" err="1"/>
+              <a:t>venv</a:t>
+            </a:r>
+            <a:br>
+              <a:rPr dirty="0"/>
+            </a:br>
+            <a:br>
+              <a:rPr dirty="0"/>
+            </a:br>
+            <a:r>
+              <a:rPr dirty="0"/>
               <a:t># Activate the environment in PowerShell.</a:t>
             </a:r>
-            <a:br/>
-            <a:r>
-              <a:t>.\.venv\Scripts\Activate.ps1</a:t>
-            </a:r>
-            <a:br/>
-            <a:br/>
-            <a:r>
+            <a:br>
+              <a:rPr dirty="0"/>
+            </a:br>
+            <a:r>
+              <a:rPr dirty="0"/>
+              <a:t>.\.</a:t>
+            </a:r>
+            <a:r>
+              <a:rPr dirty="0" err="1"/>
+              <a:t>venv</a:t>
+            </a:r>
+            <a:r>
+              <a:rPr dirty="0"/>
+              <a:t>\Scripts\Activate.ps1</a:t>
+            </a:r>
+            <a:endParaRPr lang="en-US" dirty="0"/>
+          </a:p>
+          <a:p>
+            <a:pPr algn="ctr">
+              <a:defRPr sz="1600">
+                <a:solidFill>
+                  <a:srgbClr val="FFFFFF"/>
+                </a:solidFill>
+                <a:latin typeface="Consolas"/>
+              </a:defRPr>
+            </a:pPr>
+            <a:endParaRPr lang="en-US" dirty="0"/>
+          </a:p>
+          <a:p>
+            <a:pPr algn="ctr">
+              <a:defRPr sz="1600">
+                <a:solidFill>
+                  <a:srgbClr val="FFFFFF"/>
+                </a:solidFill>
+                <a:latin typeface="Consolas"/>
+              </a:defRPr>
+            </a:pPr>
+            <a:r>
+              <a:rPr lang="en-US" dirty="0"/>
+              <a:t>source .</a:t>
+            </a:r>
+            <a:r>
+              <a:rPr lang="en-US" dirty="0" err="1"/>
+              <a:t>venv</a:t>
+            </a:r>
+            <a:r>
+              <a:rPr lang="en-US" dirty="0"/>
+              <a:t>/Scripts/activate</a:t>
+            </a:r>
+            <a:br>
+              <a:rPr dirty="0"/>
+            </a:br>
+            <a:br>
+              <a:rPr dirty="0"/>
+            </a:br>
+            <a:r>
+              <a:rPr dirty="0"/>
               <a:t># Upgrade pip.</a:t>
             </a:r>
-            <a:br/>
-            <a:r>
+            <a:br>
+              <a:rPr dirty="0"/>
+            </a:br>
+            <a:r>
+              <a:rPr dirty="0"/>
               <a:t>python -m pip install --upgrade pip</a:t>
             </a:r>
-            <a:br/>
-            <a:br/>
-            <a:r>
-              <a:t># Install FastAPI and the Uvicorn development server.</a:t>
-            </a:r>
-            <a:br/>
-            <a:r>
-              <a:t>pip install fastapi uvicorn</a:t>
-            </a:r>
-            <a:br/>
-            <a:br/>
-            <a:r>
+            <a:br>
+              <a:rPr dirty="0"/>
+            </a:br>
+            <a:br>
+              <a:rPr dirty="0"/>
+            </a:br>
+            <a:r>
+              <a:rPr dirty="0"/>
+              <a:t># Install </a:t>
+            </a:r>
+            <a:r>
+              <a:rPr dirty="0" err="1"/>
+              <a:t>FastAPI</a:t>
+            </a:r>
+            <a:r>
+              <a:rPr dirty="0"/>
+              <a:t> and the </a:t>
+            </a:r>
+            <a:r>
+              <a:rPr dirty="0" err="1"/>
+              <a:t>Uvicorn</a:t>
+            </a:r>
+            <a:r>
+              <a:rPr dirty="0"/>
+              <a:t> development server.</a:t>
+            </a:r>
+            <a:br>
+              <a:rPr dirty="0"/>
+            </a:br>
+            <a:r>
+              <a:rPr dirty="0"/>
+              <a:t>pip install </a:t>
+            </a:r>
+            <a:r>
+              <a:rPr dirty="0" err="1"/>
+              <a:t>fastapi</a:t>
+            </a:r>
+            <a:r>
+              <a:rPr dirty="0"/>
+              <a:t> </a:t>
+            </a:r>
+            <a:r>
+              <a:rPr dirty="0" err="1"/>
+              <a:t>uvicorn</a:t>
+            </a:r>
+            <a:r>
+              <a:rPr lang="en-US" dirty="0"/>
+              <a:t> </a:t>
+            </a:r>
+            <a:r>
+              <a:rPr lang="en-US" sz="1600" dirty="0">
+                <a:solidFill>
+                  <a:srgbClr val="FFFFFF"/>
+                </a:solidFill>
+                <a:latin typeface="Consolas"/>
+              </a:rPr>
+              <a:t>email-validator</a:t>
+            </a:r>
+            <a:br>
+              <a:rPr dirty="0"/>
+            </a:br>
+            <a:br>
+              <a:rPr dirty="0"/>
+            </a:br>
+            <a:r>
+              <a:rPr dirty="0"/>
               <a:t># Confirm installation.</a:t>
             </a:r>
-            <a:br/>
-            <a:r>
+            <a:br>
+              <a:rPr dirty="0"/>
+            </a:br>
+            <a:r>
+              <a:rPr dirty="0"/>
               <a:t>pip list</a:t>
             </a:r>
+            <a:endParaRPr lang="en-US" dirty="0"/>
+          </a:p>
+          <a:p>
+            <a:pPr algn="ctr">
+              <a:defRPr sz="1600">
+                <a:solidFill>
+                  <a:srgbClr val="FFFFFF"/>
+                </a:solidFill>
+                <a:latin typeface="Consolas"/>
+              </a:defRPr>
+            </a:pPr>
+            <a:r>
+              <a:rPr lang="en-US" dirty="0"/>
+              <a:t>pip freeze &gt; requirements.txt</a:t>
+            </a:r>
+            <a:endParaRPr dirty="0"/>
           </a:p>
         </p:txBody>
       </p:sp>
@@ -13107,7 +14577,7 @@
 </file>
 
 <file path=ppt/slides/slide9.xml><?xml version="1.0" encoding="utf-8"?>
-<p:sld xmlns:a="http://schemas.openxmlformats.org/drawingml/2006/main" xmlns:p="http://schemas.openxmlformats.org/presentationml/2006/main" xmlns:r="http://schemas.openxmlformats.org/officeDocument/2006/relationships">
+<p:sld xmlns:a="http://schemas.openxmlformats.org/drawingml/2006/main" xmlns:r="http://schemas.openxmlformats.org/officeDocument/2006/relationships" xmlns:p="http://schemas.openxmlformats.org/presentationml/2006/main">
   <p:cSld>
     <p:bg>
       <p:bgPr>
@@ -13123,7 +14593,14 @@
         <p:cNvGrpSpPr/>
         <p:nvPr/>
       </p:nvGrpSpPr>
-      <p:grpSpPr/>
+      <p:grpSpPr>
+        <a:xfrm>
+          <a:off x="0" y="0"/>
+          <a:ext cx="0" cy="0"/>
+          <a:chOff x="0" y="0"/>
+          <a:chExt cx="0" cy="0"/>
+        </a:xfrm>
+      </p:grpSpPr>
       <p:sp>
         <p:nvSpPr>
           <p:cNvPr id="2" name="TextBox 1"/>
@@ -13234,6 +14711,7 @@
           <a:lstStyle/>
           <a:p>
             <a:pPr algn="ctr"/>
+            <a:endParaRPr/>
           </a:p>
         </p:txBody>
       </p:sp>
@@ -13310,7 +14788,7 @@
           </a:fontRef>
         </p:style>
         <p:txBody>
-          <a:bodyPr rtlCol="0" anchor="ctr" wrap="square"/>
+          <a:bodyPr wrap="square" rtlCol="0" anchor="ctr"/>
           <a:lstStyle/>
           <a:p>
             <a:pPr algn="ctr">
@@ -13322,78 +14800,2369 @@
               </a:defRPr>
             </a:pPr>
             <a:r>
-              <a:t>from enum import Enum</a:t>
-            </a:r>
-            <a:br/>
-            <a:r>
-              <a:t>from pydantic import BaseModel, EmailStr, Field</a:t>
-            </a:r>
-            <a:br/>
-            <a:br/>
-            <a:br/>
-            <a:r>
-              <a:t># Restrict role to known values instead of accepting arbitrary text.</a:t>
-            </a:r>
-            <a:br/>
-            <a:r>
-              <a:t>class UserRole(str, Enum):</a:t>
-            </a:r>
-            <a:br/>
-            <a:r>
+              <a:rPr lang="en-US" dirty="0">
+                <a:highlight>
+                  <a:srgbClr val="0000FF"/>
+                </a:highlight>
+              </a:rPr>
+              <a:t>"""</a:t>
+            </a:r>
+          </a:p>
+          <a:p>
+            <a:pPr algn="ctr">
+              <a:defRPr sz="1200">
+                <a:solidFill>
+                  <a:srgbClr val="FFFFFF"/>
+                </a:solidFill>
+                <a:latin typeface="Consolas"/>
+              </a:defRPr>
+            </a:pPr>
+            <a:r>
+              <a:rPr lang="en-US" dirty="0">
+                <a:highlight>
+                  <a:srgbClr val="0000FF"/>
+                </a:highlight>
+              </a:rPr>
+              <a:t>schemas.py</a:t>
+            </a:r>
+          </a:p>
+          <a:p>
+            <a:pPr algn="ctr">
+              <a:defRPr sz="1200">
+                <a:solidFill>
+                  <a:srgbClr val="FFFFFF"/>
+                </a:solidFill>
+                <a:latin typeface="Consolas"/>
+              </a:defRPr>
+            </a:pPr>
+            <a:endParaRPr lang="en-US" dirty="0">
+              <a:highlight>
+                <a:srgbClr val="0000FF"/>
+              </a:highlight>
+            </a:endParaRPr>
+          </a:p>
+          <a:p>
+            <a:pPr algn="ctr">
+              <a:defRPr sz="1200">
+                <a:solidFill>
+                  <a:srgbClr val="FFFFFF"/>
+                </a:solidFill>
+                <a:latin typeface="Consolas"/>
+              </a:defRPr>
+            </a:pPr>
+            <a:r>
+              <a:rPr lang="en-US" dirty="0">
+                <a:highlight>
+                  <a:srgbClr val="0000FF"/>
+                </a:highlight>
+              </a:rPr>
+              <a:t>Defines the data contracts for the User Service.</a:t>
+            </a:r>
+          </a:p>
+          <a:p>
+            <a:pPr algn="ctr">
+              <a:defRPr sz="1200">
+                <a:solidFill>
+                  <a:srgbClr val="FFFFFF"/>
+                </a:solidFill>
+                <a:latin typeface="Consolas"/>
+              </a:defRPr>
+            </a:pPr>
+            <a:endParaRPr lang="en-US" dirty="0">
+              <a:highlight>
+                <a:srgbClr val="0000FF"/>
+              </a:highlight>
+            </a:endParaRPr>
+          </a:p>
+          <a:p>
+            <a:pPr algn="ctr">
+              <a:defRPr sz="1200">
+                <a:solidFill>
+                  <a:srgbClr val="FFFFFF"/>
+                </a:solidFill>
+                <a:latin typeface="Consolas"/>
+              </a:defRPr>
+            </a:pPr>
+            <a:r>
+              <a:rPr lang="en-US" dirty="0" err="1">
+                <a:highlight>
+                  <a:srgbClr val="0000FF"/>
+                </a:highlight>
+              </a:rPr>
+              <a:t>Pydantic</a:t>
+            </a:r>
+            <a:r>
+              <a:rPr lang="en-US" dirty="0">
+                <a:highlight>
+                  <a:srgbClr val="0000FF"/>
+                </a:highlight>
+              </a:rPr>
+              <a:t> models validate incoming API data and define</a:t>
+            </a:r>
+          </a:p>
+          <a:p>
+            <a:pPr algn="ctr">
+              <a:defRPr sz="1200">
+                <a:solidFill>
+                  <a:srgbClr val="FFFFFF"/>
+                </a:solidFill>
+                <a:latin typeface="Consolas"/>
+              </a:defRPr>
+            </a:pPr>
+            <a:r>
+              <a:rPr lang="en-US" dirty="0">
+                <a:highlight>
+                  <a:srgbClr val="0000FF"/>
+                </a:highlight>
+              </a:rPr>
+              <a:t>the structure of data returned by the API.</a:t>
+            </a:r>
+          </a:p>
+          <a:p>
+            <a:pPr algn="ctr">
+              <a:defRPr sz="1200">
+                <a:solidFill>
+                  <a:srgbClr val="FFFFFF"/>
+                </a:solidFill>
+                <a:latin typeface="Consolas"/>
+              </a:defRPr>
+            </a:pPr>
+            <a:r>
+              <a:rPr lang="en-US" dirty="0">
+                <a:highlight>
+                  <a:srgbClr val="0000FF"/>
+                </a:highlight>
+              </a:rPr>
+              <a:t>"""</a:t>
+            </a:r>
+          </a:p>
+          <a:p>
+            <a:pPr algn="ctr">
+              <a:defRPr sz="1200">
+                <a:solidFill>
+                  <a:srgbClr val="FFFFFF"/>
+                </a:solidFill>
+                <a:latin typeface="Consolas"/>
+              </a:defRPr>
+            </a:pPr>
+            <a:endParaRPr lang="en-US" dirty="0">
+              <a:highlight>
+                <a:srgbClr val="0000FF"/>
+              </a:highlight>
+            </a:endParaRPr>
+          </a:p>
+          <a:p>
+            <a:pPr algn="ctr">
+              <a:defRPr sz="1200">
+                <a:solidFill>
+                  <a:srgbClr val="FFFFFF"/>
+                </a:solidFill>
+                <a:latin typeface="Consolas"/>
+              </a:defRPr>
+            </a:pPr>
+            <a:r>
+              <a:rPr lang="en-US" dirty="0">
+                <a:highlight>
+                  <a:srgbClr val="0000FF"/>
+                </a:highlight>
+              </a:rPr>
+              <a:t>from </a:t>
+            </a:r>
+            <a:r>
+              <a:rPr lang="en-US" dirty="0" err="1">
+                <a:highlight>
+                  <a:srgbClr val="0000FF"/>
+                </a:highlight>
+              </a:rPr>
+              <a:t>enum</a:t>
+            </a:r>
+            <a:r>
+              <a:rPr lang="en-US" dirty="0">
+                <a:highlight>
+                  <a:srgbClr val="0000FF"/>
+                </a:highlight>
+              </a:rPr>
+              <a:t> import Enum</a:t>
+            </a:r>
+          </a:p>
+          <a:p>
+            <a:pPr algn="ctr">
+              <a:defRPr sz="1200">
+                <a:solidFill>
+                  <a:srgbClr val="FFFFFF"/>
+                </a:solidFill>
+                <a:latin typeface="Consolas"/>
+              </a:defRPr>
+            </a:pPr>
+            <a:endParaRPr lang="en-US" dirty="0">
+              <a:highlight>
+                <a:srgbClr val="0000FF"/>
+              </a:highlight>
+            </a:endParaRPr>
+          </a:p>
+          <a:p>
+            <a:pPr algn="ctr">
+              <a:defRPr sz="1200">
+                <a:solidFill>
+                  <a:srgbClr val="FFFFFF"/>
+                </a:solidFill>
+                <a:latin typeface="Consolas"/>
+              </a:defRPr>
+            </a:pPr>
+            <a:r>
+              <a:rPr lang="en-US" dirty="0">
+                <a:highlight>
+                  <a:srgbClr val="0000FF"/>
+                </a:highlight>
+              </a:rPr>
+              <a:t>from </a:t>
+            </a:r>
+            <a:r>
+              <a:rPr lang="en-US" dirty="0" err="1">
+                <a:highlight>
+                  <a:srgbClr val="0000FF"/>
+                </a:highlight>
+              </a:rPr>
+              <a:t>pydantic</a:t>
+            </a:r>
+            <a:r>
+              <a:rPr lang="en-US" dirty="0">
+                <a:highlight>
+                  <a:srgbClr val="0000FF"/>
+                </a:highlight>
+              </a:rPr>
+              <a:t> import </a:t>
+            </a:r>
+            <a:r>
+              <a:rPr lang="en-US" dirty="0" err="1">
+                <a:highlight>
+                  <a:srgbClr val="0000FF"/>
+                </a:highlight>
+              </a:rPr>
+              <a:t>BaseModel</a:t>
+            </a:r>
+            <a:r>
+              <a:rPr lang="en-US" dirty="0">
+                <a:highlight>
+                  <a:srgbClr val="0000FF"/>
+                </a:highlight>
+              </a:rPr>
+              <a:t>, </a:t>
+            </a:r>
+            <a:r>
+              <a:rPr lang="en-US" dirty="0" err="1">
+                <a:highlight>
+                  <a:srgbClr val="0000FF"/>
+                </a:highlight>
+              </a:rPr>
+              <a:t>EmailStr</a:t>
+            </a:r>
+            <a:r>
+              <a:rPr lang="en-US" dirty="0">
+                <a:highlight>
+                  <a:srgbClr val="0000FF"/>
+                </a:highlight>
+              </a:rPr>
+              <a:t>, Field</a:t>
+            </a:r>
+          </a:p>
+          <a:p>
+            <a:pPr algn="ctr">
+              <a:defRPr sz="1200">
+                <a:solidFill>
+                  <a:srgbClr val="FFFFFF"/>
+                </a:solidFill>
+                <a:latin typeface="Consolas"/>
+              </a:defRPr>
+            </a:pPr>
+            <a:endParaRPr lang="en-US" dirty="0">
+              <a:highlight>
+                <a:srgbClr val="0000FF"/>
+              </a:highlight>
+            </a:endParaRPr>
+          </a:p>
+          <a:p>
+            <a:pPr algn="ctr">
+              <a:defRPr sz="1200">
+                <a:solidFill>
+                  <a:srgbClr val="FFFFFF"/>
+                </a:solidFill>
+                <a:latin typeface="Consolas"/>
+              </a:defRPr>
+            </a:pPr>
+            <a:endParaRPr lang="en-US" dirty="0">
+              <a:highlight>
+                <a:srgbClr val="0000FF"/>
+              </a:highlight>
+            </a:endParaRPr>
+          </a:p>
+          <a:p>
+            <a:pPr algn="ctr">
+              <a:defRPr sz="1200">
+                <a:solidFill>
+                  <a:srgbClr val="FFFFFF"/>
+                </a:solidFill>
+                <a:latin typeface="Consolas"/>
+              </a:defRPr>
+            </a:pPr>
+            <a:r>
+              <a:rPr lang="en-US" dirty="0">
+                <a:highlight>
+                  <a:srgbClr val="0000FF"/>
+                </a:highlight>
+              </a:rPr>
+              <a:t># ---------------------------------------------------------</a:t>
+            </a:r>
+          </a:p>
+          <a:p>
+            <a:pPr algn="ctr">
+              <a:defRPr sz="1200">
+                <a:solidFill>
+                  <a:srgbClr val="FFFFFF"/>
+                </a:solidFill>
+                <a:latin typeface="Consolas"/>
+              </a:defRPr>
+            </a:pPr>
+            <a:r>
+              <a:rPr lang="en-US" dirty="0">
+                <a:highlight>
+                  <a:srgbClr val="0000FF"/>
+                </a:highlight>
+              </a:rPr>
+              <a:t># USER ROLES</a:t>
+            </a:r>
+          </a:p>
+          <a:p>
+            <a:pPr algn="ctr">
+              <a:defRPr sz="1200">
+                <a:solidFill>
+                  <a:srgbClr val="FFFFFF"/>
+                </a:solidFill>
+                <a:latin typeface="Consolas"/>
+              </a:defRPr>
+            </a:pPr>
+            <a:r>
+              <a:rPr lang="en-US" dirty="0">
+                <a:highlight>
+                  <a:srgbClr val="0000FF"/>
+                </a:highlight>
+              </a:rPr>
+              <a:t># ---------------------------------------------------------</a:t>
+            </a:r>
+          </a:p>
+          <a:p>
+            <a:pPr algn="ctr">
+              <a:defRPr sz="1200">
+                <a:solidFill>
+                  <a:srgbClr val="FFFFFF"/>
+                </a:solidFill>
+                <a:latin typeface="Consolas"/>
+              </a:defRPr>
+            </a:pPr>
+            <a:endParaRPr lang="en-US" dirty="0">
+              <a:highlight>
+                <a:srgbClr val="0000FF"/>
+              </a:highlight>
+            </a:endParaRPr>
+          </a:p>
+          <a:p>
+            <a:pPr algn="ctr">
+              <a:defRPr sz="1200">
+                <a:solidFill>
+                  <a:srgbClr val="FFFFFF"/>
+                </a:solidFill>
+                <a:latin typeface="Consolas"/>
+              </a:defRPr>
+            </a:pPr>
+            <a:r>
+              <a:rPr lang="en-US" dirty="0">
+                <a:highlight>
+                  <a:srgbClr val="0000FF"/>
+                </a:highlight>
+              </a:rPr>
+              <a:t>class </a:t>
+            </a:r>
+            <a:r>
+              <a:rPr lang="en-US" dirty="0" err="1">
+                <a:highlight>
+                  <a:srgbClr val="0000FF"/>
+                </a:highlight>
+              </a:rPr>
+              <a:t>UserRole</a:t>
+            </a:r>
+            <a:r>
+              <a:rPr lang="en-US" dirty="0">
+                <a:highlight>
+                  <a:srgbClr val="0000FF"/>
+                </a:highlight>
+              </a:rPr>
+              <a:t>(str, Enum):</a:t>
+            </a:r>
+          </a:p>
+          <a:p>
+            <a:pPr algn="ctr">
+              <a:defRPr sz="1200">
+                <a:solidFill>
+                  <a:srgbClr val="FFFFFF"/>
+                </a:solidFill>
+                <a:latin typeface="Consolas"/>
+              </a:defRPr>
+            </a:pPr>
+            <a:r>
+              <a:rPr lang="en-US" dirty="0">
+                <a:highlight>
+                  <a:srgbClr val="0000FF"/>
+                </a:highlight>
+              </a:rPr>
+              <a:t>    """</a:t>
+            </a:r>
+          </a:p>
+          <a:p>
+            <a:pPr algn="ctr">
+              <a:defRPr sz="1200">
+                <a:solidFill>
+                  <a:srgbClr val="FFFFFF"/>
+                </a:solidFill>
+                <a:latin typeface="Consolas"/>
+              </a:defRPr>
+            </a:pPr>
+            <a:r>
+              <a:rPr lang="en-US" dirty="0">
+                <a:highlight>
+                  <a:srgbClr val="0000FF"/>
+                </a:highlight>
+              </a:rPr>
+              <a:t>    Restrict users to roles understood by our application.</a:t>
+            </a:r>
+          </a:p>
+          <a:p>
+            <a:pPr algn="ctr">
+              <a:defRPr sz="1200">
+                <a:solidFill>
+                  <a:srgbClr val="FFFFFF"/>
+                </a:solidFill>
+                <a:latin typeface="Consolas"/>
+              </a:defRPr>
+            </a:pPr>
+            <a:endParaRPr lang="en-US" dirty="0">
+              <a:highlight>
+                <a:srgbClr val="0000FF"/>
+              </a:highlight>
+            </a:endParaRPr>
+          </a:p>
+          <a:p>
+            <a:pPr algn="ctr">
+              <a:defRPr sz="1200">
+                <a:solidFill>
+                  <a:srgbClr val="FFFFFF"/>
+                </a:solidFill>
+                <a:latin typeface="Consolas"/>
+              </a:defRPr>
+            </a:pPr>
+            <a:r>
+              <a:rPr lang="en-US" dirty="0">
+                <a:highlight>
+                  <a:srgbClr val="0000FF"/>
+                </a:highlight>
+              </a:rPr>
+              <a:t>    Using an Enum prevents arbitrary role values from</a:t>
+            </a:r>
+          </a:p>
+          <a:p>
+            <a:pPr algn="ctr">
+              <a:defRPr sz="1200">
+                <a:solidFill>
+                  <a:srgbClr val="FFFFFF"/>
+                </a:solidFill>
+                <a:latin typeface="Consolas"/>
+              </a:defRPr>
+            </a:pPr>
+            <a:r>
+              <a:rPr lang="en-US" dirty="0">
+                <a:highlight>
+                  <a:srgbClr val="0000FF"/>
+                </a:highlight>
+              </a:rPr>
+              <a:t>    being submitted to the API.</a:t>
+            </a:r>
+          </a:p>
+          <a:p>
+            <a:pPr algn="ctr">
+              <a:defRPr sz="1200">
+                <a:solidFill>
+                  <a:srgbClr val="FFFFFF"/>
+                </a:solidFill>
+                <a:latin typeface="Consolas"/>
+              </a:defRPr>
+            </a:pPr>
+            <a:r>
+              <a:rPr lang="en-US" dirty="0">
+                <a:highlight>
+                  <a:srgbClr val="0000FF"/>
+                </a:highlight>
+              </a:rPr>
+              <a:t>    """</a:t>
+            </a:r>
+          </a:p>
+          <a:p>
+            <a:pPr algn="ctr">
+              <a:defRPr sz="1200">
+                <a:solidFill>
+                  <a:srgbClr val="FFFFFF"/>
+                </a:solidFill>
+                <a:latin typeface="Consolas"/>
+              </a:defRPr>
+            </a:pPr>
+            <a:endParaRPr lang="en-US" dirty="0">
+              <a:highlight>
+                <a:srgbClr val="0000FF"/>
+              </a:highlight>
+            </a:endParaRPr>
+          </a:p>
+          <a:p>
+            <a:pPr algn="ctr">
+              <a:defRPr sz="1200">
+                <a:solidFill>
+                  <a:srgbClr val="FFFFFF"/>
+                </a:solidFill>
+                <a:latin typeface="Consolas"/>
+              </a:defRPr>
+            </a:pPr>
+            <a:r>
+              <a:rPr lang="en-US" dirty="0">
+                <a:highlight>
+                  <a:srgbClr val="0000FF"/>
+                </a:highlight>
+              </a:rPr>
               <a:t>    RENTER = "RENTER"</a:t>
             </a:r>
-            <a:br/>
-            <a:r>
+          </a:p>
+          <a:p>
+            <a:pPr algn="ctr">
+              <a:defRPr sz="1200">
+                <a:solidFill>
+                  <a:srgbClr val="FFFFFF"/>
+                </a:solidFill>
+                <a:latin typeface="Consolas"/>
+              </a:defRPr>
+            </a:pPr>
+            <a:r>
+              <a:rPr lang="en-US" dirty="0">
+                <a:highlight>
+                  <a:srgbClr val="0000FF"/>
+                </a:highlight>
+              </a:rPr>
               <a:t>    OWNER = "OWNER"</a:t>
             </a:r>
-            <a:br/>
-            <a:r>
+          </a:p>
+          <a:p>
+            <a:pPr algn="ctr">
+              <a:defRPr sz="1200">
+                <a:solidFill>
+                  <a:srgbClr val="FFFFFF"/>
+                </a:solidFill>
+                <a:latin typeface="Consolas"/>
+              </a:defRPr>
+            </a:pPr>
+            <a:r>
+              <a:rPr lang="en-US" dirty="0">
+                <a:highlight>
+                  <a:srgbClr val="0000FF"/>
+                </a:highlight>
+              </a:rPr>
               <a:t>    ADMIN = "ADMIN"</a:t>
             </a:r>
-            <a:br/>
-            <a:br/>
-            <a:br/>
-            <a:r>
-              <a:t># Fields a client must send when creating a user.</a:t>
-            </a:r>
-            <a:br/>
-            <a:r>
-              <a:t>class UserCreate(BaseModel):</a:t>
-            </a:r>
-            <a:br/>
-            <a:r>
-              <a:t>    first_name: str = Field(min_length=1, max_length=50)</a:t>
-            </a:r>
-            <a:br/>
-            <a:r>
-              <a:t>    last_name: str = Field(min_length=1, max_length=50)</a:t>
-            </a:r>
-            <a:br/>
-            <a:r>
-              <a:t>    email: EmailStr</a:t>
-            </a:r>
-            <a:br/>
-            <a:r>
+          </a:p>
+          <a:p>
+            <a:pPr algn="ctr">
+              <a:defRPr sz="1200">
+                <a:solidFill>
+                  <a:srgbClr val="FFFFFF"/>
+                </a:solidFill>
+                <a:latin typeface="Consolas"/>
+              </a:defRPr>
+            </a:pPr>
+            <a:endParaRPr lang="en-US" dirty="0">
+              <a:highlight>
+                <a:srgbClr val="0000FF"/>
+              </a:highlight>
+            </a:endParaRPr>
+          </a:p>
+          <a:p>
+            <a:pPr algn="ctr">
+              <a:defRPr sz="1200">
+                <a:solidFill>
+                  <a:srgbClr val="FFFFFF"/>
+                </a:solidFill>
+                <a:latin typeface="Consolas"/>
+              </a:defRPr>
+            </a:pPr>
+            <a:endParaRPr lang="en-US" dirty="0">
+              <a:highlight>
+                <a:srgbClr val="0000FF"/>
+              </a:highlight>
+            </a:endParaRPr>
+          </a:p>
+          <a:p>
+            <a:pPr algn="ctr">
+              <a:defRPr sz="1200">
+                <a:solidFill>
+                  <a:srgbClr val="FFFFFF"/>
+                </a:solidFill>
+                <a:latin typeface="Consolas"/>
+              </a:defRPr>
+            </a:pPr>
+            <a:r>
+              <a:rPr lang="en-US" dirty="0">
+                <a:highlight>
+                  <a:srgbClr val="0000FF"/>
+                </a:highlight>
+              </a:rPr>
+              <a:t># ---------------------------------------------------------</a:t>
+            </a:r>
+          </a:p>
+          <a:p>
+            <a:pPr algn="ctr">
+              <a:defRPr sz="1200">
+                <a:solidFill>
+                  <a:srgbClr val="FFFFFF"/>
+                </a:solidFill>
+                <a:latin typeface="Consolas"/>
+              </a:defRPr>
+            </a:pPr>
+            <a:r>
+              <a:rPr lang="en-US" dirty="0">
+                <a:highlight>
+                  <a:srgbClr val="0000FF"/>
+                </a:highlight>
+              </a:rPr>
+              <a:t># CREATE USER</a:t>
+            </a:r>
+          </a:p>
+          <a:p>
+            <a:pPr algn="ctr">
+              <a:defRPr sz="1200">
+                <a:solidFill>
+                  <a:srgbClr val="FFFFFF"/>
+                </a:solidFill>
+                <a:latin typeface="Consolas"/>
+              </a:defRPr>
+            </a:pPr>
+            <a:r>
+              <a:rPr lang="en-US" dirty="0">
+                <a:highlight>
+                  <a:srgbClr val="0000FF"/>
+                </a:highlight>
+              </a:rPr>
+              <a:t># ---------------------------------------------------------</a:t>
+            </a:r>
+          </a:p>
+          <a:p>
+            <a:pPr algn="ctr">
+              <a:defRPr sz="1200">
+                <a:solidFill>
+                  <a:srgbClr val="FFFFFF"/>
+                </a:solidFill>
+                <a:latin typeface="Consolas"/>
+              </a:defRPr>
+            </a:pPr>
+            <a:endParaRPr lang="en-US" dirty="0">
+              <a:highlight>
+                <a:srgbClr val="0000FF"/>
+              </a:highlight>
+            </a:endParaRPr>
+          </a:p>
+          <a:p>
+            <a:pPr algn="ctr">
+              <a:defRPr sz="1200">
+                <a:solidFill>
+                  <a:srgbClr val="FFFFFF"/>
+                </a:solidFill>
+                <a:latin typeface="Consolas"/>
+              </a:defRPr>
+            </a:pPr>
+            <a:r>
+              <a:rPr lang="en-US" dirty="0">
+                <a:highlight>
+                  <a:srgbClr val="0000FF"/>
+                </a:highlight>
+              </a:rPr>
+              <a:t>class </a:t>
+            </a:r>
+            <a:r>
+              <a:rPr lang="en-US" dirty="0" err="1">
+                <a:highlight>
+                  <a:srgbClr val="0000FF"/>
+                </a:highlight>
+              </a:rPr>
+              <a:t>UserCreate</a:t>
+            </a:r>
+            <a:r>
+              <a:rPr lang="en-US" dirty="0">
+                <a:highlight>
+                  <a:srgbClr val="0000FF"/>
+                </a:highlight>
+              </a:rPr>
+              <a:t>(</a:t>
+            </a:r>
+            <a:r>
+              <a:rPr lang="en-US" dirty="0" err="1">
+                <a:highlight>
+                  <a:srgbClr val="0000FF"/>
+                </a:highlight>
+              </a:rPr>
+              <a:t>BaseModel</a:t>
+            </a:r>
+            <a:r>
+              <a:rPr lang="en-US" dirty="0">
+                <a:highlight>
+                  <a:srgbClr val="0000FF"/>
+                </a:highlight>
+              </a:rPr>
+              <a:t>):</a:t>
+            </a:r>
+          </a:p>
+          <a:p>
+            <a:pPr algn="ctr">
+              <a:defRPr sz="1200">
+                <a:solidFill>
+                  <a:srgbClr val="FFFFFF"/>
+                </a:solidFill>
+                <a:latin typeface="Consolas"/>
+              </a:defRPr>
+            </a:pPr>
+            <a:r>
+              <a:rPr lang="en-US" dirty="0">
+                <a:highlight>
+                  <a:srgbClr val="0000FF"/>
+                </a:highlight>
+              </a:rPr>
+              <a:t>    """</a:t>
+            </a:r>
+          </a:p>
+          <a:p>
+            <a:pPr algn="ctr">
+              <a:defRPr sz="1200">
+                <a:solidFill>
+                  <a:srgbClr val="FFFFFF"/>
+                </a:solidFill>
+                <a:latin typeface="Consolas"/>
+              </a:defRPr>
+            </a:pPr>
+            <a:r>
+              <a:rPr lang="en-US" dirty="0">
+                <a:highlight>
+                  <a:srgbClr val="0000FF"/>
+                </a:highlight>
+              </a:rPr>
+              <a:t>    Fields a client can send when creating a user.</a:t>
+            </a:r>
+          </a:p>
+          <a:p>
+            <a:pPr algn="ctr">
+              <a:defRPr sz="1200">
+                <a:solidFill>
+                  <a:srgbClr val="FFFFFF"/>
+                </a:solidFill>
+                <a:latin typeface="Consolas"/>
+              </a:defRPr>
+            </a:pPr>
+            <a:r>
+              <a:rPr lang="en-US" dirty="0">
+                <a:highlight>
+                  <a:srgbClr val="0000FF"/>
+                </a:highlight>
+              </a:rPr>
+              <a:t>    """</a:t>
+            </a:r>
+          </a:p>
+          <a:p>
+            <a:pPr algn="ctr">
+              <a:defRPr sz="1200">
+                <a:solidFill>
+                  <a:srgbClr val="FFFFFF"/>
+                </a:solidFill>
+                <a:latin typeface="Consolas"/>
+              </a:defRPr>
+            </a:pPr>
+            <a:endParaRPr lang="en-US" dirty="0">
+              <a:highlight>
+                <a:srgbClr val="0000FF"/>
+              </a:highlight>
+            </a:endParaRPr>
+          </a:p>
+          <a:p>
+            <a:pPr algn="ctr">
+              <a:defRPr sz="1200">
+                <a:solidFill>
+                  <a:srgbClr val="FFFFFF"/>
+                </a:solidFill>
+                <a:latin typeface="Consolas"/>
+              </a:defRPr>
+            </a:pPr>
+            <a:r>
+              <a:rPr lang="en-US" dirty="0">
+                <a:highlight>
+                  <a:srgbClr val="0000FF"/>
+                </a:highlight>
+              </a:rPr>
+              <a:t>    # Require at least 1 character and prevent</a:t>
+            </a:r>
+          </a:p>
+          <a:p>
+            <a:pPr algn="ctr">
+              <a:defRPr sz="1200">
+                <a:solidFill>
+                  <a:srgbClr val="FFFFFF"/>
+                </a:solidFill>
+                <a:latin typeface="Consolas"/>
+              </a:defRPr>
+            </a:pPr>
+            <a:r>
+              <a:rPr lang="en-US" dirty="0">
+                <a:highlight>
+                  <a:srgbClr val="0000FF"/>
+                </a:highlight>
+              </a:rPr>
+              <a:t>    # excessively long names.</a:t>
+            </a:r>
+          </a:p>
+          <a:p>
+            <a:pPr algn="ctr">
+              <a:defRPr sz="1200">
+                <a:solidFill>
+                  <a:srgbClr val="FFFFFF"/>
+                </a:solidFill>
+                <a:latin typeface="Consolas"/>
+              </a:defRPr>
+            </a:pPr>
+            <a:r>
+              <a:rPr lang="en-US" dirty="0">
+                <a:highlight>
+                  <a:srgbClr val="0000FF"/>
+                </a:highlight>
+              </a:rPr>
+              <a:t>    </a:t>
+            </a:r>
+            <a:r>
+              <a:rPr lang="en-US" dirty="0" err="1">
+                <a:highlight>
+                  <a:srgbClr val="0000FF"/>
+                </a:highlight>
+              </a:rPr>
+              <a:t>first_name</a:t>
+            </a:r>
+            <a:r>
+              <a:rPr lang="en-US" dirty="0">
+                <a:highlight>
+                  <a:srgbClr val="0000FF"/>
+                </a:highlight>
+              </a:rPr>
+              <a:t>: str = Field(</a:t>
+            </a:r>
+            <a:r>
+              <a:rPr lang="en-US" dirty="0" err="1">
+                <a:highlight>
+                  <a:srgbClr val="0000FF"/>
+                </a:highlight>
+              </a:rPr>
+              <a:t>min_length</a:t>
+            </a:r>
+            <a:r>
+              <a:rPr lang="en-US" dirty="0">
+                <a:highlight>
+                  <a:srgbClr val="0000FF"/>
+                </a:highlight>
+              </a:rPr>
+              <a:t>=1, </a:t>
+            </a:r>
+            <a:r>
+              <a:rPr lang="en-US" dirty="0" err="1">
+                <a:highlight>
+                  <a:srgbClr val="0000FF"/>
+                </a:highlight>
+              </a:rPr>
+              <a:t>max_length</a:t>
+            </a:r>
+            <a:r>
+              <a:rPr lang="en-US" dirty="0">
+                <a:highlight>
+                  <a:srgbClr val="0000FF"/>
+                </a:highlight>
+              </a:rPr>
+              <a:t>=50)</a:t>
+            </a:r>
+          </a:p>
+          <a:p>
+            <a:pPr algn="ctr">
+              <a:defRPr sz="1200">
+                <a:solidFill>
+                  <a:srgbClr val="FFFFFF"/>
+                </a:solidFill>
+                <a:latin typeface="Consolas"/>
+              </a:defRPr>
+            </a:pPr>
+            <a:endParaRPr lang="en-US" dirty="0">
+              <a:highlight>
+                <a:srgbClr val="0000FF"/>
+              </a:highlight>
+            </a:endParaRPr>
+          </a:p>
+          <a:p>
+            <a:pPr algn="ctr">
+              <a:defRPr sz="1200">
+                <a:solidFill>
+                  <a:srgbClr val="FFFFFF"/>
+                </a:solidFill>
+                <a:latin typeface="Consolas"/>
+              </a:defRPr>
+            </a:pPr>
+            <a:r>
+              <a:rPr lang="en-US" dirty="0">
+                <a:highlight>
+                  <a:srgbClr val="0000FF"/>
+                </a:highlight>
+              </a:rPr>
+              <a:t>    </a:t>
+            </a:r>
+            <a:r>
+              <a:rPr lang="en-US" dirty="0" err="1">
+                <a:highlight>
+                  <a:srgbClr val="0000FF"/>
+                </a:highlight>
+              </a:rPr>
+              <a:t>last_name</a:t>
+            </a:r>
+            <a:r>
+              <a:rPr lang="en-US" dirty="0">
+                <a:highlight>
+                  <a:srgbClr val="0000FF"/>
+                </a:highlight>
+              </a:rPr>
+              <a:t>: str = Field(</a:t>
+            </a:r>
+            <a:r>
+              <a:rPr lang="en-US" dirty="0" err="1">
+                <a:highlight>
+                  <a:srgbClr val="0000FF"/>
+                </a:highlight>
+              </a:rPr>
+              <a:t>min_length</a:t>
+            </a:r>
+            <a:r>
+              <a:rPr lang="en-US" dirty="0">
+                <a:highlight>
+                  <a:srgbClr val="0000FF"/>
+                </a:highlight>
+              </a:rPr>
+              <a:t>=1, </a:t>
+            </a:r>
+            <a:r>
+              <a:rPr lang="en-US" dirty="0" err="1">
+                <a:highlight>
+                  <a:srgbClr val="0000FF"/>
+                </a:highlight>
+              </a:rPr>
+              <a:t>max_length</a:t>
+            </a:r>
+            <a:r>
+              <a:rPr lang="en-US" dirty="0">
+                <a:highlight>
+                  <a:srgbClr val="0000FF"/>
+                </a:highlight>
+              </a:rPr>
+              <a:t>=50)</a:t>
+            </a:r>
+          </a:p>
+          <a:p>
+            <a:pPr algn="ctr">
+              <a:defRPr sz="1200">
+                <a:solidFill>
+                  <a:srgbClr val="FFFFFF"/>
+                </a:solidFill>
+                <a:latin typeface="Consolas"/>
+              </a:defRPr>
+            </a:pPr>
+            <a:endParaRPr lang="en-US" dirty="0">
+              <a:highlight>
+                <a:srgbClr val="0000FF"/>
+              </a:highlight>
+            </a:endParaRPr>
+          </a:p>
+          <a:p>
+            <a:pPr algn="ctr">
+              <a:defRPr sz="1200">
+                <a:solidFill>
+                  <a:srgbClr val="FFFFFF"/>
+                </a:solidFill>
+                <a:latin typeface="Consolas"/>
+              </a:defRPr>
+            </a:pPr>
+            <a:r>
+              <a:rPr lang="en-US" dirty="0">
+                <a:highlight>
+                  <a:srgbClr val="0000FF"/>
+                </a:highlight>
+              </a:rPr>
+              <a:t>    # </a:t>
+            </a:r>
+            <a:r>
+              <a:rPr lang="en-US" dirty="0" err="1">
+                <a:highlight>
+                  <a:srgbClr val="0000FF"/>
+                </a:highlight>
+              </a:rPr>
+              <a:t>EmailStr</a:t>
+            </a:r>
+            <a:r>
+              <a:rPr lang="en-US" dirty="0">
+                <a:highlight>
+                  <a:srgbClr val="0000FF"/>
+                </a:highlight>
+              </a:rPr>
+              <a:t> performs email-format validation.</a:t>
+            </a:r>
+          </a:p>
+          <a:p>
+            <a:pPr algn="ctr">
+              <a:defRPr sz="1200">
+                <a:solidFill>
+                  <a:srgbClr val="FFFFFF"/>
+                </a:solidFill>
+                <a:latin typeface="Consolas"/>
+              </a:defRPr>
+            </a:pPr>
+            <a:r>
+              <a:rPr lang="en-US" dirty="0">
+                <a:highlight>
+                  <a:srgbClr val="0000FF"/>
+                </a:highlight>
+              </a:rPr>
+              <a:t>    email: </a:t>
+            </a:r>
+            <a:r>
+              <a:rPr lang="en-US" dirty="0" err="1">
+                <a:highlight>
+                  <a:srgbClr val="0000FF"/>
+                </a:highlight>
+              </a:rPr>
+              <a:t>EmailStr</a:t>
+            </a:r>
+            <a:endParaRPr lang="en-US" dirty="0">
+              <a:highlight>
+                <a:srgbClr val="0000FF"/>
+              </a:highlight>
+            </a:endParaRPr>
+          </a:p>
+          <a:p>
+            <a:pPr algn="ctr">
+              <a:defRPr sz="1200">
+                <a:solidFill>
+                  <a:srgbClr val="FFFFFF"/>
+                </a:solidFill>
+                <a:latin typeface="Consolas"/>
+              </a:defRPr>
+            </a:pPr>
+            <a:endParaRPr lang="en-US" dirty="0">
+              <a:highlight>
+                <a:srgbClr val="0000FF"/>
+              </a:highlight>
+            </a:endParaRPr>
+          </a:p>
+          <a:p>
+            <a:pPr algn="ctr">
+              <a:defRPr sz="1200">
+                <a:solidFill>
+                  <a:srgbClr val="FFFFFF"/>
+                </a:solidFill>
+                <a:latin typeface="Consolas"/>
+              </a:defRPr>
+            </a:pPr>
+            <a:r>
+              <a:rPr lang="en-US" dirty="0">
+                <a:highlight>
+                  <a:srgbClr val="0000FF"/>
+                </a:highlight>
+              </a:rPr>
+              <a:t>    # Phone number is optional for now.</a:t>
+            </a:r>
+          </a:p>
+          <a:p>
+            <a:pPr algn="ctr">
+              <a:defRPr sz="1200">
+                <a:solidFill>
+                  <a:srgbClr val="FFFFFF"/>
+                </a:solidFill>
+                <a:latin typeface="Consolas"/>
+              </a:defRPr>
+            </a:pPr>
+            <a:r>
+              <a:rPr lang="en-US" dirty="0">
+                <a:highlight>
+                  <a:srgbClr val="0000FF"/>
+                </a:highlight>
+              </a:rPr>
               <a:t>    phone: str | None = None</a:t>
             </a:r>
-            <a:br/>
-            <a:r>
-              <a:t>    role: UserRole = UserRole.RENTER</a:t>
-            </a:r>
-            <a:br/>
-            <a:br/>
-            <a:br/>
-            <a:r>
-              <a:t># Fields returned by our API.</a:t>
-            </a:r>
-            <a:br/>
-            <a:r>
-              <a:t>class UserResponse(UserCreate):</a:t>
-            </a:r>
-            <a:br/>
-            <a:r>
+          </a:p>
+          <a:p>
+            <a:pPr algn="ctr">
+              <a:defRPr sz="1200">
+                <a:solidFill>
+                  <a:srgbClr val="FFFFFF"/>
+                </a:solidFill>
+                <a:latin typeface="Consolas"/>
+              </a:defRPr>
+            </a:pPr>
+            <a:endParaRPr lang="en-US" dirty="0">
+              <a:highlight>
+                <a:srgbClr val="0000FF"/>
+              </a:highlight>
+            </a:endParaRPr>
+          </a:p>
+          <a:p>
+            <a:pPr algn="ctr">
+              <a:defRPr sz="1200">
+                <a:solidFill>
+                  <a:srgbClr val="FFFFFF"/>
+                </a:solidFill>
+                <a:latin typeface="Consolas"/>
+              </a:defRPr>
+            </a:pPr>
+            <a:r>
+              <a:rPr lang="en-US" dirty="0">
+                <a:highlight>
+                  <a:srgbClr val="0000FF"/>
+                </a:highlight>
+              </a:rPr>
+              <a:t>    # Most people registering will be renters,</a:t>
+            </a:r>
+          </a:p>
+          <a:p>
+            <a:pPr algn="ctr">
+              <a:defRPr sz="1200">
+                <a:solidFill>
+                  <a:srgbClr val="FFFFFF"/>
+                </a:solidFill>
+                <a:latin typeface="Consolas"/>
+              </a:defRPr>
+            </a:pPr>
+            <a:r>
+              <a:rPr lang="en-US" dirty="0">
+                <a:highlight>
+                  <a:srgbClr val="0000FF"/>
+                </a:highlight>
+              </a:rPr>
+              <a:t>    # so RENTER is the default role.</a:t>
+            </a:r>
+          </a:p>
+          <a:p>
+            <a:pPr algn="ctr">
+              <a:defRPr sz="1200">
+                <a:solidFill>
+                  <a:srgbClr val="FFFFFF"/>
+                </a:solidFill>
+                <a:latin typeface="Consolas"/>
+              </a:defRPr>
+            </a:pPr>
+            <a:r>
+              <a:rPr lang="en-US" dirty="0">
+                <a:highlight>
+                  <a:srgbClr val="0000FF"/>
+                </a:highlight>
+              </a:rPr>
+              <a:t>    role: </a:t>
+            </a:r>
+            <a:r>
+              <a:rPr lang="en-US" dirty="0" err="1">
+                <a:highlight>
+                  <a:srgbClr val="0000FF"/>
+                </a:highlight>
+              </a:rPr>
+              <a:t>UserRole</a:t>
+            </a:r>
+            <a:r>
+              <a:rPr lang="en-US" dirty="0">
+                <a:highlight>
+                  <a:srgbClr val="0000FF"/>
+                </a:highlight>
+              </a:rPr>
+              <a:t> = </a:t>
+            </a:r>
+            <a:r>
+              <a:rPr lang="en-US" dirty="0" err="1">
+                <a:highlight>
+                  <a:srgbClr val="0000FF"/>
+                </a:highlight>
+              </a:rPr>
+              <a:t>UserRole.RENTER</a:t>
+            </a:r>
+            <a:endParaRPr lang="en-US" dirty="0">
+              <a:highlight>
+                <a:srgbClr val="0000FF"/>
+              </a:highlight>
+            </a:endParaRPr>
+          </a:p>
+          <a:p>
+            <a:pPr algn="ctr">
+              <a:defRPr sz="1200">
+                <a:solidFill>
+                  <a:srgbClr val="FFFFFF"/>
+                </a:solidFill>
+                <a:latin typeface="Consolas"/>
+              </a:defRPr>
+            </a:pPr>
+            <a:endParaRPr lang="en-US" dirty="0">
+              <a:highlight>
+                <a:srgbClr val="0000FF"/>
+              </a:highlight>
+            </a:endParaRPr>
+          </a:p>
+          <a:p>
+            <a:pPr algn="ctr">
+              <a:defRPr sz="1200">
+                <a:solidFill>
+                  <a:srgbClr val="FFFFFF"/>
+                </a:solidFill>
+                <a:latin typeface="Consolas"/>
+              </a:defRPr>
+            </a:pPr>
+            <a:endParaRPr lang="en-US" dirty="0">
+              <a:highlight>
+                <a:srgbClr val="0000FF"/>
+              </a:highlight>
+            </a:endParaRPr>
+          </a:p>
+          <a:p>
+            <a:pPr algn="ctr">
+              <a:defRPr sz="1200">
+                <a:solidFill>
+                  <a:srgbClr val="FFFFFF"/>
+                </a:solidFill>
+                <a:latin typeface="Consolas"/>
+              </a:defRPr>
+            </a:pPr>
+            <a:r>
+              <a:rPr lang="en-US" dirty="0">
+                <a:highlight>
+                  <a:srgbClr val="0000FF"/>
+                </a:highlight>
+              </a:rPr>
+              <a:t># ---------------------------------------------------------</a:t>
+            </a:r>
+          </a:p>
+          <a:p>
+            <a:pPr algn="ctr">
+              <a:defRPr sz="1200">
+                <a:solidFill>
+                  <a:srgbClr val="FFFFFF"/>
+                </a:solidFill>
+                <a:latin typeface="Consolas"/>
+              </a:defRPr>
+            </a:pPr>
+            <a:r>
+              <a:rPr lang="en-US" dirty="0">
+                <a:highlight>
+                  <a:srgbClr val="0000FF"/>
+                </a:highlight>
+              </a:rPr>
+              <a:t># USER RESPONSE</a:t>
+            </a:r>
+          </a:p>
+          <a:p>
+            <a:pPr algn="ctr">
+              <a:defRPr sz="1200">
+                <a:solidFill>
+                  <a:srgbClr val="FFFFFF"/>
+                </a:solidFill>
+                <a:latin typeface="Consolas"/>
+              </a:defRPr>
+            </a:pPr>
+            <a:r>
+              <a:rPr lang="en-US" dirty="0">
+                <a:highlight>
+                  <a:srgbClr val="0000FF"/>
+                </a:highlight>
+              </a:rPr>
+              <a:t># ---------------------------------------------------------</a:t>
+            </a:r>
+          </a:p>
+          <a:p>
+            <a:pPr algn="ctr">
+              <a:defRPr sz="1200">
+                <a:solidFill>
+                  <a:srgbClr val="FFFFFF"/>
+                </a:solidFill>
+                <a:latin typeface="Consolas"/>
+              </a:defRPr>
+            </a:pPr>
+            <a:endParaRPr lang="en-US" dirty="0">
+              <a:highlight>
+                <a:srgbClr val="0000FF"/>
+              </a:highlight>
+            </a:endParaRPr>
+          </a:p>
+          <a:p>
+            <a:pPr algn="ctr">
+              <a:defRPr sz="1200">
+                <a:solidFill>
+                  <a:srgbClr val="FFFFFF"/>
+                </a:solidFill>
+                <a:latin typeface="Consolas"/>
+              </a:defRPr>
+            </a:pPr>
+            <a:r>
+              <a:rPr lang="en-US" dirty="0">
+                <a:highlight>
+                  <a:srgbClr val="0000FF"/>
+                </a:highlight>
+              </a:rPr>
+              <a:t>class </a:t>
+            </a:r>
+            <a:r>
+              <a:rPr lang="en-US" dirty="0" err="1">
+                <a:highlight>
+                  <a:srgbClr val="0000FF"/>
+                </a:highlight>
+              </a:rPr>
+              <a:t>UserResponse</a:t>
+            </a:r>
+            <a:r>
+              <a:rPr lang="en-US" dirty="0">
+                <a:highlight>
+                  <a:srgbClr val="0000FF"/>
+                </a:highlight>
+              </a:rPr>
+              <a:t>(</a:t>
+            </a:r>
+            <a:r>
+              <a:rPr lang="en-US" dirty="0" err="1">
+                <a:highlight>
+                  <a:srgbClr val="0000FF"/>
+                </a:highlight>
+              </a:rPr>
+              <a:t>UserCreate</a:t>
+            </a:r>
+            <a:r>
+              <a:rPr lang="en-US" dirty="0">
+                <a:highlight>
+                  <a:srgbClr val="0000FF"/>
+                </a:highlight>
+              </a:rPr>
+              <a:t>):</a:t>
+            </a:r>
+          </a:p>
+          <a:p>
+            <a:pPr algn="ctr">
+              <a:defRPr sz="1200">
+                <a:solidFill>
+                  <a:srgbClr val="FFFFFF"/>
+                </a:solidFill>
+                <a:latin typeface="Consolas"/>
+              </a:defRPr>
+            </a:pPr>
+            <a:r>
+              <a:rPr lang="en-US" dirty="0">
+                <a:highlight>
+                  <a:srgbClr val="0000FF"/>
+                </a:highlight>
+              </a:rPr>
+              <a:t>    """</a:t>
+            </a:r>
+          </a:p>
+          <a:p>
+            <a:pPr algn="ctr">
+              <a:defRPr sz="1200">
+                <a:solidFill>
+                  <a:srgbClr val="FFFFFF"/>
+                </a:solidFill>
+                <a:latin typeface="Consolas"/>
+              </a:defRPr>
+            </a:pPr>
+            <a:r>
+              <a:rPr lang="en-US" dirty="0">
+                <a:highlight>
+                  <a:srgbClr val="0000FF"/>
+                </a:highlight>
+              </a:rPr>
+              <a:t>    Defines what our API returns for a user.</a:t>
+            </a:r>
+          </a:p>
+          <a:p>
+            <a:pPr algn="ctr">
+              <a:defRPr sz="1200">
+                <a:solidFill>
+                  <a:srgbClr val="FFFFFF"/>
+                </a:solidFill>
+                <a:latin typeface="Consolas"/>
+              </a:defRPr>
+            </a:pPr>
+            <a:endParaRPr lang="en-US" dirty="0">
+              <a:highlight>
+                <a:srgbClr val="0000FF"/>
+              </a:highlight>
+            </a:endParaRPr>
+          </a:p>
+          <a:p>
+            <a:pPr algn="ctr">
+              <a:defRPr sz="1200">
+                <a:solidFill>
+                  <a:srgbClr val="FFFFFF"/>
+                </a:solidFill>
+                <a:latin typeface="Consolas"/>
+              </a:defRPr>
+            </a:pPr>
+            <a:r>
+              <a:rPr lang="en-US" dirty="0">
+                <a:highlight>
+                  <a:srgbClr val="0000FF"/>
+                </a:highlight>
+              </a:rPr>
+              <a:t>    </a:t>
+            </a:r>
+            <a:r>
+              <a:rPr lang="en-US" dirty="0" err="1">
+                <a:highlight>
+                  <a:srgbClr val="0000FF"/>
+                </a:highlight>
+              </a:rPr>
+              <a:t>UserResponse</a:t>
+            </a:r>
+            <a:r>
+              <a:rPr lang="en-US" dirty="0">
+                <a:highlight>
+                  <a:srgbClr val="0000FF"/>
+                </a:highlight>
+              </a:rPr>
+              <a:t> inherits all fields from </a:t>
+            </a:r>
+            <a:r>
+              <a:rPr lang="en-US" dirty="0" err="1">
+                <a:highlight>
+                  <a:srgbClr val="0000FF"/>
+                </a:highlight>
+              </a:rPr>
+              <a:t>UserCreate</a:t>
+            </a:r>
+            <a:r>
+              <a:rPr lang="en-US" dirty="0">
+                <a:highlight>
+                  <a:srgbClr val="0000FF"/>
+                </a:highlight>
+              </a:rPr>
+              <a:t>:</a:t>
+            </a:r>
+          </a:p>
+          <a:p>
+            <a:pPr algn="ctr">
+              <a:defRPr sz="1200">
+                <a:solidFill>
+                  <a:srgbClr val="FFFFFF"/>
+                </a:solidFill>
+                <a:latin typeface="Consolas"/>
+              </a:defRPr>
+            </a:pPr>
+            <a:endParaRPr lang="en-US" dirty="0">
+              <a:highlight>
+                <a:srgbClr val="0000FF"/>
+              </a:highlight>
+            </a:endParaRPr>
+          </a:p>
+          <a:p>
+            <a:pPr algn="ctr">
+              <a:defRPr sz="1200">
+                <a:solidFill>
+                  <a:srgbClr val="FFFFFF"/>
+                </a:solidFill>
+                <a:latin typeface="Consolas"/>
+              </a:defRPr>
+            </a:pPr>
+            <a:r>
+              <a:rPr lang="en-US" dirty="0">
+                <a:highlight>
+                  <a:srgbClr val="0000FF"/>
+                </a:highlight>
+              </a:rPr>
+              <a:t>        </a:t>
+            </a:r>
+            <a:r>
+              <a:rPr lang="en-US" dirty="0" err="1">
+                <a:highlight>
+                  <a:srgbClr val="0000FF"/>
+                </a:highlight>
+              </a:rPr>
+              <a:t>first_name</a:t>
+            </a:r>
+            <a:endParaRPr lang="en-US" dirty="0">
+              <a:highlight>
+                <a:srgbClr val="0000FF"/>
+              </a:highlight>
+            </a:endParaRPr>
+          </a:p>
+          <a:p>
+            <a:pPr algn="ctr">
+              <a:defRPr sz="1200">
+                <a:solidFill>
+                  <a:srgbClr val="FFFFFF"/>
+                </a:solidFill>
+                <a:latin typeface="Consolas"/>
+              </a:defRPr>
+            </a:pPr>
+            <a:r>
+              <a:rPr lang="en-US" dirty="0">
+                <a:highlight>
+                  <a:srgbClr val="0000FF"/>
+                </a:highlight>
+              </a:rPr>
+              <a:t>        </a:t>
+            </a:r>
+            <a:r>
+              <a:rPr lang="en-US" dirty="0" err="1">
+                <a:highlight>
+                  <a:srgbClr val="0000FF"/>
+                </a:highlight>
+              </a:rPr>
+              <a:t>last_name</a:t>
+            </a:r>
+            <a:endParaRPr lang="en-US" dirty="0">
+              <a:highlight>
+                <a:srgbClr val="0000FF"/>
+              </a:highlight>
+            </a:endParaRPr>
+          </a:p>
+          <a:p>
+            <a:pPr algn="ctr">
+              <a:defRPr sz="1200">
+                <a:solidFill>
+                  <a:srgbClr val="FFFFFF"/>
+                </a:solidFill>
+                <a:latin typeface="Consolas"/>
+              </a:defRPr>
+            </a:pPr>
+            <a:r>
+              <a:rPr lang="en-US" dirty="0">
+                <a:highlight>
+                  <a:srgbClr val="0000FF"/>
+                </a:highlight>
+              </a:rPr>
+              <a:t>        email</a:t>
+            </a:r>
+          </a:p>
+          <a:p>
+            <a:pPr algn="ctr">
+              <a:defRPr sz="1200">
+                <a:solidFill>
+                  <a:srgbClr val="FFFFFF"/>
+                </a:solidFill>
+                <a:latin typeface="Consolas"/>
+              </a:defRPr>
+            </a:pPr>
+            <a:r>
+              <a:rPr lang="en-US" dirty="0">
+                <a:highlight>
+                  <a:srgbClr val="0000FF"/>
+                </a:highlight>
+              </a:rPr>
+              <a:t>        phone</a:t>
+            </a:r>
+          </a:p>
+          <a:p>
+            <a:pPr algn="ctr">
+              <a:defRPr sz="1200">
+                <a:solidFill>
+                  <a:srgbClr val="FFFFFF"/>
+                </a:solidFill>
+                <a:latin typeface="Consolas"/>
+              </a:defRPr>
+            </a:pPr>
+            <a:r>
+              <a:rPr lang="en-US" dirty="0">
+                <a:highlight>
+                  <a:srgbClr val="0000FF"/>
+                </a:highlight>
+              </a:rPr>
+              <a:t>        role</a:t>
+            </a:r>
+          </a:p>
+          <a:p>
+            <a:pPr algn="ctr">
+              <a:defRPr sz="1200">
+                <a:solidFill>
+                  <a:srgbClr val="FFFFFF"/>
+                </a:solidFill>
+                <a:latin typeface="Consolas"/>
+              </a:defRPr>
+            </a:pPr>
+            <a:endParaRPr lang="en-US" dirty="0">
+              <a:highlight>
+                <a:srgbClr val="0000FF"/>
+              </a:highlight>
+            </a:endParaRPr>
+          </a:p>
+          <a:p>
+            <a:pPr algn="ctr">
+              <a:defRPr sz="1200">
+                <a:solidFill>
+                  <a:srgbClr val="FFFFFF"/>
+                </a:solidFill>
+                <a:latin typeface="Consolas"/>
+              </a:defRPr>
+            </a:pPr>
+            <a:r>
+              <a:rPr lang="en-US" dirty="0">
+                <a:highlight>
+                  <a:srgbClr val="0000FF"/>
+                </a:highlight>
+              </a:rPr>
+              <a:t>    and adds the system-generated user ID.</a:t>
+            </a:r>
+          </a:p>
+          <a:p>
+            <a:pPr algn="ctr">
+              <a:defRPr sz="1200">
+                <a:solidFill>
+                  <a:srgbClr val="FFFFFF"/>
+                </a:solidFill>
+                <a:latin typeface="Consolas"/>
+              </a:defRPr>
+            </a:pPr>
+            <a:r>
+              <a:rPr lang="en-US" dirty="0">
+                <a:highlight>
+                  <a:srgbClr val="0000FF"/>
+                </a:highlight>
+              </a:rPr>
+              <a:t>    """</a:t>
+            </a:r>
+          </a:p>
+          <a:p>
+            <a:pPr algn="ctr">
+              <a:defRPr sz="1200">
+                <a:solidFill>
+                  <a:srgbClr val="FFFFFF"/>
+                </a:solidFill>
+                <a:latin typeface="Consolas"/>
+              </a:defRPr>
+            </a:pPr>
+            <a:endParaRPr lang="en-US" dirty="0">
+              <a:highlight>
+                <a:srgbClr val="0000FF"/>
+              </a:highlight>
+            </a:endParaRPr>
+          </a:p>
+          <a:p>
+            <a:pPr algn="ctr">
+              <a:defRPr sz="1200">
+                <a:solidFill>
+                  <a:srgbClr val="FFFFFF"/>
+                </a:solidFill>
+                <a:latin typeface="Consolas"/>
+              </a:defRPr>
+            </a:pPr>
+            <a:r>
+              <a:rPr lang="en-US" dirty="0">
+                <a:highlight>
+                  <a:srgbClr val="0000FF"/>
+                </a:highlight>
+              </a:rPr>
               <a:t>    id: int</a:t>
             </a:r>
+          </a:p>
+          <a:p>
+            <a:pPr algn="ctr">
+              <a:defRPr sz="1200">
+                <a:solidFill>
+                  <a:srgbClr val="FFFFFF"/>
+                </a:solidFill>
+                <a:latin typeface="Consolas"/>
+              </a:defRPr>
+            </a:pPr>
+            <a:endParaRPr lang="en-US" dirty="0">
+              <a:highlight>
+                <a:srgbClr val="0000FF"/>
+              </a:highlight>
+            </a:endParaRPr>
+          </a:p>
+          <a:p>
+            <a:pPr algn="ctr">
+              <a:defRPr sz="1200">
+                <a:solidFill>
+                  <a:srgbClr val="FFFFFF"/>
+                </a:solidFill>
+                <a:latin typeface="Consolas"/>
+              </a:defRPr>
+            </a:pPr>
+            <a:endParaRPr lang="en-US" dirty="0">
+              <a:highlight>
+                <a:srgbClr val="0000FF"/>
+              </a:highlight>
+            </a:endParaRPr>
+          </a:p>
+          <a:p>
+            <a:pPr algn="ctr">
+              <a:defRPr sz="1200">
+                <a:solidFill>
+                  <a:srgbClr val="FFFFFF"/>
+                </a:solidFill>
+                <a:latin typeface="Consolas"/>
+              </a:defRPr>
+            </a:pPr>
+            <a:r>
+              <a:rPr lang="en-US" dirty="0">
+                <a:highlight>
+                  <a:srgbClr val="0000FF"/>
+                </a:highlight>
+              </a:rPr>
+              <a:t># ---------------------------------------------------------</a:t>
+            </a:r>
+          </a:p>
+          <a:p>
+            <a:pPr algn="ctr">
+              <a:defRPr sz="1200">
+                <a:solidFill>
+                  <a:srgbClr val="FFFFFF"/>
+                </a:solidFill>
+                <a:latin typeface="Consolas"/>
+              </a:defRPr>
+            </a:pPr>
+            <a:r>
+              <a:rPr lang="en-US" dirty="0">
+                <a:highlight>
+                  <a:srgbClr val="0000FF"/>
+                </a:highlight>
+              </a:rPr>
+              <a:t># UPDATE USER</a:t>
+            </a:r>
+          </a:p>
+          <a:p>
+            <a:pPr algn="ctr">
+              <a:defRPr sz="1200">
+                <a:solidFill>
+                  <a:srgbClr val="FFFFFF"/>
+                </a:solidFill>
+                <a:latin typeface="Consolas"/>
+              </a:defRPr>
+            </a:pPr>
+            <a:r>
+              <a:rPr lang="en-US" dirty="0">
+                <a:highlight>
+                  <a:srgbClr val="0000FF"/>
+                </a:highlight>
+              </a:rPr>
+              <a:t># ---------------------------------------------------------</a:t>
+            </a:r>
+          </a:p>
+          <a:p>
+            <a:pPr algn="ctr">
+              <a:defRPr sz="1200">
+                <a:solidFill>
+                  <a:srgbClr val="FFFFFF"/>
+                </a:solidFill>
+                <a:latin typeface="Consolas"/>
+              </a:defRPr>
+            </a:pPr>
+            <a:endParaRPr lang="en-US" dirty="0">
+              <a:highlight>
+                <a:srgbClr val="0000FF"/>
+              </a:highlight>
+            </a:endParaRPr>
+          </a:p>
+          <a:p>
+            <a:pPr algn="ctr">
+              <a:defRPr sz="1200">
+                <a:solidFill>
+                  <a:srgbClr val="FFFFFF"/>
+                </a:solidFill>
+                <a:latin typeface="Consolas"/>
+              </a:defRPr>
+            </a:pPr>
+            <a:r>
+              <a:rPr lang="en-US" dirty="0">
+                <a:highlight>
+                  <a:srgbClr val="0000FF"/>
+                </a:highlight>
+              </a:rPr>
+              <a:t>class </a:t>
+            </a:r>
+            <a:r>
+              <a:rPr lang="en-US" dirty="0" err="1">
+                <a:highlight>
+                  <a:srgbClr val="0000FF"/>
+                </a:highlight>
+              </a:rPr>
+              <a:t>UserUpdate</a:t>
+            </a:r>
+            <a:r>
+              <a:rPr lang="en-US" dirty="0">
+                <a:highlight>
+                  <a:srgbClr val="0000FF"/>
+                </a:highlight>
+              </a:rPr>
+              <a:t>(</a:t>
+            </a:r>
+            <a:r>
+              <a:rPr lang="en-US" dirty="0" err="1">
+                <a:highlight>
+                  <a:srgbClr val="0000FF"/>
+                </a:highlight>
+              </a:rPr>
+              <a:t>BaseModel</a:t>
+            </a:r>
+            <a:r>
+              <a:rPr lang="en-US" dirty="0">
+                <a:highlight>
+                  <a:srgbClr val="0000FF"/>
+                </a:highlight>
+              </a:rPr>
+              <a:t>):</a:t>
+            </a:r>
+          </a:p>
+          <a:p>
+            <a:pPr algn="ctr">
+              <a:defRPr sz="1200">
+                <a:solidFill>
+                  <a:srgbClr val="FFFFFF"/>
+                </a:solidFill>
+                <a:latin typeface="Consolas"/>
+              </a:defRPr>
+            </a:pPr>
+            <a:r>
+              <a:rPr lang="en-US" dirty="0">
+                <a:highlight>
+                  <a:srgbClr val="0000FF"/>
+                </a:highlight>
+              </a:rPr>
+              <a:t>    """</a:t>
+            </a:r>
+          </a:p>
+          <a:p>
+            <a:pPr algn="ctr">
+              <a:defRPr sz="1200">
+                <a:solidFill>
+                  <a:srgbClr val="FFFFFF"/>
+                </a:solidFill>
+                <a:latin typeface="Consolas"/>
+              </a:defRPr>
+            </a:pPr>
+            <a:r>
+              <a:rPr lang="en-US" dirty="0">
+                <a:highlight>
+                  <a:srgbClr val="0000FF"/>
+                </a:highlight>
+              </a:rPr>
+              <a:t>    Fields that can be changed for an existing user.</a:t>
+            </a:r>
+          </a:p>
+          <a:p>
+            <a:pPr algn="ctr">
+              <a:defRPr sz="1200">
+                <a:solidFill>
+                  <a:srgbClr val="FFFFFF"/>
+                </a:solidFill>
+                <a:latin typeface="Consolas"/>
+              </a:defRPr>
+            </a:pPr>
+            <a:endParaRPr lang="en-US" dirty="0">
+              <a:highlight>
+                <a:srgbClr val="0000FF"/>
+              </a:highlight>
+            </a:endParaRPr>
+          </a:p>
+          <a:p>
+            <a:pPr algn="ctr">
+              <a:defRPr sz="1200">
+                <a:solidFill>
+                  <a:srgbClr val="FFFFFF"/>
+                </a:solidFill>
+                <a:latin typeface="Consolas"/>
+              </a:defRPr>
+            </a:pPr>
+            <a:r>
+              <a:rPr lang="en-US" dirty="0">
+                <a:highlight>
+                  <a:srgbClr val="0000FF"/>
+                </a:highlight>
+              </a:rPr>
+              <a:t>    All fields are optional because a client may want</a:t>
+            </a:r>
+          </a:p>
+          <a:p>
+            <a:pPr algn="ctr">
+              <a:defRPr sz="1200">
+                <a:solidFill>
+                  <a:srgbClr val="FFFFFF"/>
+                </a:solidFill>
+                <a:latin typeface="Consolas"/>
+              </a:defRPr>
+            </a:pPr>
+            <a:r>
+              <a:rPr lang="en-US" dirty="0">
+                <a:highlight>
+                  <a:srgbClr val="0000FF"/>
+                </a:highlight>
+              </a:rPr>
+              <a:t>    to update only one piece of information.</a:t>
+            </a:r>
+          </a:p>
+          <a:p>
+            <a:pPr algn="ctr">
+              <a:defRPr sz="1200">
+                <a:solidFill>
+                  <a:srgbClr val="FFFFFF"/>
+                </a:solidFill>
+                <a:latin typeface="Consolas"/>
+              </a:defRPr>
+            </a:pPr>
+            <a:r>
+              <a:rPr lang="en-US" dirty="0">
+                <a:highlight>
+                  <a:srgbClr val="0000FF"/>
+                </a:highlight>
+              </a:rPr>
+              <a:t>    """</a:t>
+            </a:r>
+          </a:p>
+          <a:p>
+            <a:pPr algn="ctr">
+              <a:defRPr sz="1200">
+                <a:solidFill>
+                  <a:srgbClr val="FFFFFF"/>
+                </a:solidFill>
+                <a:latin typeface="Consolas"/>
+              </a:defRPr>
+            </a:pPr>
+            <a:endParaRPr lang="en-US" dirty="0">
+              <a:highlight>
+                <a:srgbClr val="0000FF"/>
+              </a:highlight>
+            </a:endParaRPr>
+          </a:p>
+          <a:p>
+            <a:pPr algn="ctr">
+              <a:defRPr sz="1200">
+                <a:solidFill>
+                  <a:srgbClr val="FFFFFF"/>
+                </a:solidFill>
+                <a:latin typeface="Consolas"/>
+              </a:defRPr>
+            </a:pPr>
+            <a:r>
+              <a:rPr lang="en-US" dirty="0">
+                <a:highlight>
+                  <a:srgbClr val="0000FF"/>
+                </a:highlight>
+              </a:rPr>
+              <a:t>    </a:t>
+            </a:r>
+            <a:r>
+              <a:rPr lang="en-US" dirty="0" err="1">
+                <a:highlight>
+                  <a:srgbClr val="0000FF"/>
+                </a:highlight>
+              </a:rPr>
+              <a:t>first_name</a:t>
+            </a:r>
+            <a:r>
+              <a:rPr lang="en-US" dirty="0">
+                <a:highlight>
+                  <a:srgbClr val="0000FF"/>
+                </a:highlight>
+              </a:rPr>
+              <a:t>: str | None = Field(</a:t>
+            </a:r>
+          </a:p>
+          <a:p>
+            <a:pPr algn="ctr">
+              <a:defRPr sz="1200">
+                <a:solidFill>
+                  <a:srgbClr val="FFFFFF"/>
+                </a:solidFill>
+                <a:latin typeface="Consolas"/>
+              </a:defRPr>
+            </a:pPr>
+            <a:r>
+              <a:rPr lang="en-US" dirty="0">
+                <a:highlight>
+                  <a:srgbClr val="0000FF"/>
+                </a:highlight>
+              </a:rPr>
+              <a:t>        default=None,</a:t>
+            </a:r>
+          </a:p>
+          <a:p>
+            <a:pPr algn="ctr">
+              <a:defRPr sz="1200">
+                <a:solidFill>
+                  <a:srgbClr val="FFFFFF"/>
+                </a:solidFill>
+                <a:latin typeface="Consolas"/>
+              </a:defRPr>
+            </a:pPr>
+            <a:r>
+              <a:rPr lang="en-US" dirty="0">
+                <a:highlight>
+                  <a:srgbClr val="0000FF"/>
+                </a:highlight>
+              </a:rPr>
+              <a:t>        </a:t>
+            </a:r>
+            <a:r>
+              <a:rPr lang="en-US" dirty="0" err="1">
+                <a:highlight>
+                  <a:srgbClr val="0000FF"/>
+                </a:highlight>
+              </a:rPr>
+              <a:t>min_length</a:t>
+            </a:r>
+            <a:r>
+              <a:rPr lang="en-US" dirty="0">
+                <a:highlight>
+                  <a:srgbClr val="0000FF"/>
+                </a:highlight>
+              </a:rPr>
+              <a:t>=1,</a:t>
+            </a:r>
+          </a:p>
+          <a:p>
+            <a:pPr algn="ctr">
+              <a:defRPr sz="1200">
+                <a:solidFill>
+                  <a:srgbClr val="FFFFFF"/>
+                </a:solidFill>
+                <a:latin typeface="Consolas"/>
+              </a:defRPr>
+            </a:pPr>
+            <a:r>
+              <a:rPr lang="en-US" dirty="0">
+                <a:highlight>
+                  <a:srgbClr val="0000FF"/>
+                </a:highlight>
+              </a:rPr>
+              <a:t>        </a:t>
+            </a:r>
+            <a:r>
+              <a:rPr lang="en-US" dirty="0" err="1">
+                <a:highlight>
+                  <a:srgbClr val="0000FF"/>
+                </a:highlight>
+              </a:rPr>
+              <a:t>max_length</a:t>
+            </a:r>
+            <a:r>
+              <a:rPr lang="en-US" dirty="0">
+                <a:highlight>
+                  <a:srgbClr val="0000FF"/>
+                </a:highlight>
+              </a:rPr>
+              <a:t>=50,</a:t>
+            </a:r>
+          </a:p>
+          <a:p>
+            <a:pPr algn="ctr">
+              <a:defRPr sz="1200">
+                <a:solidFill>
+                  <a:srgbClr val="FFFFFF"/>
+                </a:solidFill>
+                <a:latin typeface="Consolas"/>
+              </a:defRPr>
+            </a:pPr>
+            <a:r>
+              <a:rPr lang="en-US" dirty="0">
+                <a:highlight>
+                  <a:srgbClr val="0000FF"/>
+                </a:highlight>
+              </a:rPr>
+              <a:t>    )</a:t>
+            </a:r>
+          </a:p>
+          <a:p>
+            <a:pPr algn="ctr">
+              <a:defRPr sz="1200">
+                <a:solidFill>
+                  <a:srgbClr val="FFFFFF"/>
+                </a:solidFill>
+                <a:latin typeface="Consolas"/>
+              </a:defRPr>
+            </a:pPr>
+            <a:endParaRPr lang="en-US" dirty="0">
+              <a:highlight>
+                <a:srgbClr val="0000FF"/>
+              </a:highlight>
+            </a:endParaRPr>
+          </a:p>
+          <a:p>
+            <a:pPr algn="ctr">
+              <a:defRPr sz="1200">
+                <a:solidFill>
+                  <a:srgbClr val="FFFFFF"/>
+                </a:solidFill>
+                <a:latin typeface="Consolas"/>
+              </a:defRPr>
+            </a:pPr>
+            <a:r>
+              <a:rPr lang="en-US" dirty="0">
+                <a:highlight>
+                  <a:srgbClr val="0000FF"/>
+                </a:highlight>
+              </a:rPr>
+              <a:t>    </a:t>
+            </a:r>
+            <a:r>
+              <a:rPr lang="en-US" dirty="0" err="1">
+                <a:highlight>
+                  <a:srgbClr val="0000FF"/>
+                </a:highlight>
+              </a:rPr>
+              <a:t>last_name</a:t>
+            </a:r>
+            <a:r>
+              <a:rPr lang="en-US" dirty="0">
+                <a:highlight>
+                  <a:srgbClr val="0000FF"/>
+                </a:highlight>
+              </a:rPr>
+              <a:t>: str | None = Field(</a:t>
+            </a:r>
+          </a:p>
+          <a:p>
+            <a:pPr algn="ctr">
+              <a:defRPr sz="1200">
+                <a:solidFill>
+                  <a:srgbClr val="FFFFFF"/>
+                </a:solidFill>
+                <a:latin typeface="Consolas"/>
+              </a:defRPr>
+            </a:pPr>
+            <a:r>
+              <a:rPr lang="en-US" dirty="0">
+                <a:highlight>
+                  <a:srgbClr val="0000FF"/>
+                </a:highlight>
+              </a:rPr>
+              <a:t>        default=None,</a:t>
+            </a:r>
+          </a:p>
+          <a:p>
+            <a:pPr algn="ctr">
+              <a:defRPr sz="1200">
+                <a:solidFill>
+                  <a:srgbClr val="FFFFFF"/>
+                </a:solidFill>
+                <a:latin typeface="Consolas"/>
+              </a:defRPr>
+            </a:pPr>
+            <a:r>
+              <a:rPr lang="en-US" dirty="0">
+                <a:highlight>
+                  <a:srgbClr val="0000FF"/>
+                </a:highlight>
+              </a:rPr>
+              <a:t>        </a:t>
+            </a:r>
+            <a:r>
+              <a:rPr lang="en-US" dirty="0" err="1">
+                <a:highlight>
+                  <a:srgbClr val="0000FF"/>
+                </a:highlight>
+              </a:rPr>
+              <a:t>min_length</a:t>
+            </a:r>
+            <a:r>
+              <a:rPr lang="en-US" dirty="0">
+                <a:highlight>
+                  <a:srgbClr val="0000FF"/>
+                </a:highlight>
+              </a:rPr>
+              <a:t>=1,</a:t>
+            </a:r>
+          </a:p>
+          <a:p>
+            <a:pPr algn="ctr">
+              <a:defRPr sz="1200">
+                <a:solidFill>
+                  <a:srgbClr val="FFFFFF"/>
+                </a:solidFill>
+                <a:latin typeface="Consolas"/>
+              </a:defRPr>
+            </a:pPr>
+            <a:r>
+              <a:rPr lang="en-US" dirty="0">
+                <a:highlight>
+                  <a:srgbClr val="0000FF"/>
+                </a:highlight>
+              </a:rPr>
+              <a:t>        </a:t>
+            </a:r>
+            <a:r>
+              <a:rPr lang="en-US" dirty="0" err="1">
+                <a:highlight>
+                  <a:srgbClr val="0000FF"/>
+                </a:highlight>
+              </a:rPr>
+              <a:t>max_length</a:t>
+            </a:r>
+            <a:r>
+              <a:rPr lang="en-US" dirty="0">
+                <a:highlight>
+                  <a:srgbClr val="0000FF"/>
+                </a:highlight>
+              </a:rPr>
+              <a:t>=50,</a:t>
+            </a:r>
+          </a:p>
+          <a:p>
+            <a:pPr algn="ctr">
+              <a:defRPr sz="1200">
+                <a:solidFill>
+                  <a:srgbClr val="FFFFFF"/>
+                </a:solidFill>
+                <a:latin typeface="Consolas"/>
+              </a:defRPr>
+            </a:pPr>
+            <a:r>
+              <a:rPr lang="en-US" dirty="0">
+                <a:highlight>
+                  <a:srgbClr val="0000FF"/>
+                </a:highlight>
+              </a:rPr>
+              <a:t>    )</a:t>
+            </a:r>
+          </a:p>
+          <a:p>
+            <a:pPr algn="ctr">
+              <a:defRPr sz="1200">
+                <a:solidFill>
+                  <a:srgbClr val="FFFFFF"/>
+                </a:solidFill>
+                <a:latin typeface="Consolas"/>
+              </a:defRPr>
+            </a:pPr>
+            <a:endParaRPr lang="en-US" dirty="0">
+              <a:highlight>
+                <a:srgbClr val="0000FF"/>
+              </a:highlight>
+            </a:endParaRPr>
+          </a:p>
+          <a:p>
+            <a:pPr algn="ctr">
+              <a:defRPr sz="1200">
+                <a:solidFill>
+                  <a:srgbClr val="FFFFFF"/>
+                </a:solidFill>
+                <a:latin typeface="Consolas"/>
+              </a:defRPr>
+            </a:pPr>
+            <a:r>
+              <a:rPr lang="en-US" dirty="0">
+                <a:highlight>
+                  <a:srgbClr val="0000FF"/>
+                </a:highlight>
+              </a:rPr>
+              <a:t>    email: </a:t>
+            </a:r>
+            <a:r>
+              <a:rPr lang="en-US" dirty="0" err="1">
+                <a:highlight>
+                  <a:srgbClr val="0000FF"/>
+                </a:highlight>
+              </a:rPr>
+              <a:t>EmailStr</a:t>
+            </a:r>
+            <a:r>
+              <a:rPr lang="en-US" dirty="0">
+                <a:highlight>
+                  <a:srgbClr val="0000FF"/>
+                </a:highlight>
+              </a:rPr>
+              <a:t> | None = None</a:t>
+            </a:r>
+          </a:p>
+          <a:p>
+            <a:pPr algn="ctr">
+              <a:defRPr sz="1200">
+                <a:solidFill>
+                  <a:srgbClr val="FFFFFF"/>
+                </a:solidFill>
+                <a:latin typeface="Consolas"/>
+              </a:defRPr>
+            </a:pPr>
+            <a:endParaRPr lang="en-US" dirty="0">
+              <a:highlight>
+                <a:srgbClr val="0000FF"/>
+              </a:highlight>
+            </a:endParaRPr>
+          </a:p>
+          <a:p>
+            <a:pPr algn="ctr">
+              <a:defRPr sz="1200">
+                <a:solidFill>
+                  <a:srgbClr val="FFFFFF"/>
+                </a:solidFill>
+                <a:latin typeface="Consolas"/>
+              </a:defRPr>
+            </a:pPr>
+            <a:r>
+              <a:rPr lang="en-US" dirty="0">
+                <a:highlight>
+                  <a:srgbClr val="0000FF"/>
+                </a:highlight>
+              </a:rPr>
+              <a:t>    phone: str | None = None</a:t>
+            </a:r>
+          </a:p>
+          <a:p>
+            <a:pPr algn="ctr">
+              <a:defRPr sz="1200">
+                <a:solidFill>
+                  <a:srgbClr val="FFFFFF"/>
+                </a:solidFill>
+                <a:latin typeface="Consolas"/>
+              </a:defRPr>
+            </a:pPr>
+            <a:endParaRPr lang="en-US" dirty="0">
+              <a:highlight>
+                <a:srgbClr val="0000FF"/>
+              </a:highlight>
+            </a:endParaRPr>
+          </a:p>
+          <a:p>
+            <a:pPr algn="ctr">
+              <a:defRPr sz="1200">
+                <a:solidFill>
+                  <a:srgbClr val="FFFFFF"/>
+                </a:solidFill>
+                <a:latin typeface="Consolas"/>
+              </a:defRPr>
+            </a:pPr>
+            <a:r>
+              <a:rPr lang="en-US" dirty="0">
+                <a:highlight>
+                  <a:srgbClr val="0000FF"/>
+                </a:highlight>
+              </a:rPr>
+              <a:t>    role: </a:t>
+            </a:r>
+            <a:r>
+              <a:rPr lang="en-US" dirty="0" err="1">
+                <a:highlight>
+                  <a:srgbClr val="0000FF"/>
+                </a:highlight>
+              </a:rPr>
+              <a:t>UserRole</a:t>
+            </a:r>
+            <a:r>
+              <a:rPr lang="en-US" dirty="0">
+                <a:highlight>
+                  <a:srgbClr val="0000FF"/>
+                </a:highlight>
+              </a:rPr>
+              <a:t> | None = None</a:t>
+            </a:r>
+            <a:endParaRPr dirty="0">
+              <a:highlight>
+                <a:srgbClr val="0000FF"/>
+              </a:highlight>
+            </a:endParaRPr>
           </a:p>
         </p:txBody>
       </p:sp>
